--- a/design/templates/papyrus/template.pptx
+++ b/design/templates/papyrus/template.pptx
@@ -126,7 +126,7 @@
           <p:cNvPr id="9" name="creative_background">
             <a:extLst>
               <a:ext uri="{FF2B5EF4-FFF2-40B4-BE49-F238E27FC236}">
-                <a16:creationId xmlns:a16="http://schemas.microsoft.com/office/drawing/2014/main" id="{0119CC88-46AD-1C28-1B65-9BDCD18B8BE6}"/>
+                <a16:creationId xmlns:a16="http://schemas.microsoft.com/office/drawing/2014/main" id="{BB6ECEA3-DDF0-23A9-D017-298D00B05042}"/>
               </a:ext>
             </a:extLst>
           </p:cNvPr>
@@ -290,7 +290,7 @@
             </a:lvl1pPr>
           </a:lstStyle>
           <a:p>
-            <a:fld id="{596016C9-F9DB-4EE1-B518-EB72C8994E73}" type="datetimeFigureOut">
+            <a:fld id="{8A86AB56-393C-4917-9670-5C316C4C0775}" type="datetimeFigureOut">
               <a:rPr lang="en-US" smtClean="0"/>
               <a:t>10/3/2026</a:t>
             </a:fld>
@@ -332,7 +332,7 @@
           <a:bodyPr/>
           <a:lstStyle/>
           <a:p>
-            <a:fld id="{E3F824D1-671D-418F-B16B-13B951B4F770}" type="slidenum">
+            <a:fld id="{FC63DECE-DCAF-48B3-9E38-EA00981B3229}" type="slidenum">
               <a:rPr lang="en-US" smtClean="0"/>
               <a:t>‹#›</a:t>
             </a:fld>
@@ -343,7 +343,7 @@
     </p:spTree>
     <p:extLst>
       <p:ext uri="{BB962C8B-B14F-4D97-AF65-F5344CB8AC3E}">
-        <p14:creationId xmlns:p14="http://schemas.microsoft.com/office/powerpoint/2010/main" val="3274011541"/>
+        <p14:creationId xmlns:p14="http://schemas.microsoft.com/office/powerpoint/2010/main" val="72173667"/>
       </p:ext>
     </p:extLst>
   </p:cSld>
@@ -375,7 +375,7 @@
           <p:cNvPr id="7" name="creative_background">
             <a:extLst>
               <a:ext uri="{FF2B5EF4-FFF2-40B4-BE49-F238E27FC236}">
-                <a16:creationId xmlns:a16="http://schemas.microsoft.com/office/drawing/2014/main" id="{9724E5B7-9DF8-2CA8-32E8-7E4655B5E477}"/>
+                <a16:creationId xmlns:a16="http://schemas.microsoft.com/office/drawing/2014/main" id="{9DE1B459-29E3-F053-FE18-739DF6C639DB}"/>
               </a:ext>
             </a:extLst>
           </p:cNvPr>
@@ -448,7 +448,7 @@
           <a:bodyPr/>
           <a:lstStyle/>
           <a:p>
-            <a:fld id="{596016C9-F9DB-4EE1-B518-EB72C8994E73}" type="datetimeFigureOut">
+            <a:fld id="{8A86AB56-393C-4917-9670-5C316C4C0775}" type="datetimeFigureOut">
               <a:rPr lang="en-US" smtClean="0"/>
               <a:t>10/3/2026</a:t>
             </a:fld>
@@ -490,7 +490,7 @@
           <a:bodyPr/>
           <a:lstStyle/>
           <a:p>
-            <a:fld id="{E3F824D1-671D-418F-B16B-13B951B4F770}" type="slidenum">
+            <a:fld id="{FC63DECE-DCAF-48B3-9E38-EA00981B3229}" type="slidenum">
               <a:rPr lang="en-US" smtClean="0"/>
               <a:t>‹#›</a:t>
             </a:fld>
@@ -503,7 +503,7 @@
           <p:cNvPr id="8" name="body">
             <a:extLst>
               <a:ext uri="{FF2B5EF4-FFF2-40B4-BE49-F238E27FC236}">
-                <a16:creationId xmlns:a16="http://schemas.microsoft.com/office/drawing/2014/main" id="{0F9DBE2D-F778-FDE9-DBDE-C8ED2B27779E}"/>
+                <a16:creationId xmlns:a16="http://schemas.microsoft.com/office/drawing/2014/main" id="{30DB15DA-BBCC-8F60-7FA9-CD16AB475016}"/>
               </a:ext>
             </a:extLst>
           </p:cNvPr>
@@ -543,7 +543,7 @@
           <p:cNvPr id="9" name="source">
             <a:extLst>
               <a:ext uri="{FF2B5EF4-FFF2-40B4-BE49-F238E27FC236}">
-                <a16:creationId xmlns:a16="http://schemas.microsoft.com/office/drawing/2014/main" id="{E87922DE-7165-E61F-A529-28603A58265D}"/>
+                <a16:creationId xmlns:a16="http://schemas.microsoft.com/office/drawing/2014/main" id="{E5C1C171-CD31-B750-BC62-D88F2EF86B88}"/>
               </a:ext>
             </a:extLst>
           </p:cNvPr>
@@ -598,7 +598,7 @@
     </p:spTree>
     <p:extLst>
       <p:ext uri="{BB962C8B-B14F-4D97-AF65-F5344CB8AC3E}">
-        <p14:creationId xmlns:p14="http://schemas.microsoft.com/office/powerpoint/2010/main" val="2832998146"/>
+        <p14:creationId xmlns:p14="http://schemas.microsoft.com/office/powerpoint/2010/main" val="2850072880"/>
       </p:ext>
     </p:extLst>
   </p:cSld>
@@ -630,7 +630,7 @@
           <p:cNvPr id="7" name="creative_background">
             <a:extLst>
               <a:ext uri="{FF2B5EF4-FFF2-40B4-BE49-F238E27FC236}">
-                <a16:creationId xmlns:a16="http://schemas.microsoft.com/office/drawing/2014/main" id="{CED3E6B7-829A-F2EC-F02A-EC6ACD5B3539}"/>
+                <a16:creationId xmlns:a16="http://schemas.microsoft.com/office/drawing/2014/main" id="{2F57A078-2FF6-B3CD-95FA-C6135E0EF62C}"/>
               </a:ext>
             </a:extLst>
           </p:cNvPr>
@@ -703,7 +703,7 @@
           <a:bodyPr/>
           <a:lstStyle/>
           <a:p>
-            <a:fld id="{596016C9-F9DB-4EE1-B518-EB72C8994E73}" type="datetimeFigureOut">
+            <a:fld id="{8A86AB56-393C-4917-9670-5C316C4C0775}" type="datetimeFigureOut">
               <a:rPr lang="en-US" smtClean="0"/>
               <a:t>10/3/2026</a:t>
             </a:fld>
@@ -745,7 +745,7 @@
           <a:bodyPr/>
           <a:lstStyle/>
           <a:p>
-            <a:fld id="{E3F824D1-671D-418F-B16B-13B951B4F770}" type="slidenum">
+            <a:fld id="{FC63DECE-DCAF-48B3-9E38-EA00981B3229}" type="slidenum">
               <a:rPr lang="en-US" smtClean="0"/>
               <a:t>‹#›</a:t>
             </a:fld>
@@ -758,7 +758,7 @@
           <p:cNvPr id="8" name="body">
             <a:extLst>
               <a:ext uri="{FF2B5EF4-FFF2-40B4-BE49-F238E27FC236}">
-                <a16:creationId xmlns:a16="http://schemas.microsoft.com/office/drawing/2014/main" id="{CC2BBB07-7990-6077-2117-2B44264EA5F2}"/>
+                <a16:creationId xmlns:a16="http://schemas.microsoft.com/office/drawing/2014/main" id="{CFA5C973-19C1-82E0-2F87-4B75F4D635B0}"/>
               </a:ext>
             </a:extLst>
           </p:cNvPr>
@@ -801,7 +801,7 @@
     </p:spTree>
     <p:extLst>
       <p:ext uri="{BB962C8B-B14F-4D97-AF65-F5344CB8AC3E}">
-        <p14:creationId xmlns:p14="http://schemas.microsoft.com/office/powerpoint/2010/main" val="2098032696"/>
+        <p14:creationId xmlns:p14="http://schemas.microsoft.com/office/powerpoint/2010/main" val="990606608"/>
       </p:ext>
     </p:extLst>
   </p:cSld>
@@ -877,7 +877,7 @@
           <p:cNvPr id="6" name="section_number">
             <a:extLst>
               <a:ext uri="{FF2B5EF4-FFF2-40B4-BE49-F238E27FC236}">
-                <a16:creationId xmlns:a16="http://schemas.microsoft.com/office/drawing/2014/main" id="{0CC5FA85-4160-CAEE-97FC-07E2DC26232B}"/>
+                <a16:creationId xmlns:a16="http://schemas.microsoft.com/office/drawing/2014/main" id="{0FEBE1C4-CA39-0311-4482-3E4418589548}"/>
               </a:ext>
             </a:extLst>
           </p:cNvPr>
@@ -909,7 +909,7 @@
               <a:buFontTx/>
               <a:buNone/>
               <a:defRPr sz="16000" b="1">
-                <a:ln w="19050">
+                <a:ln w="57150">
                   <a:solidFill>
                     <a:srgbClr val="5E99EB"/>
                   </a:solidFill>
@@ -933,7 +933,7 @@
           <p:cNvPr id="7" name="subtitle">
             <a:extLst>
               <a:ext uri="{FF2B5EF4-FFF2-40B4-BE49-F238E27FC236}">
-                <a16:creationId xmlns:a16="http://schemas.microsoft.com/office/drawing/2014/main" id="{1CC8BCF5-279F-688A-9549-6ACA3218E08B}"/>
+                <a16:creationId xmlns:a16="http://schemas.microsoft.com/office/drawing/2014/main" id="{FDC4CEAC-846E-A910-214E-843F851D4DBA}"/>
               </a:ext>
             </a:extLst>
           </p:cNvPr>
@@ -985,7 +985,7 @@
           <p:cNvPr id="8" name="divider_rule">
             <a:extLst>
               <a:ext uri="{FF2B5EF4-FFF2-40B4-BE49-F238E27FC236}">
-                <a16:creationId xmlns:a16="http://schemas.microsoft.com/office/drawing/2014/main" id="{62A914A9-6E28-0C97-07BA-9D9BE1F20BA8}"/>
+                <a16:creationId xmlns:a16="http://schemas.microsoft.com/office/drawing/2014/main" id="{28882A88-E946-9D9C-1AED-B6B06442382F}"/>
               </a:ext>
             </a:extLst>
           </p:cNvPr>
@@ -1032,7 +1032,7 @@
           <p:cNvPr id="9" name="divider_rule">
             <a:extLst>
               <a:ext uri="{FF2B5EF4-FFF2-40B4-BE49-F238E27FC236}">
-                <a16:creationId xmlns:a16="http://schemas.microsoft.com/office/drawing/2014/main" id="{53F794BC-F6E2-1DC4-24AC-C6D5A04341F9}"/>
+                <a16:creationId xmlns:a16="http://schemas.microsoft.com/office/drawing/2014/main" id="{5C33A3AC-428C-F086-C00B-6605DC33031A}"/>
               </a:ext>
             </a:extLst>
           </p:cNvPr>
@@ -1079,7 +1079,7 @@
           <p:cNvPr id="10" name="divider_rule">
             <a:extLst>
               <a:ext uri="{FF2B5EF4-FFF2-40B4-BE49-F238E27FC236}">
-                <a16:creationId xmlns:a16="http://schemas.microsoft.com/office/drawing/2014/main" id="{D2108B36-0FA2-7586-F3BA-8F4A3BD50680}"/>
+                <a16:creationId xmlns:a16="http://schemas.microsoft.com/office/drawing/2014/main" id="{BFC5669D-6FCF-1E20-B112-301F633A9A0A}"/>
               </a:ext>
             </a:extLst>
           </p:cNvPr>
@@ -1124,7 +1124,7 @@
     </p:spTree>
     <p:extLst>
       <p:ext uri="{BB962C8B-B14F-4D97-AF65-F5344CB8AC3E}">
-        <p14:creationId xmlns:p14="http://schemas.microsoft.com/office/powerpoint/2010/main" val="1900503571"/>
+        <p14:creationId xmlns:p14="http://schemas.microsoft.com/office/powerpoint/2010/main" val="3706200531"/>
       </p:ext>
     </p:extLst>
   </p:cSld>
@@ -1156,7 +1156,7 @@
           <p:cNvPr id="7" name="creative_background">
             <a:extLst>
               <a:ext uri="{FF2B5EF4-FFF2-40B4-BE49-F238E27FC236}">
-                <a16:creationId xmlns:a16="http://schemas.microsoft.com/office/drawing/2014/main" id="{FAF0109A-FB4C-F9E5-3D2F-70337EC120D3}"/>
+                <a16:creationId xmlns:a16="http://schemas.microsoft.com/office/drawing/2014/main" id="{88FACE82-65D1-8D61-632D-AD6E933109E6}"/>
               </a:ext>
             </a:extLst>
           </p:cNvPr>
@@ -1229,7 +1229,7 @@
           <a:bodyPr/>
           <a:lstStyle/>
           <a:p>
-            <a:fld id="{596016C9-F9DB-4EE1-B518-EB72C8994E73}" type="datetimeFigureOut">
+            <a:fld id="{8A86AB56-393C-4917-9670-5C316C4C0775}" type="datetimeFigureOut">
               <a:rPr lang="en-US" smtClean="0"/>
               <a:t>10/3/2026</a:t>
             </a:fld>
@@ -1271,7 +1271,7 @@
           <a:bodyPr/>
           <a:lstStyle/>
           <a:p>
-            <a:fld id="{E3F824D1-671D-418F-B16B-13B951B4F770}" type="slidenum">
+            <a:fld id="{FC63DECE-DCAF-48B3-9E38-EA00981B3229}" type="slidenum">
               <a:rPr lang="en-US" smtClean="0"/>
               <a:t>‹#›</a:t>
             </a:fld>
@@ -1284,7 +1284,7 @@
           <p:cNvPr id="8" name="item_1_title">
             <a:extLst>
               <a:ext uri="{FF2B5EF4-FFF2-40B4-BE49-F238E27FC236}">
-                <a16:creationId xmlns:a16="http://schemas.microsoft.com/office/drawing/2014/main" id="{3F3EC901-1261-2932-83CD-C83E886769D5}"/>
+                <a16:creationId xmlns:a16="http://schemas.microsoft.com/office/drawing/2014/main" id="{05878709-F44C-5139-D5DB-57F822AFD6F1}"/>
               </a:ext>
             </a:extLst>
           </p:cNvPr>
@@ -1334,7 +1334,7 @@
           <p:cNvPr id="9" name="item_1">
             <a:extLst>
               <a:ext uri="{FF2B5EF4-FFF2-40B4-BE49-F238E27FC236}">
-                <a16:creationId xmlns:a16="http://schemas.microsoft.com/office/drawing/2014/main" id="{641233A2-5918-4D93-A1D9-ABC41F061032}"/>
+                <a16:creationId xmlns:a16="http://schemas.microsoft.com/office/drawing/2014/main" id="{7414C0AE-066F-415A-31F5-90C62C319503}"/>
               </a:ext>
             </a:extLst>
           </p:cNvPr>
@@ -1382,7 +1382,7 @@
           <p:cNvPr id="10" name="item_2_title">
             <a:extLst>
               <a:ext uri="{FF2B5EF4-FFF2-40B4-BE49-F238E27FC236}">
-                <a16:creationId xmlns:a16="http://schemas.microsoft.com/office/drawing/2014/main" id="{9BB85613-9763-E9A7-B8CC-D727561E73CD}"/>
+                <a16:creationId xmlns:a16="http://schemas.microsoft.com/office/drawing/2014/main" id="{FF350D37-5912-0FAA-67A2-325819BCCFEB}"/>
               </a:ext>
             </a:extLst>
           </p:cNvPr>
@@ -1435,7 +1435,7 @@
           <p:cNvPr id="11" name="item_2">
             <a:extLst>
               <a:ext uri="{FF2B5EF4-FFF2-40B4-BE49-F238E27FC236}">
-                <a16:creationId xmlns:a16="http://schemas.microsoft.com/office/drawing/2014/main" id="{22608204-8F85-D077-94C7-F1A2AF43B874}"/>
+                <a16:creationId xmlns:a16="http://schemas.microsoft.com/office/drawing/2014/main" id="{E7B8528E-7ABC-0D0B-0017-169221ABF9E2}"/>
               </a:ext>
             </a:extLst>
           </p:cNvPr>
@@ -1483,7 +1483,7 @@
           <p:cNvPr id="12" name="item_3_title">
             <a:extLst>
               <a:ext uri="{FF2B5EF4-FFF2-40B4-BE49-F238E27FC236}">
-                <a16:creationId xmlns:a16="http://schemas.microsoft.com/office/drawing/2014/main" id="{7824F921-AD12-5246-B9AF-D0816E914090}"/>
+                <a16:creationId xmlns:a16="http://schemas.microsoft.com/office/drawing/2014/main" id="{4A6D8CBD-2B10-2D5B-70A5-178A0A68C173}"/>
               </a:ext>
             </a:extLst>
           </p:cNvPr>
@@ -1536,7 +1536,7 @@
           <p:cNvPr id="13" name="item_3">
             <a:extLst>
               <a:ext uri="{FF2B5EF4-FFF2-40B4-BE49-F238E27FC236}">
-                <a16:creationId xmlns:a16="http://schemas.microsoft.com/office/drawing/2014/main" id="{D4BC5586-B41A-197F-0045-C7CC41E6E20B}"/>
+                <a16:creationId xmlns:a16="http://schemas.microsoft.com/office/drawing/2014/main" id="{242DA4DC-8667-1D9F-67AD-5DB3239F1DDF}"/>
               </a:ext>
             </a:extLst>
           </p:cNvPr>
@@ -1584,7 +1584,7 @@
           <p:cNvPr id="14" name="item_4_title">
             <a:extLst>
               <a:ext uri="{FF2B5EF4-FFF2-40B4-BE49-F238E27FC236}">
-                <a16:creationId xmlns:a16="http://schemas.microsoft.com/office/drawing/2014/main" id="{56B7389E-688E-4A65-3DA8-91AA17703F49}"/>
+                <a16:creationId xmlns:a16="http://schemas.microsoft.com/office/drawing/2014/main" id="{3F4152C1-D6D3-3E8C-4F5A-7E7BF16528DD}"/>
               </a:ext>
             </a:extLst>
           </p:cNvPr>
@@ -1637,7 +1637,7 @@
           <p:cNvPr id="15" name="item_4">
             <a:extLst>
               <a:ext uri="{FF2B5EF4-FFF2-40B4-BE49-F238E27FC236}">
-                <a16:creationId xmlns:a16="http://schemas.microsoft.com/office/drawing/2014/main" id="{3E4FDF64-0B37-6C1E-4F73-D98D01E3D494}"/>
+                <a16:creationId xmlns:a16="http://schemas.microsoft.com/office/drawing/2014/main" id="{499207E5-FAB3-879E-3E98-1FD945BD1320}"/>
               </a:ext>
             </a:extLst>
           </p:cNvPr>
@@ -1685,7 +1685,7 @@
           <p:cNvPr id="16" name="source">
             <a:extLst>
               <a:ext uri="{FF2B5EF4-FFF2-40B4-BE49-F238E27FC236}">
-                <a16:creationId xmlns:a16="http://schemas.microsoft.com/office/drawing/2014/main" id="{F97D6AAB-1B29-B361-1F9A-C3BEBD56704E}"/>
+                <a16:creationId xmlns:a16="http://schemas.microsoft.com/office/drawing/2014/main" id="{3637D1FB-38C3-F34A-80C1-FF76F9F9D382}"/>
               </a:ext>
             </a:extLst>
           </p:cNvPr>
@@ -1740,7 +1740,7 @@
     </p:spTree>
     <p:extLst>
       <p:ext uri="{BB962C8B-B14F-4D97-AF65-F5344CB8AC3E}">
-        <p14:creationId xmlns:p14="http://schemas.microsoft.com/office/powerpoint/2010/main" val="4206167365"/>
+        <p14:creationId xmlns:p14="http://schemas.microsoft.com/office/powerpoint/2010/main" val="2521191983"/>
       </p:ext>
     </p:extLst>
   </p:cSld>
@@ -1772,7 +1772,7 @@
           <p:cNvPr id="7" name="creative_background">
             <a:extLst>
               <a:ext uri="{FF2B5EF4-FFF2-40B4-BE49-F238E27FC236}">
-                <a16:creationId xmlns:a16="http://schemas.microsoft.com/office/drawing/2014/main" id="{233342F1-06AF-BE3C-E42A-CFDB9B547D9E}"/>
+                <a16:creationId xmlns:a16="http://schemas.microsoft.com/office/drawing/2014/main" id="{F0A67B3B-92FE-C264-8C1B-95D79EC2C908}"/>
               </a:ext>
             </a:extLst>
           </p:cNvPr>
@@ -1845,7 +1845,7 @@
           <a:bodyPr/>
           <a:lstStyle/>
           <a:p>
-            <a:fld id="{596016C9-F9DB-4EE1-B518-EB72C8994E73}" type="datetimeFigureOut">
+            <a:fld id="{8A86AB56-393C-4917-9670-5C316C4C0775}" type="datetimeFigureOut">
               <a:rPr lang="en-US" smtClean="0"/>
               <a:t>10/3/2026</a:t>
             </a:fld>
@@ -1887,7 +1887,7 @@
           <a:bodyPr/>
           <a:lstStyle/>
           <a:p>
-            <a:fld id="{E3F824D1-671D-418F-B16B-13B951B4F770}" type="slidenum">
+            <a:fld id="{FC63DECE-DCAF-48B3-9E38-EA00981B3229}" type="slidenum">
               <a:rPr lang="en-US" smtClean="0"/>
               <a:t>‹#›</a:t>
             </a:fld>
@@ -1900,7 +1900,7 @@
           <p:cNvPr id="8" name="body">
             <a:extLst>
               <a:ext uri="{FF2B5EF4-FFF2-40B4-BE49-F238E27FC236}">
-                <a16:creationId xmlns:a16="http://schemas.microsoft.com/office/drawing/2014/main" id="{039DEAA5-1553-616D-00DF-3CC49ADE6A44}"/>
+                <a16:creationId xmlns:a16="http://schemas.microsoft.com/office/drawing/2014/main" id="{EF9E1DED-BC77-F048-818D-88F2695C2481}"/>
               </a:ext>
             </a:extLst>
           </p:cNvPr>
@@ -1945,7 +1945,7 @@
           <p:cNvPr id="9" name="source">
             <a:extLst>
               <a:ext uri="{FF2B5EF4-FFF2-40B4-BE49-F238E27FC236}">
-                <a16:creationId xmlns:a16="http://schemas.microsoft.com/office/drawing/2014/main" id="{CF8D40E1-BD8A-A106-C172-264CEC03C517}"/>
+                <a16:creationId xmlns:a16="http://schemas.microsoft.com/office/drawing/2014/main" id="{825F2658-C18A-A817-97FF-F8C5B2B31844}"/>
               </a:ext>
             </a:extLst>
           </p:cNvPr>
@@ -2000,7 +2000,7 @@
     </p:spTree>
     <p:extLst>
       <p:ext uri="{BB962C8B-B14F-4D97-AF65-F5344CB8AC3E}">
-        <p14:creationId xmlns:p14="http://schemas.microsoft.com/office/powerpoint/2010/main" val="4112927829"/>
+        <p14:creationId xmlns:p14="http://schemas.microsoft.com/office/powerpoint/2010/main" val="821589793"/>
       </p:ext>
     </p:extLst>
   </p:cSld>
@@ -2032,7 +2032,7 @@
           <p:cNvPr id="7" name="creative_background">
             <a:extLst>
               <a:ext uri="{FF2B5EF4-FFF2-40B4-BE49-F238E27FC236}">
-                <a16:creationId xmlns:a16="http://schemas.microsoft.com/office/drawing/2014/main" id="{3DEA2311-A5E1-707F-9751-334D4F529567}"/>
+                <a16:creationId xmlns:a16="http://schemas.microsoft.com/office/drawing/2014/main" id="{869C00FE-8AE8-EF5F-EA61-ACAEA5608B9B}"/>
               </a:ext>
             </a:extLst>
           </p:cNvPr>
@@ -2105,7 +2105,7 @@
           <a:bodyPr/>
           <a:lstStyle/>
           <a:p>
-            <a:fld id="{596016C9-F9DB-4EE1-B518-EB72C8994E73}" type="datetimeFigureOut">
+            <a:fld id="{8A86AB56-393C-4917-9670-5C316C4C0775}" type="datetimeFigureOut">
               <a:rPr lang="en-US" smtClean="0"/>
               <a:t>10/3/2026</a:t>
             </a:fld>
@@ -2147,7 +2147,7 @@
           <a:bodyPr/>
           <a:lstStyle/>
           <a:p>
-            <a:fld id="{E3F824D1-671D-418F-B16B-13B951B4F770}" type="slidenum">
+            <a:fld id="{FC63DECE-DCAF-48B3-9E38-EA00981B3229}" type="slidenum">
               <a:rPr lang="en-US" smtClean="0"/>
               <a:t>‹#›</a:t>
             </a:fld>
@@ -2160,7 +2160,7 @@
           <p:cNvPr id="8" name="item_1_title">
             <a:extLst>
               <a:ext uri="{FF2B5EF4-FFF2-40B4-BE49-F238E27FC236}">
-                <a16:creationId xmlns:a16="http://schemas.microsoft.com/office/drawing/2014/main" id="{B0053A30-0B50-04BC-1388-F3F2CB0EC0A1}"/>
+                <a16:creationId xmlns:a16="http://schemas.microsoft.com/office/drawing/2014/main" id="{6C5EA5E8-D279-98CD-31DE-782AEFF448BD}"/>
               </a:ext>
             </a:extLst>
           </p:cNvPr>
@@ -2210,7 +2210,7 @@
           <p:cNvPr id="9" name="item_1">
             <a:extLst>
               <a:ext uri="{FF2B5EF4-FFF2-40B4-BE49-F238E27FC236}">
-                <a16:creationId xmlns:a16="http://schemas.microsoft.com/office/drawing/2014/main" id="{33417D53-DAFF-BFEC-A0AA-F08FE20F1B33}"/>
+                <a16:creationId xmlns:a16="http://schemas.microsoft.com/office/drawing/2014/main" id="{16956901-1F82-788F-7495-F52B983F46B5}"/>
               </a:ext>
             </a:extLst>
           </p:cNvPr>
@@ -2258,7 +2258,7 @@
           <p:cNvPr id="10" name="item_2_title">
             <a:extLst>
               <a:ext uri="{FF2B5EF4-FFF2-40B4-BE49-F238E27FC236}">
-                <a16:creationId xmlns:a16="http://schemas.microsoft.com/office/drawing/2014/main" id="{F7135752-82D6-F046-F4B5-C3F9DF5EE811}"/>
+                <a16:creationId xmlns:a16="http://schemas.microsoft.com/office/drawing/2014/main" id="{49F4AD89-E3B1-B5C6-FC57-E6B4BAD6413C}"/>
               </a:ext>
             </a:extLst>
           </p:cNvPr>
@@ -2311,7 +2311,7 @@
           <p:cNvPr id="11" name="item_2">
             <a:extLst>
               <a:ext uri="{FF2B5EF4-FFF2-40B4-BE49-F238E27FC236}">
-                <a16:creationId xmlns:a16="http://schemas.microsoft.com/office/drawing/2014/main" id="{1F66C06D-E788-0984-E0E3-7A67029DAD48}"/>
+                <a16:creationId xmlns:a16="http://schemas.microsoft.com/office/drawing/2014/main" id="{9E566FE4-0EDB-5F0B-A67E-C36979EBE4A1}"/>
               </a:ext>
             </a:extLst>
           </p:cNvPr>
@@ -2359,7 +2359,7 @@
           <p:cNvPr id="12" name="item_3_title">
             <a:extLst>
               <a:ext uri="{FF2B5EF4-FFF2-40B4-BE49-F238E27FC236}">
-                <a16:creationId xmlns:a16="http://schemas.microsoft.com/office/drawing/2014/main" id="{1818295C-BB07-7BE9-D971-269E37E3F3DB}"/>
+                <a16:creationId xmlns:a16="http://schemas.microsoft.com/office/drawing/2014/main" id="{F2ADBECF-8288-85D1-134D-1B9551EC8FCC}"/>
               </a:ext>
             </a:extLst>
           </p:cNvPr>
@@ -2412,7 +2412,7 @@
           <p:cNvPr id="13" name="item_3">
             <a:extLst>
               <a:ext uri="{FF2B5EF4-FFF2-40B4-BE49-F238E27FC236}">
-                <a16:creationId xmlns:a16="http://schemas.microsoft.com/office/drawing/2014/main" id="{527CE657-025C-F8EE-DFB2-726D6756D4AE}"/>
+                <a16:creationId xmlns:a16="http://schemas.microsoft.com/office/drawing/2014/main" id="{F8AB3485-614F-90B1-72B9-BA18765D854D}"/>
               </a:ext>
             </a:extLst>
           </p:cNvPr>
@@ -2460,7 +2460,7 @@
           <p:cNvPr id="14" name="item_4_title">
             <a:extLst>
               <a:ext uri="{FF2B5EF4-FFF2-40B4-BE49-F238E27FC236}">
-                <a16:creationId xmlns:a16="http://schemas.microsoft.com/office/drawing/2014/main" id="{CEB4EC68-9662-18E8-6F20-D4DA535748E9}"/>
+                <a16:creationId xmlns:a16="http://schemas.microsoft.com/office/drawing/2014/main" id="{AAADB151-9395-F6A1-E885-4AAFEF9DA651}"/>
               </a:ext>
             </a:extLst>
           </p:cNvPr>
@@ -2513,7 +2513,7 @@
           <p:cNvPr id="15" name="item_4">
             <a:extLst>
               <a:ext uri="{FF2B5EF4-FFF2-40B4-BE49-F238E27FC236}">
-                <a16:creationId xmlns:a16="http://schemas.microsoft.com/office/drawing/2014/main" id="{69E612A6-955C-69F5-3A3B-A11A5370918C}"/>
+                <a16:creationId xmlns:a16="http://schemas.microsoft.com/office/drawing/2014/main" id="{9BAB4B25-95A6-457F-DD4A-3C92F5FA2541}"/>
               </a:ext>
             </a:extLst>
           </p:cNvPr>
@@ -2561,7 +2561,7 @@
           <p:cNvPr id="16" name="source">
             <a:extLst>
               <a:ext uri="{FF2B5EF4-FFF2-40B4-BE49-F238E27FC236}">
-                <a16:creationId xmlns:a16="http://schemas.microsoft.com/office/drawing/2014/main" id="{F682B360-AE77-EF19-5D0D-792FCDE8BC53}"/>
+                <a16:creationId xmlns:a16="http://schemas.microsoft.com/office/drawing/2014/main" id="{68B5B661-3750-017E-4852-75433121E929}"/>
               </a:ext>
             </a:extLst>
           </p:cNvPr>
@@ -2616,7 +2616,7 @@
     </p:spTree>
     <p:extLst>
       <p:ext uri="{BB962C8B-B14F-4D97-AF65-F5344CB8AC3E}">
-        <p14:creationId xmlns:p14="http://schemas.microsoft.com/office/powerpoint/2010/main" val="816136525"/>
+        <p14:creationId xmlns:p14="http://schemas.microsoft.com/office/powerpoint/2010/main" val="1875576600"/>
       </p:ext>
     </p:extLst>
   </p:cSld>
@@ -2648,7 +2648,7 @@
           <p:cNvPr id="7" name="creative_background">
             <a:extLst>
               <a:ext uri="{FF2B5EF4-FFF2-40B4-BE49-F238E27FC236}">
-                <a16:creationId xmlns:a16="http://schemas.microsoft.com/office/drawing/2014/main" id="{862A1AE1-C822-EC5C-E1A1-9193E6BAB904}"/>
+                <a16:creationId xmlns:a16="http://schemas.microsoft.com/office/drawing/2014/main" id="{80D69B75-BECD-CEDA-DAE0-1BE9877870C1}"/>
               </a:ext>
             </a:extLst>
           </p:cNvPr>
@@ -2721,7 +2721,7 @@
           <a:bodyPr/>
           <a:lstStyle/>
           <a:p>
-            <a:fld id="{596016C9-F9DB-4EE1-B518-EB72C8994E73}" type="datetimeFigureOut">
+            <a:fld id="{8A86AB56-393C-4917-9670-5C316C4C0775}" type="datetimeFigureOut">
               <a:rPr lang="en-US" smtClean="0"/>
               <a:t>10/3/2026</a:t>
             </a:fld>
@@ -2763,7 +2763,7 @@
           <a:bodyPr/>
           <a:lstStyle/>
           <a:p>
-            <a:fld id="{E3F824D1-671D-418F-B16B-13B951B4F770}" type="slidenum">
+            <a:fld id="{FC63DECE-DCAF-48B3-9E38-EA00981B3229}" type="slidenum">
               <a:rPr lang="en-US" smtClean="0"/>
               <a:t>‹#›</a:t>
             </a:fld>
@@ -2776,7 +2776,7 @@
           <p:cNvPr id="8" name="body">
             <a:extLst>
               <a:ext uri="{FF2B5EF4-FFF2-40B4-BE49-F238E27FC236}">
-                <a16:creationId xmlns:a16="http://schemas.microsoft.com/office/drawing/2014/main" id="{9DDBB28E-2D4D-C0E2-8E03-280B675587CD}"/>
+                <a16:creationId xmlns:a16="http://schemas.microsoft.com/office/drawing/2014/main" id="{213D738C-82FB-F6AF-4926-601B4777CE54}"/>
               </a:ext>
             </a:extLst>
           </p:cNvPr>
@@ -2816,7 +2816,7 @@
           <p:cNvPr id="9" name="kpi_value_1">
             <a:extLst>
               <a:ext uri="{FF2B5EF4-FFF2-40B4-BE49-F238E27FC236}">
-                <a16:creationId xmlns:a16="http://schemas.microsoft.com/office/drawing/2014/main" id="{7EB4CB4D-BD8E-7B48-159D-17A89ADF5BC7}"/>
+                <a16:creationId xmlns:a16="http://schemas.microsoft.com/office/drawing/2014/main" id="{5CF85154-3685-A475-2D40-BFEBE598876B}"/>
               </a:ext>
             </a:extLst>
           </p:cNvPr>
@@ -2869,7 +2869,7 @@
           <p:cNvPr id="10" name="kpi_label_1">
             <a:extLst>
               <a:ext uri="{FF2B5EF4-FFF2-40B4-BE49-F238E27FC236}">
-                <a16:creationId xmlns:a16="http://schemas.microsoft.com/office/drawing/2014/main" id="{F3A043E5-2E19-F225-EC72-67B565B7BEE4}"/>
+                <a16:creationId xmlns:a16="http://schemas.microsoft.com/office/drawing/2014/main" id="{284F0542-2DBA-2823-27FA-F3F3DBB872EF}"/>
               </a:ext>
             </a:extLst>
           </p:cNvPr>
@@ -2917,7 +2917,7 @@
           <p:cNvPr id="11" name="source">
             <a:extLst>
               <a:ext uri="{FF2B5EF4-FFF2-40B4-BE49-F238E27FC236}">
-                <a16:creationId xmlns:a16="http://schemas.microsoft.com/office/drawing/2014/main" id="{97279609-1EA1-B488-F470-77A772E3461F}"/>
+                <a16:creationId xmlns:a16="http://schemas.microsoft.com/office/drawing/2014/main" id="{79536C51-7854-5CEE-2864-BE638FA1844D}"/>
               </a:ext>
             </a:extLst>
           </p:cNvPr>
@@ -2972,7 +2972,7 @@
     </p:spTree>
     <p:extLst>
       <p:ext uri="{BB962C8B-B14F-4D97-AF65-F5344CB8AC3E}">
-        <p14:creationId xmlns:p14="http://schemas.microsoft.com/office/powerpoint/2010/main" val="676352453"/>
+        <p14:creationId xmlns:p14="http://schemas.microsoft.com/office/powerpoint/2010/main" val="75527103"/>
       </p:ext>
     </p:extLst>
   </p:cSld>
@@ -3004,7 +3004,7 @@
           <p:cNvPr id="7" name="creative_background">
             <a:extLst>
               <a:ext uri="{FF2B5EF4-FFF2-40B4-BE49-F238E27FC236}">
-                <a16:creationId xmlns:a16="http://schemas.microsoft.com/office/drawing/2014/main" id="{FE2A562E-AF61-2445-AEA3-643E071EE39E}"/>
+                <a16:creationId xmlns:a16="http://schemas.microsoft.com/office/drawing/2014/main" id="{FC84586C-C420-27B0-3199-820B536C4D5D}"/>
               </a:ext>
             </a:extLst>
           </p:cNvPr>
@@ -3077,7 +3077,7 @@
           <a:bodyPr/>
           <a:lstStyle/>
           <a:p>
-            <a:fld id="{596016C9-F9DB-4EE1-B518-EB72C8994E73}" type="datetimeFigureOut">
+            <a:fld id="{8A86AB56-393C-4917-9670-5C316C4C0775}" type="datetimeFigureOut">
               <a:rPr lang="en-US" smtClean="0"/>
               <a:t>10/3/2026</a:t>
             </a:fld>
@@ -3119,7 +3119,7 @@
           <a:bodyPr/>
           <a:lstStyle/>
           <a:p>
-            <a:fld id="{E3F824D1-671D-418F-B16B-13B951B4F770}" type="slidenum">
+            <a:fld id="{FC63DECE-DCAF-48B3-9E38-EA00981B3229}" type="slidenum">
               <a:rPr lang="en-US" smtClean="0"/>
               <a:t>‹#›</a:t>
             </a:fld>
@@ -3132,7 +3132,7 @@
           <p:cNvPr id="8" name="body">
             <a:extLst>
               <a:ext uri="{FF2B5EF4-FFF2-40B4-BE49-F238E27FC236}">
-                <a16:creationId xmlns:a16="http://schemas.microsoft.com/office/drawing/2014/main" id="{2019BBC9-8C00-B985-550E-4FACE7254A24}"/>
+                <a16:creationId xmlns:a16="http://schemas.microsoft.com/office/drawing/2014/main" id="{80B2B12E-FB15-64A2-5393-D017B4162A1F}"/>
               </a:ext>
             </a:extLst>
           </p:cNvPr>
@@ -3172,7 +3172,7 @@
           <p:cNvPr id="9" name="kpi_value_1">
             <a:extLst>
               <a:ext uri="{FF2B5EF4-FFF2-40B4-BE49-F238E27FC236}">
-                <a16:creationId xmlns:a16="http://schemas.microsoft.com/office/drawing/2014/main" id="{FF4B7C91-43E7-87BF-A99C-11A7CF46629B}"/>
+                <a16:creationId xmlns:a16="http://schemas.microsoft.com/office/drawing/2014/main" id="{9C07EEA3-01D2-74C0-1947-99E1B3505406}"/>
               </a:ext>
             </a:extLst>
           </p:cNvPr>
@@ -3225,7 +3225,7 @@
           <p:cNvPr id="10" name="kpi_label_1">
             <a:extLst>
               <a:ext uri="{FF2B5EF4-FFF2-40B4-BE49-F238E27FC236}">
-                <a16:creationId xmlns:a16="http://schemas.microsoft.com/office/drawing/2014/main" id="{E7CF35A8-1C8B-0AB5-BB50-343C812B84FA}"/>
+                <a16:creationId xmlns:a16="http://schemas.microsoft.com/office/drawing/2014/main" id="{5BF83D7A-2A9D-C752-E58D-7054A2BAF9A8}"/>
               </a:ext>
             </a:extLst>
           </p:cNvPr>
@@ -3273,7 +3273,7 @@
           <p:cNvPr id="11" name="kpi_value_2">
             <a:extLst>
               <a:ext uri="{FF2B5EF4-FFF2-40B4-BE49-F238E27FC236}">
-                <a16:creationId xmlns:a16="http://schemas.microsoft.com/office/drawing/2014/main" id="{7E3D07DA-6075-00DA-DCA2-BD14FFF0527F}"/>
+                <a16:creationId xmlns:a16="http://schemas.microsoft.com/office/drawing/2014/main" id="{9507F4CE-1E4C-5556-752B-FD36AE0504FA}"/>
               </a:ext>
             </a:extLst>
           </p:cNvPr>
@@ -3326,7 +3326,7 @@
           <p:cNvPr id="12" name="kpi_label_2">
             <a:extLst>
               <a:ext uri="{FF2B5EF4-FFF2-40B4-BE49-F238E27FC236}">
-                <a16:creationId xmlns:a16="http://schemas.microsoft.com/office/drawing/2014/main" id="{19B9AFC4-8C76-FFE9-DC01-49269CB36032}"/>
+                <a16:creationId xmlns:a16="http://schemas.microsoft.com/office/drawing/2014/main" id="{ADE76006-7805-13EE-F821-E0C67BF92309}"/>
               </a:ext>
             </a:extLst>
           </p:cNvPr>
@@ -3374,7 +3374,7 @@
           <p:cNvPr id="13" name="kpi_value_3">
             <a:extLst>
               <a:ext uri="{FF2B5EF4-FFF2-40B4-BE49-F238E27FC236}">
-                <a16:creationId xmlns:a16="http://schemas.microsoft.com/office/drawing/2014/main" id="{DC668B9D-23FE-E193-E161-82E62364EB1F}"/>
+                <a16:creationId xmlns:a16="http://schemas.microsoft.com/office/drawing/2014/main" id="{B072C646-678D-E767-B89E-F151788C379D}"/>
               </a:ext>
             </a:extLst>
           </p:cNvPr>
@@ -3427,7 +3427,7 @@
           <p:cNvPr id="14" name="kpi_label_3">
             <a:extLst>
               <a:ext uri="{FF2B5EF4-FFF2-40B4-BE49-F238E27FC236}">
-                <a16:creationId xmlns:a16="http://schemas.microsoft.com/office/drawing/2014/main" id="{7B7C58AB-9D73-BAC0-A013-F66F109CFCDA}"/>
+                <a16:creationId xmlns:a16="http://schemas.microsoft.com/office/drawing/2014/main" id="{A19DA8CE-FC95-71AE-4BA2-A1AD0C886C55}"/>
               </a:ext>
             </a:extLst>
           </p:cNvPr>
@@ -3475,7 +3475,7 @@
           <p:cNvPr id="15" name="kpi_value_4">
             <a:extLst>
               <a:ext uri="{FF2B5EF4-FFF2-40B4-BE49-F238E27FC236}">
-                <a16:creationId xmlns:a16="http://schemas.microsoft.com/office/drawing/2014/main" id="{62F30534-194B-DD3A-6A65-DEA9A8AFE431}"/>
+                <a16:creationId xmlns:a16="http://schemas.microsoft.com/office/drawing/2014/main" id="{30C1131E-3AA6-821F-0663-B80CAE5C4602}"/>
               </a:ext>
             </a:extLst>
           </p:cNvPr>
@@ -3528,7 +3528,7 @@
           <p:cNvPr id="16" name="kpi_label_4">
             <a:extLst>
               <a:ext uri="{FF2B5EF4-FFF2-40B4-BE49-F238E27FC236}">
-                <a16:creationId xmlns:a16="http://schemas.microsoft.com/office/drawing/2014/main" id="{AF54A942-A700-6C8E-081A-448E112336B9}"/>
+                <a16:creationId xmlns:a16="http://schemas.microsoft.com/office/drawing/2014/main" id="{C75C1AA3-15A5-351B-6DFE-031AEF46EB0C}"/>
               </a:ext>
             </a:extLst>
           </p:cNvPr>
@@ -3576,7 +3576,7 @@
           <p:cNvPr id="17" name="source">
             <a:extLst>
               <a:ext uri="{FF2B5EF4-FFF2-40B4-BE49-F238E27FC236}">
-                <a16:creationId xmlns:a16="http://schemas.microsoft.com/office/drawing/2014/main" id="{318CB990-A9BF-624B-4486-5FD70E73CB41}"/>
+                <a16:creationId xmlns:a16="http://schemas.microsoft.com/office/drawing/2014/main" id="{C8210712-58F4-FC58-1341-DC534C36C53B}"/>
               </a:ext>
             </a:extLst>
           </p:cNvPr>
@@ -3631,7 +3631,7 @@
     </p:spTree>
     <p:extLst>
       <p:ext uri="{BB962C8B-B14F-4D97-AF65-F5344CB8AC3E}">
-        <p14:creationId xmlns:p14="http://schemas.microsoft.com/office/powerpoint/2010/main" val="1319041426"/>
+        <p14:creationId xmlns:p14="http://schemas.microsoft.com/office/powerpoint/2010/main" val="275124891"/>
       </p:ext>
     </p:extLst>
   </p:cSld>
@@ -3663,7 +3663,7 @@
           <p:cNvPr id="7" name="creative_background">
             <a:extLst>
               <a:ext uri="{FF2B5EF4-FFF2-40B4-BE49-F238E27FC236}">
-                <a16:creationId xmlns:a16="http://schemas.microsoft.com/office/drawing/2014/main" id="{144FA260-650F-6246-5826-4682600F905E}"/>
+                <a16:creationId xmlns:a16="http://schemas.microsoft.com/office/drawing/2014/main" id="{21CE9A3A-CA79-DAB5-7550-F0DA4A3832D4}"/>
               </a:ext>
             </a:extLst>
           </p:cNvPr>
@@ -3736,7 +3736,7 @@
           <a:bodyPr/>
           <a:lstStyle/>
           <a:p>
-            <a:fld id="{596016C9-F9DB-4EE1-B518-EB72C8994E73}" type="datetimeFigureOut">
+            <a:fld id="{8A86AB56-393C-4917-9670-5C316C4C0775}" type="datetimeFigureOut">
               <a:rPr lang="en-US" smtClean="0"/>
               <a:t>10/3/2026</a:t>
             </a:fld>
@@ -3778,7 +3778,7 @@
           <a:bodyPr/>
           <a:lstStyle/>
           <a:p>
-            <a:fld id="{E3F824D1-671D-418F-B16B-13B951B4F770}" type="slidenum">
+            <a:fld id="{FC63DECE-DCAF-48B3-9E38-EA00981B3229}" type="slidenum">
               <a:rPr lang="en-US" smtClean="0"/>
               <a:t>‹#›</a:t>
             </a:fld>
@@ -3791,7 +3791,7 @@
           <p:cNvPr id="8" name="body">
             <a:extLst>
               <a:ext uri="{FF2B5EF4-FFF2-40B4-BE49-F238E27FC236}">
-                <a16:creationId xmlns:a16="http://schemas.microsoft.com/office/drawing/2014/main" id="{F659E370-F5BD-1176-ED4D-9116AD76CA68}"/>
+                <a16:creationId xmlns:a16="http://schemas.microsoft.com/office/drawing/2014/main" id="{50A6EA44-CD41-89CC-C720-51FD90AA21F7}"/>
               </a:ext>
             </a:extLst>
           </p:cNvPr>
@@ -3831,7 +3831,7 @@
           <p:cNvPr id="9" name="kpi_value_1">
             <a:extLst>
               <a:ext uri="{FF2B5EF4-FFF2-40B4-BE49-F238E27FC236}">
-                <a16:creationId xmlns:a16="http://schemas.microsoft.com/office/drawing/2014/main" id="{55D112FC-FA40-CF56-D793-99BB8F2AF012}"/>
+                <a16:creationId xmlns:a16="http://schemas.microsoft.com/office/drawing/2014/main" id="{8747195F-9333-53F6-575F-55D5D3262642}"/>
               </a:ext>
             </a:extLst>
           </p:cNvPr>
@@ -3884,7 +3884,7 @@
           <p:cNvPr id="10" name="kpi_label_1">
             <a:extLst>
               <a:ext uri="{FF2B5EF4-FFF2-40B4-BE49-F238E27FC236}">
-                <a16:creationId xmlns:a16="http://schemas.microsoft.com/office/drawing/2014/main" id="{0798D6A8-FC1D-8634-F92D-DBB1D37E25BD}"/>
+                <a16:creationId xmlns:a16="http://schemas.microsoft.com/office/drawing/2014/main" id="{450F1495-73C5-F666-0D82-A5D9441940B3}"/>
               </a:ext>
             </a:extLst>
           </p:cNvPr>
@@ -3932,7 +3932,7 @@
           <p:cNvPr id="11" name="kpi_value_2">
             <a:extLst>
               <a:ext uri="{FF2B5EF4-FFF2-40B4-BE49-F238E27FC236}">
-                <a16:creationId xmlns:a16="http://schemas.microsoft.com/office/drawing/2014/main" id="{6019DAC1-ACC3-B936-9744-0322EDFDB1FC}"/>
+                <a16:creationId xmlns:a16="http://schemas.microsoft.com/office/drawing/2014/main" id="{6CC1A85E-E8AD-DAA7-923C-9B0A9A4FA3B0}"/>
               </a:ext>
             </a:extLst>
           </p:cNvPr>
@@ -3985,7 +3985,7 @@
           <p:cNvPr id="12" name="kpi_label_2">
             <a:extLst>
               <a:ext uri="{FF2B5EF4-FFF2-40B4-BE49-F238E27FC236}">
-                <a16:creationId xmlns:a16="http://schemas.microsoft.com/office/drawing/2014/main" id="{454D7D22-D611-B6EC-03B2-F4000D1E1279}"/>
+                <a16:creationId xmlns:a16="http://schemas.microsoft.com/office/drawing/2014/main" id="{23D377EF-83F8-0093-EDE2-FB795EEDC792}"/>
               </a:ext>
             </a:extLst>
           </p:cNvPr>
@@ -4033,7 +4033,7 @@
           <p:cNvPr id="13" name="source">
             <a:extLst>
               <a:ext uri="{FF2B5EF4-FFF2-40B4-BE49-F238E27FC236}">
-                <a16:creationId xmlns:a16="http://schemas.microsoft.com/office/drawing/2014/main" id="{D0E89513-6498-5435-FC50-CEF5B3105B2C}"/>
+                <a16:creationId xmlns:a16="http://schemas.microsoft.com/office/drawing/2014/main" id="{48436001-506A-E710-F45A-2B8641805883}"/>
               </a:ext>
             </a:extLst>
           </p:cNvPr>
@@ -4088,7 +4088,7 @@
     </p:spTree>
     <p:extLst>
       <p:ext uri="{BB962C8B-B14F-4D97-AF65-F5344CB8AC3E}">
-        <p14:creationId xmlns:p14="http://schemas.microsoft.com/office/powerpoint/2010/main" val="1892318428"/>
+        <p14:creationId xmlns:p14="http://schemas.microsoft.com/office/powerpoint/2010/main" val="104612425"/>
       </p:ext>
     </p:extLst>
   </p:cSld>
@@ -4120,7 +4120,7 @@
           <p:cNvPr id="7" name="creative_background">
             <a:extLst>
               <a:ext uri="{FF2B5EF4-FFF2-40B4-BE49-F238E27FC236}">
-                <a16:creationId xmlns:a16="http://schemas.microsoft.com/office/drawing/2014/main" id="{46172CF1-FF01-FA81-6462-BD72A045BD1C}"/>
+                <a16:creationId xmlns:a16="http://schemas.microsoft.com/office/drawing/2014/main" id="{3E4B5C36-1600-5E68-0A6E-CDB15B6E7A29}"/>
               </a:ext>
             </a:extLst>
           </p:cNvPr>
@@ -4193,7 +4193,7 @@
           <a:bodyPr/>
           <a:lstStyle/>
           <a:p>
-            <a:fld id="{596016C9-F9DB-4EE1-B518-EB72C8994E73}" type="datetimeFigureOut">
+            <a:fld id="{8A86AB56-393C-4917-9670-5C316C4C0775}" type="datetimeFigureOut">
               <a:rPr lang="en-US" smtClean="0"/>
               <a:t>10/3/2026</a:t>
             </a:fld>
@@ -4235,7 +4235,7 @@
           <a:bodyPr/>
           <a:lstStyle/>
           <a:p>
-            <a:fld id="{E3F824D1-671D-418F-B16B-13B951B4F770}" type="slidenum">
+            <a:fld id="{FC63DECE-DCAF-48B3-9E38-EA00981B3229}" type="slidenum">
               <a:rPr lang="en-US" smtClean="0"/>
               <a:t>‹#›</a:t>
             </a:fld>
@@ -4248,7 +4248,7 @@
           <p:cNvPr id="8" name="body">
             <a:extLst>
               <a:ext uri="{FF2B5EF4-FFF2-40B4-BE49-F238E27FC236}">
-                <a16:creationId xmlns:a16="http://schemas.microsoft.com/office/drawing/2014/main" id="{1CC72138-4CB7-645E-44D6-66DEB75F9F57}"/>
+                <a16:creationId xmlns:a16="http://schemas.microsoft.com/office/drawing/2014/main" id="{E5DFA109-194B-ECDC-EE57-AFEBC4CA75E1}"/>
               </a:ext>
             </a:extLst>
           </p:cNvPr>
@@ -4288,7 +4288,7 @@
           <p:cNvPr id="9" name="kpi_value_1">
             <a:extLst>
               <a:ext uri="{FF2B5EF4-FFF2-40B4-BE49-F238E27FC236}">
-                <a16:creationId xmlns:a16="http://schemas.microsoft.com/office/drawing/2014/main" id="{332FFD14-40CD-2AB5-A0E6-899BE57EEEEA}"/>
+                <a16:creationId xmlns:a16="http://schemas.microsoft.com/office/drawing/2014/main" id="{12BF01DF-ABA9-C400-72F0-EBFC568C6BEF}"/>
               </a:ext>
             </a:extLst>
           </p:cNvPr>
@@ -4341,7 +4341,7 @@
           <p:cNvPr id="10" name="kpi_label_1">
             <a:extLst>
               <a:ext uri="{FF2B5EF4-FFF2-40B4-BE49-F238E27FC236}">
-                <a16:creationId xmlns:a16="http://schemas.microsoft.com/office/drawing/2014/main" id="{4C08758F-A7C6-D4A7-CE57-F93941673AD9}"/>
+                <a16:creationId xmlns:a16="http://schemas.microsoft.com/office/drawing/2014/main" id="{67AD7BBE-027D-22D7-112D-75800DC2C59D}"/>
               </a:ext>
             </a:extLst>
           </p:cNvPr>
@@ -4389,7 +4389,7 @@
           <p:cNvPr id="11" name="kpi_value_2">
             <a:extLst>
               <a:ext uri="{FF2B5EF4-FFF2-40B4-BE49-F238E27FC236}">
-                <a16:creationId xmlns:a16="http://schemas.microsoft.com/office/drawing/2014/main" id="{71B006DE-CF18-859A-69DA-CB54E834BAFD}"/>
+                <a16:creationId xmlns:a16="http://schemas.microsoft.com/office/drawing/2014/main" id="{D90F7904-0589-6B05-78B7-205A8D9CB2C8}"/>
               </a:ext>
             </a:extLst>
           </p:cNvPr>
@@ -4442,7 +4442,7 @@
           <p:cNvPr id="12" name="kpi_label_2">
             <a:extLst>
               <a:ext uri="{FF2B5EF4-FFF2-40B4-BE49-F238E27FC236}">
-                <a16:creationId xmlns:a16="http://schemas.microsoft.com/office/drawing/2014/main" id="{564DF807-E38F-C19A-42F5-DC8CE14CC1FC}"/>
+                <a16:creationId xmlns:a16="http://schemas.microsoft.com/office/drawing/2014/main" id="{7402A253-90B9-0B0B-733B-302D4F465702}"/>
               </a:ext>
             </a:extLst>
           </p:cNvPr>
@@ -4490,7 +4490,7 @@
           <p:cNvPr id="13" name="kpi_value_3">
             <a:extLst>
               <a:ext uri="{FF2B5EF4-FFF2-40B4-BE49-F238E27FC236}">
-                <a16:creationId xmlns:a16="http://schemas.microsoft.com/office/drawing/2014/main" id="{5E7E5F86-0CA2-50BE-2371-5081B08BEE83}"/>
+                <a16:creationId xmlns:a16="http://schemas.microsoft.com/office/drawing/2014/main" id="{0E136099-6EE1-5C8B-960F-970C0FC30AB7}"/>
               </a:ext>
             </a:extLst>
           </p:cNvPr>
@@ -4543,7 +4543,7 @@
           <p:cNvPr id="14" name="kpi_label_3">
             <a:extLst>
               <a:ext uri="{FF2B5EF4-FFF2-40B4-BE49-F238E27FC236}">
-                <a16:creationId xmlns:a16="http://schemas.microsoft.com/office/drawing/2014/main" id="{4A2F2F6C-5AB1-2371-B321-CBEDD39483F6}"/>
+                <a16:creationId xmlns:a16="http://schemas.microsoft.com/office/drawing/2014/main" id="{4366DE89-154C-8205-3B96-68E1CADCA4F0}"/>
               </a:ext>
             </a:extLst>
           </p:cNvPr>
@@ -4591,7 +4591,7 @@
           <p:cNvPr id="15" name="kpi_value_4">
             <a:extLst>
               <a:ext uri="{FF2B5EF4-FFF2-40B4-BE49-F238E27FC236}">
-                <a16:creationId xmlns:a16="http://schemas.microsoft.com/office/drawing/2014/main" id="{D4F6FD49-E746-90F4-BE67-43E68971EB48}"/>
+                <a16:creationId xmlns:a16="http://schemas.microsoft.com/office/drawing/2014/main" id="{7FAB2AF5-3979-E19B-E997-C657E1F6A5B0}"/>
               </a:ext>
             </a:extLst>
           </p:cNvPr>
@@ -4644,7 +4644,7 @@
           <p:cNvPr id="16" name="kpi_label_4">
             <a:extLst>
               <a:ext uri="{FF2B5EF4-FFF2-40B4-BE49-F238E27FC236}">
-                <a16:creationId xmlns:a16="http://schemas.microsoft.com/office/drawing/2014/main" id="{AF70911A-2686-0507-533B-315524AB37B9}"/>
+                <a16:creationId xmlns:a16="http://schemas.microsoft.com/office/drawing/2014/main" id="{D7D991AB-E1B3-3DBF-01EB-43B74FE5A7A4}"/>
               </a:ext>
             </a:extLst>
           </p:cNvPr>
@@ -4692,7 +4692,7 @@
           <p:cNvPr id="17" name="source">
             <a:extLst>
               <a:ext uri="{FF2B5EF4-FFF2-40B4-BE49-F238E27FC236}">
-                <a16:creationId xmlns:a16="http://schemas.microsoft.com/office/drawing/2014/main" id="{E008C133-7ED1-F076-DCAE-0BE725998165}"/>
+                <a16:creationId xmlns:a16="http://schemas.microsoft.com/office/drawing/2014/main" id="{6FFF149D-FC1F-7F64-667A-CFC21FB80BBA}"/>
               </a:ext>
             </a:extLst>
           </p:cNvPr>
@@ -4747,7 +4747,7 @@
     </p:spTree>
     <p:extLst>
       <p:ext uri="{BB962C8B-B14F-4D97-AF65-F5344CB8AC3E}">
-        <p14:creationId xmlns:p14="http://schemas.microsoft.com/office/powerpoint/2010/main" val="742761702"/>
+        <p14:creationId xmlns:p14="http://schemas.microsoft.com/office/powerpoint/2010/main" val="48227563"/>
       </p:ext>
     </p:extLst>
   </p:cSld>
@@ -4779,7 +4779,7 @@
           <p:cNvPr id="7" name="creative_background">
             <a:extLst>
               <a:ext uri="{FF2B5EF4-FFF2-40B4-BE49-F238E27FC236}">
-                <a16:creationId xmlns:a16="http://schemas.microsoft.com/office/drawing/2014/main" id="{E1E4B4D6-8782-3E60-F047-6F6E59D73C10}"/>
+                <a16:creationId xmlns:a16="http://schemas.microsoft.com/office/drawing/2014/main" id="{4376A85B-A346-A801-9024-EDC22F87F3A0}"/>
               </a:ext>
             </a:extLst>
           </p:cNvPr>
@@ -4852,7 +4852,7 @@
           <a:bodyPr/>
           <a:lstStyle/>
           <a:p>
-            <a:fld id="{596016C9-F9DB-4EE1-B518-EB72C8994E73}" type="datetimeFigureOut">
+            <a:fld id="{8A86AB56-393C-4917-9670-5C316C4C0775}" type="datetimeFigureOut">
               <a:rPr lang="en-US" smtClean="0"/>
               <a:t>10/3/2026</a:t>
             </a:fld>
@@ -4894,7 +4894,7 @@
           <a:bodyPr/>
           <a:lstStyle/>
           <a:p>
-            <a:fld id="{E3F824D1-671D-418F-B16B-13B951B4F770}" type="slidenum">
+            <a:fld id="{FC63DECE-DCAF-48B3-9E38-EA00981B3229}" type="slidenum">
               <a:rPr lang="en-US" smtClean="0"/>
               <a:t>‹#›</a:t>
             </a:fld>
@@ -4907,7 +4907,7 @@
           <p:cNvPr id="8" name="item_1_title">
             <a:extLst>
               <a:ext uri="{FF2B5EF4-FFF2-40B4-BE49-F238E27FC236}">
-                <a16:creationId xmlns:a16="http://schemas.microsoft.com/office/drawing/2014/main" id="{D771CBA5-9268-3132-6807-86D011DEBB83}"/>
+                <a16:creationId xmlns:a16="http://schemas.microsoft.com/office/drawing/2014/main" id="{A6DE7F83-D9A9-2C23-A4D1-E50C988D43A7}"/>
               </a:ext>
             </a:extLst>
           </p:cNvPr>
@@ -4957,7 +4957,7 @@
           <p:cNvPr id="9" name="item_1">
             <a:extLst>
               <a:ext uri="{FF2B5EF4-FFF2-40B4-BE49-F238E27FC236}">
-                <a16:creationId xmlns:a16="http://schemas.microsoft.com/office/drawing/2014/main" id="{22E98B0D-B6A5-A505-A4FC-36F621474B18}"/>
+                <a16:creationId xmlns:a16="http://schemas.microsoft.com/office/drawing/2014/main" id="{73714A01-5DB0-0B64-D328-9AB47C343967}"/>
               </a:ext>
             </a:extLst>
           </p:cNvPr>
@@ -5005,7 +5005,7 @@
           <p:cNvPr id="10" name="item_2_title">
             <a:extLst>
               <a:ext uri="{FF2B5EF4-FFF2-40B4-BE49-F238E27FC236}">
-                <a16:creationId xmlns:a16="http://schemas.microsoft.com/office/drawing/2014/main" id="{50DE292A-9155-BD9C-A6DD-43BC92CC3627}"/>
+                <a16:creationId xmlns:a16="http://schemas.microsoft.com/office/drawing/2014/main" id="{3C31A2B5-52AA-03EE-C219-028DD0B4A80B}"/>
               </a:ext>
             </a:extLst>
           </p:cNvPr>
@@ -5058,7 +5058,7 @@
           <p:cNvPr id="11" name="item_2">
             <a:extLst>
               <a:ext uri="{FF2B5EF4-FFF2-40B4-BE49-F238E27FC236}">
-                <a16:creationId xmlns:a16="http://schemas.microsoft.com/office/drawing/2014/main" id="{0AC115D8-D852-1EB9-C3CA-763038856FFF}"/>
+                <a16:creationId xmlns:a16="http://schemas.microsoft.com/office/drawing/2014/main" id="{3E85E518-5BD2-665D-731A-122941B09BED}"/>
               </a:ext>
             </a:extLst>
           </p:cNvPr>
@@ -5106,7 +5106,7 @@
           <p:cNvPr id="12" name="item_3_title">
             <a:extLst>
               <a:ext uri="{FF2B5EF4-FFF2-40B4-BE49-F238E27FC236}">
-                <a16:creationId xmlns:a16="http://schemas.microsoft.com/office/drawing/2014/main" id="{CBEAA20A-6BB8-F300-EF8C-8D9CAB779A61}"/>
+                <a16:creationId xmlns:a16="http://schemas.microsoft.com/office/drawing/2014/main" id="{401926FE-666D-2BE1-1BCC-32C381B4E2B2}"/>
               </a:ext>
             </a:extLst>
           </p:cNvPr>
@@ -5159,7 +5159,7 @@
           <p:cNvPr id="13" name="item_3">
             <a:extLst>
               <a:ext uri="{FF2B5EF4-FFF2-40B4-BE49-F238E27FC236}">
-                <a16:creationId xmlns:a16="http://schemas.microsoft.com/office/drawing/2014/main" id="{D495921D-057E-D528-1479-4D3DBACB5BFA}"/>
+                <a16:creationId xmlns:a16="http://schemas.microsoft.com/office/drawing/2014/main" id="{7D1776F2-7719-F41C-C241-23F2723AF85F}"/>
               </a:ext>
             </a:extLst>
           </p:cNvPr>
@@ -5207,7 +5207,7 @@
           <p:cNvPr id="14" name="item_4_title">
             <a:extLst>
               <a:ext uri="{FF2B5EF4-FFF2-40B4-BE49-F238E27FC236}">
-                <a16:creationId xmlns:a16="http://schemas.microsoft.com/office/drawing/2014/main" id="{A569F38E-775F-DCDC-7925-375041FB0425}"/>
+                <a16:creationId xmlns:a16="http://schemas.microsoft.com/office/drawing/2014/main" id="{80D3FF56-E97B-0D9B-76FF-F07DA2836384}"/>
               </a:ext>
             </a:extLst>
           </p:cNvPr>
@@ -5260,7 +5260,7 @@
           <p:cNvPr id="15" name="item_4">
             <a:extLst>
               <a:ext uri="{FF2B5EF4-FFF2-40B4-BE49-F238E27FC236}">
-                <a16:creationId xmlns:a16="http://schemas.microsoft.com/office/drawing/2014/main" id="{027938C2-8F9B-1C1F-6C02-DCA72BB86DB6}"/>
+                <a16:creationId xmlns:a16="http://schemas.microsoft.com/office/drawing/2014/main" id="{F74D71D7-3356-8303-3383-E02D03EDE4E4}"/>
               </a:ext>
             </a:extLst>
           </p:cNvPr>
@@ -5308,7 +5308,7 @@
           <p:cNvPr id="16" name="source">
             <a:extLst>
               <a:ext uri="{FF2B5EF4-FFF2-40B4-BE49-F238E27FC236}">
-                <a16:creationId xmlns:a16="http://schemas.microsoft.com/office/drawing/2014/main" id="{4BFABCF9-A959-0B07-A14C-CDE826D61CF6}"/>
+                <a16:creationId xmlns:a16="http://schemas.microsoft.com/office/drawing/2014/main" id="{A6EC2CC0-8F2C-DB51-0E03-1DB1F8F0DE44}"/>
               </a:ext>
             </a:extLst>
           </p:cNvPr>
@@ -5363,7 +5363,7 @@
     </p:spTree>
     <p:extLst>
       <p:ext uri="{BB962C8B-B14F-4D97-AF65-F5344CB8AC3E}">
-        <p14:creationId xmlns:p14="http://schemas.microsoft.com/office/powerpoint/2010/main" val="3796676343"/>
+        <p14:creationId xmlns:p14="http://schemas.microsoft.com/office/powerpoint/2010/main" val="723017372"/>
       </p:ext>
     </p:extLst>
   </p:cSld>
@@ -5395,7 +5395,7 @@
           <p:cNvPr id="7" name="creative_background">
             <a:extLst>
               <a:ext uri="{FF2B5EF4-FFF2-40B4-BE49-F238E27FC236}">
-                <a16:creationId xmlns:a16="http://schemas.microsoft.com/office/drawing/2014/main" id="{5FEAC11F-2AA8-764D-235D-78B35F5105C5}"/>
+                <a16:creationId xmlns:a16="http://schemas.microsoft.com/office/drawing/2014/main" id="{81480C18-CCF2-F213-CE52-2F2A3E9E9E73}"/>
               </a:ext>
             </a:extLst>
           </p:cNvPr>
@@ -5468,7 +5468,7 @@
           <a:bodyPr/>
           <a:lstStyle/>
           <a:p>
-            <a:fld id="{596016C9-F9DB-4EE1-B518-EB72C8994E73}" type="datetimeFigureOut">
+            <a:fld id="{8A86AB56-393C-4917-9670-5C316C4C0775}" type="datetimeFigureOut">
               <a:rPr lang="en-US" smtClean="0"/>
               <a:t>10/3/2026</a:t>
             </a:fld>
@@ -5510,7 +5510,7 @@
           <a:bodyPr/>
           <a:lstStyle/>
           <a:p>
-            <a:fld id="{E3F824D1-671D-418F-B16B-13B951B4F770}" type="slidenum">
+            <a:fld id="{FC63DECE-DCAF-48B3-9E38-EA00981B3229}" type="slidenum">
               <a:rPr lang="en-US" smtClean="0"/>
               <a:t>‹#›</a:t>
             </a:fld>
@@ -5523,7 +5523,7 @@
           <p:cNvPr id="8" name="marker_1">
             <a:extLst>
               <a:ext uri="{FF2B5EF4-FFF2-40B4-BE49-F238E27FC236}">
-                <a16:creationId xmlns:a16="http://schemas.microsoft.com/office/drawing/2014/main" id="{0657404C-C107-7D66-8F9F-F801082592B7}"/>
+                <a16:creationId xmlns:a16="http://schemas.microsoft.com/office/drawing/2014/main" id="{EB6DB9E1-D78B-8E25-9EC6-8F6DB2F26B98}"/>
               </a:ext>
             </a:extLst>
           </p:cNvPr>
@@ -5579,7 +5579,7 @@
           <p:cNvPr id="9" name="item_1_title">
             <a:extLst>
               <a:ext uri="{FF2B5EF4-FFF2-40B4-BE49-F238E27FC236}">
-                <a16:creationId xmlns:a16="http://schemas.microsoft.com/office/drawing/2014/main" id="{8132D52D-70D9-D188-DAD4-6C8E2F4C206F}"/>
+                <a16:creationId xmlns:a16="http://schemas.microsoft.com/office/drawing/2014/main" id="{D391D954-81D1-3F55-2395-7A2BB0487DB6}"/>
               </a:ext>
             </a:extLst>
           </p:cNvPr>
@@ -5632,7 +5632,7 @@
           <p:cNvPr id="10" name="item_1">
             <a:extLst>
               <a:ext uri="{FF2B5EF4-FFF2-40B4-BE49-F238E27FC236}">
-                <a16:creationId xmlns:a16="http://schemas.microsoft.com/office/drawing/2014/main" id="{C72BCA16-D332-23CC-6C56-9BB978A345A2}"/>
+                <a16:creationId xmlns:a16="http://schemas.microsoft.com/office/drawing/2014/main" id="{E8CC23CE-B43D-353B-9229-1C5957D137F7}"/>
               </a:ext>
             </a:extLst>
           </p:cNvPr>
@@ -5680,7 +5680,7 @@
           <p:cNvPr id="11" name="marker_2">
             <a:extLst>
               <a:ext uri="{FF2B5EF4-FFF2-40B4-BE49-F238E27FC236}">
-                <a16:creationId xmlns:a16="http://schemas.microsoft.com/office/drawing/2014/main" id="{FB1C94E2-014F-BF11-B7DD-99A318E6ABB6}"/>
+                <a16:creationId xmlns:a16="http://schemas.microsoft.com/office/drawing/2014/main" id="{C73DD8CF-2BDF-F9C2-AF93-48E1D600AE00}"/>
               </a:ext>
             </a:extLst>
           </p:cNvPr>
@@ -5736,7 +5736,7 @@
           <p:cNvPr id="12" name="item_2_title">
             <a:extLst>
               <a:ext uri="{FF2B5EF4-FFF2-40B4-BE49-F238E27FC236}">
-                <a16:creationId xmlns:a16="http://schemas.microsoft.com/office/drawing/2014/main" id="{D3CBF190-EF23-C37D-FDB2-8C00FA62A436}"/>
+                <a16:creationId xmlns:a16="http://schemas.microsoft.com/office/drawing/2014/main" id="{AEF4F28B-5A3B-771D-E9E4-FF16D9D0F0E2}"/>
               </a:ext>
             </a:extLst>
           </p:cNvPr>
@@ -5789,7 +5789,7 @@
           <p:cNvPr id="13" name="item_2">
             <a:extLst>
               <a:ext uri="{FF2B5EF4-FFF2-40B4-BE49-F238E27FC236}">
-                <a16:creationId xmlns:a16="http://schemas.microsoft.com/office/drawing/2014/main" id="{25F95659-08D4-B71F-E541-83BBEDF0D257}"/>
+                <a16:creationId xmlns:a16="http://schemas.microsoft.com/office/drawing/2014/main" id="{101F5986-F577-CD9E-6164-4E67FDF8EF7D}"/>
               </a:ext>
             </a:extLst>
           </p:cNvPr>
@@ -5837,7 +5837,7 @@
           <p:cNvPr id="14" name="source">
             <a:extLst>
               <a:ext uri="{FF2B5EF4-FFF2-40B4-BE49-F238E27FC236}">
-                <a16:creationId xmlns:a16="http://schemas.microsoft.com/office/drawing/2014/main" id="{AAA6C51B-DF67-BB18-7968-588945845FA8}"/>
+                <a16:creationId xmlns:a16="http://schemas.microsoft.com/office/drawing/2014/main" id="{4780ABE8-4AC9-2454-DE0C-90E0822909DF}"/>
               </a:ext>
             </a:extLst>
           </p:cNvPr>
@@ -5892,7 +5892,7 @@
     </p:spTree>
     <p:extLst>
       <p:ext uri="{BB962C8B-B14F-4D97-AF65-F5344CB8AC3E}">
-        <p14:creationId xmlns:p14="http://schemas.microsoft.com/office/powerpoint/2010/main" val="3530091133"/>
+        <p14:creationId xmlns:p14="http://schemas.microsoft.com/office/powerpoint/2010/main" val="4157894567"/>
       </p:ext>
     </p:extLst>
   </p:cSld>
@@ -5924,7 +5924,7 @@
           <p:cNvPr id="7" name="creative_background">
             <a:extLst>
               <a:ext uri="{FF2B5EF4-FFF2-40B4-BE49-F238E27FC236}">
-                <a16:creationId xmlns:a16="http://schemas.microsoft.com/office/drawing/2014/main" id="{FAC0C52F-7BC7-A2D4-6B2E-5C4AAEA06D55}"/>
+                <a16:creationId xmlns:a16="http://schemas.microsoft.com/office/drawing/2014/main" id="{89BCC19C-7958-D45A-C13B-F0491E5B1C0D}"/>
               </a:ext>
             </a:extLst>
           </p:cNvPr>
@@ -5997,7 +5997,7 @@
           <a:bodyPr/>
           <a:lstStyle/>
           <a:p>
-            <a:fld id="{596016C9-F9DB-4EE1-B518-EB72C8994E73}" type="datetimeFigureOut">
+            <a:fld id="{8A86AB56-393C-4917-9670-5C316C4C0775}" type="datetimeFigureOut">
               <a:rPr lang="en-US" smtClean="0"/>
               <a:t>10/3/2026</a:t>
             </a:fld>
@@ -6039,7 +6039,7 @@
           <a:bodyPr/>
           <a:lstStyle/>
           <a:p>
-            <a:fld id="{E3F824D1-671D-418F-B16B-13B951B4F770}" type="slidenum">
+            <a:fld id="{FC63DECE-DCAF-48B3-9E38-EA00981B3229}" type="slidenum">
               <a:rPr lang="en-US" smtClean="0"/>
               <a:t>‹#›</a:t>
             </a:fld>
@@ -6052,7 +6052,7 @@
           <p:cNvPr id="8" name="item_1_title">
             <a:extLst>
               <a:ext uri="{FF2B5EF4-FFF2-40B4-BE49-F238E27FC236}">
-                <a16:creationId xmlns:a16="http://schemas.microsoft.com/office/drawing/2014/main" id="{99A5A537-9C65-1912-E2EC-D5AC0F007381}"/>
+                <a16:creationId xmlns:a16="http://schemas.microsoft.com/office/drawing/2014/main" id="{089F28A4-95BB-2027-8DE4-8C372BEAB05C}"/>
               </a:ext>
             </a:extLst>
           </p:cNvPr>
@@ -6102,7 +6102,7 @@
           <p:cNvPr id="9" name="item_1">
             <a:extLst>
               <a:ext uri="{FF2B5EF4-FFF2-40B4-BE49-F238E27FC236}">
-                <a16:creationId xmlns:a16="http://schemas.microsoft.com/office/drawing/2014/main" id="{2070847C-D7E7-8D91-DEEC-F676EE07AABE}"/>
+                <a16:creationId xmlns:a16="http://schemas.microsoft.com/office/drawing/2014/main" id="{B619F82A-BB91-F79B-FCFD-5DDF7615EC4E}"/>
               </a:ext>
             </a:extLst>
           </p:cNvPr>
@@ -6150,7 +6150,7 @@
           <p:cNvPr id="10" name="item_2_title">
             <a:extLst>
               <a:ext uri="{FF2B5EF4-FFF2-40B4-BE49-F238E27FC236}">
-                <a16:creationId xmlns:a16="http://schemas.microsoft.com/office/drawing/2014/main" id="{7F1C7849-1E5B-0F4E-EF51-213CEB6AE268}"/>
+                <a16:creationId xmlns:a16="http://schemas.microsoft.com/office/drawing/2014/main" id="{1F5ECAB6-6346-4271-3DE8-733C6F2E6930}"/>
               </a:ext>
             </a:extLst>
           </p:cNvPr>
@@ -6203,7 +6203,7 @@
           <p:cNvPr id="11" name="item_2">
             <a:extLst>
               <a:ext uri="{FF2B5EF4-FFF2-40B4-BE49-F238E27FC236}">
-                <a16:creationId xmlns:a16="http://schemas.microsoft.com/office/drawing/2014/main" id="{4B14942A-81DA-C2A1-8064-5AE991BFCA15}"/>
+                <a16:creationId xmlns:a16="http://schemas.microsoft.com/office/drawing/2014/main" id="{BA8C489B-47D6-ECC2-C7B5-7E8F46F97218}"/>
               </a:ext>
             </a:extLst>
           </p:cNvPr>
@@ -6251,7 +6251,7 @@
           <p:cNvPr id="12" name="item_3_title">
             <a:extLst>
               <a:ext uri="{FF2B5EF4-FFF2-40B4-BE49-F238E27FC236}">
-                <a16:creationId xmlns:a16="http://schemas.microsoft.com/office/drawing/2014/main" id="{F584AFA4-B1AB-7571-B8C1-C142CF5C855A}"/>
+                <a16:creationId xmlns:a16="http://schemas.microsoft.com/office/drawing/2014/main" id="{D72FC3C2-6511-8488-9C26-FE513C79B768}"/>
               </a:ext>
             </a:extLst>
           </p:cNvPr>
@@ -6304,7 +6304,7 @@
           <p:cNvPr id="13" name="item_3">
             <a:extLst>
               <a:ext uri="{FF2B5EF4-FFF2-40B4-BE49-F238E27FC236}">
-                <a16:creationId xmlns:a16="http://schemas.microsoft.com/office/drawing/2014/main" id="{A3CA51DB-36D1-B1E5-84C5-04A0C2DC237F}"/>
+                <a16:creationId xmlns:a16="http://schemas.microsoft.com/office/drawing/2014/main" id="{9C241E8A-E5D8-BB83-7B58-E3754E4B17FE}"/>
               </a:ext>
             </a:extLst>
           </p:cNvPr>
@@ -6352,7 +6352,7 @@
           <p:cNvPr id="14" name="item_4_title">
             <a:extLst>
               <a:ext uri="{FF2B5EF4-FFF2-40B4-BE49-F238E27FC236}">
-                <a16:creationId xmlns:a16="http://schemas.microsoft.com/office/drawing/2014/main" id="{17839832-A200-1E9A-6488-6FB5505D1D0D}"/>
+                <a16:creationId xmlns:a16="http://schemas.microsoft.com/office/drawing/2014/main" id="{B593584A-D91A-E8BD-3B8F-F0382920ED2A}"/>
               </a:ext>
             </a:extLst>
           </p:cNvPr>
@@ -6405,7 +6405,7 @@
           <p:cNvPr id="15" name="item_4">
             <a:extLst>
               <a:ext uri="{FF2B5EF4-FFF2-40B4-BE49-F238E27FC236}">
-                <a16:creationId xmlns:a16="http://schemas.microsoft.com/office/drawing/2014/main" id="{03929A34-33E5-54CC-463E-8425BF9AEDF4}"/>
+                <a16:creationId xmlns:a16="http://schemas.microsoft.com/office/drawing/2014/main" id="{C40425AF-1C50-5B7E-7904-E4A635AC3A1F}"/>
               </a:ext>
             </a:extLst>
           </p:cNvPr>
@@ -6453,7 +6453,7 @@
           <p:cNvPr id="16" name="source">
             <a:extLst>
               <a:ext uri="{FF2B5EF4-FFF2-40B4-BE49-F238E27FC236}">
-                <a16:creationId xmlns:a16="http://schemas.microsoft.com/office/drawing/2014/main" id="{8AC07776-BE16-C31B-D1CF-05EF6C2917B7}"/>
+                <a16:creationId xmlns:a16="http://schemas.microsoft.com/office/drawing/2014/main" id="{F22FFED7-4548-73C8-E78B-8AF335EAEE42}"/>
               </a:ext>
             </a:extLst>
           </p:cNvPr>
@@ -6508,7 +6508,7 @@
     </p:spTree>
     <p:extLst>
       <p:ext uri="{BB962C8B-B14F-4D97-AF65-F5344CB8AC3E}">
-        <p14:creationId xmlns:p14="http://schemas.microsoft.com/office/powerpoint/2010/main" val="636196678"/>
+        <p14:creationId xmlns:p14="http://schemas.microsoft.com/office/powerpoint/2010/main" val="3901711979"/>
       </p:ext>
     </p:extLst>
   </p:cSld>
@@ -6540,7 +6540,7 @@
           <p:cNvPr id="7" name="creative_background">
             <a:extLst>
               <a:ext uri="{FF2B5EF4-FFF2-40B4-BE49-F238E27FC236}">
-                <a16:creationId xmlns:a16="http://schemas.microsoft.com/office/drawing/2014/main" id="{4675FCE2-6D8C-7686-B91B-A1B1CAB058D3}"/>
+                <a16:creationId xmlns:a16="http://schemas.microsoft.com/office/drawing/2014/main" id="{5E495139-7A4C-F88E-10F4-8C0A8FD2B626}"/>
               </a:ext>
             </a:extLst>
           </p:cNvPr>
@@ -6613,7 +6613,7 @@
           <a:bodyPr/>
           <a:lstStyle/>
           <a:p>
-            <a:fld id="{596016C9-F9DB-4EE1-B518-EB72C8994E73}" type="datetimeFigureOut">
+            <a:fld id="{8A86AB56-393C-4917-9670-5C316C4C0775}" type="datetimeFigureOut">
               <a:rPr lang="en-US" smtClean="0"/>
               <a:t>10/3/2026</a:t>
             </a:fld>
@@ -6655,7 +6655,7 @@
           <a:bodyPr/>
           <a:lstStyle/>
           <a:p>
-            <a:fld id="{E3F824D1-671D-418F-B16B-13B951B4F770}" type="slidenum">
+            <a:fld id="{FC63DECE-DCAF-48B3-9E38-EA00981B3229}" type="slidenum">
               <a:rPr lang="en-US" smtClean="0"/>
               <a:t>‹#›</a:t>
             </a:fld>
@@ -6668,7 +6668,7 @@
           <p:cNvPr id="8" name="item_1_title">
             <a:extLst>
               <a:ext uri="{FF2B5EF4-FFF2-40B4-BE49-F238E27FC236}">
-                <a16:creationId xmlns:a16="http://schemas.microsoft.com/office/drawing/2014/main" id="{46415DC3-84B9-BE25-3AFB-D8173902D1FB}"/>
+                <a16:creationId xmlns:a16="http://schemas.microsoft.com/office/drawing/2014/main" id="{37BE7071-02A9-C238-7941-98BA1B4EDDE5}"/>
               </a:ext>
             </a:extLst>
           </p:cNvPr>
@@ -6718,7 +6718,7 @@
           <p:cNvPr id="9" name="item_1">
             <a:extLst>
               <a:ext uri="{FF2B5EF4-FFF2-40B4-BE49-F238E27FC236}">
-                <a16:creationId xmlns:a16="http://schemas.microsoft.com/office/drawing/2014/main" id="{15C7AC45-25C0-9E98-1076-A25914D5F760}"/>
+                <a16:creationId xmlns:a16="http://schemas.microsoft.com/office/drawing/2014/main" id="{9D51CD31-A48A-7EEC-2DB3-C62A499459B2}"/>
               </a:ext>
             </a:extLst>
           </p:cNvPr>
@@ -6766,7 +6766,7 @@
           <p:cNvPr id="10" name="item_2_title">
             <a:extLst>
               <a:ext uri="{FF2B5EF4-FFF2-40B4-BE49-F238E27FC236}">
-                <a16:creationId xmlns:a16="http://schemas.microsoft.com/office/drawing/2014/main" id="{95A791B6-CB9E-45C7-B33C-A28E46904BA4}"/>
+                <a16:creationId xmlns:a16="http://schemas.microsoft.com/office/drawing/2014/main" id="{47FFE3D8-3B7F-765F-4BC2-66F90EA8A911}"/>
               </a:ext>
             </a:extLst>
           </p:cNvPr>
@@ -6819,7 +6819,7 @@
           <p:cNvPr id="11" name="item_2">
             <a:extLst>
               <a:ext uri="{FF2B5EF4-FFF2-40B4-BE49-F238E27FC236}">
-                <a16:creationId xmlns:a16="http://schemas.microsoft.com/office/drawing/2014/main" id="{FC6DB748-B08B-1DA6-A06E-EDD6F76A067E}"/>
+                <a16:creationId xmlns:a16="http://schemas.microsoft.com/office/drawing/2014/main" id="{A0A21ACA-18AC-B462-FB2D-DEE8CB33F919}"/>
               </a:ext>
             </a:extLst>
           </p:cNvPr>
@@ -6867,7 +6867,7 @@
           <p:cNvPr id="12" name="item_3_title">
             <a:extLst>
               <a:ext uri="{FF2B5EF4-FFF2-40B4-BE49-F238E27FC236}">
-                <a16:creationId xmlns:a16="http://schemas.microsoft.com/office/drawing/2014/main" id="{6D9E7A7F-CE79-2B92-9308-71ED2B1B0212}"/>
+                <a16:creationId xmlns:a16="http://schemas.microsoft.com/office/drawing/2014/main" id="{838C86F2-64A9-4382-638B-A674128D9D66}"/>
               </a:ext>
             </a:extLst>
           </p:cNvPr>
@@ -6920,7 +6920,7 @@
           <p:cNvPr id="13" name="item_3">
             <a:extLst>
               <a:ext uri="{FF2B5EF4-FFF2-40B4-BE49-F238E27FC236}">
-                <a16:creationId xmlns:a16="http://schemas.microsoft.com/office/drawing/2014/main" id="{5A2DB89D-B66C-7194-CED9-1DC0C672933C}"/>
+                <a16:creationId xmlns:a16="http://schemas.microsoft.com/office/drawing/2014/main" id="{5C4863AC-F968-7904-BCF0-F0488516D9F5}"/>
               </a:ext>
             </a:extLst>
           </p:cNvPr>
@@ -6968,7 +6968,7 @@
           <p:cNvPr id="14" name="item_4_title">
             <a:extLst>
               <a:ext uri="{FF2B5EF4-FFF2-40B4-BE49-F238E27FC236}">
-                <a16:creationId xmlns:a16="http://schemas.microsoft.com/office/drawing/2014/main" id="{F0FDCF8F-8993-BCE3-17F6-FC9BFAE17864}"/>
+                <a16:creationId xmlns:a16="http://schemas.microsoft.com/office/drawing/2014/main" id="{6E2CBB50-749C-3988-A281-493C7C8FA6C2}"/>
               </a:ext>
             </a:extLst>
           </p:cNvPr>
@@ -7021,7 +7021,7 @@
           <p:cNvPr id="15" name="item_4">
             <a:extLst>
               <a:ext uri="{FF2B5EF4-FFF2-40B4-BE49-F238E27FC236}">
-                <a16:creationId xmlns:a16="http://schemas.microsoft.com/office/drawing/2014/main" id="{7993541D-3248-6CAA-5EC7-EF9F969345CC}"/>
+                <a16:creationId xmlns:a16="http://schemas.microsoft.com/office/drawing/2014/main" id="{7FA5278D-E5F2-3C40-8A19-A8EB99018312}"/>
               </a:ext>
             </a:extLst>
           </p:cNvPr>
@@ -7069,7 +7069,7 @@
           <p:cNvPr id="16" name="source">
             <a:extLst>
               <a:ext uri="{FF2B5EF4-FFF2-40B4-BE49-F238E27FC236}">
-                <a16:creationId xmlns:a16="http://schemas.microsoft.com/office/drawing/2014/main" id="{16436E00-BF16-BB33-F6A8-B599C714213D}"/>
+                <a16:creationId xmlns:a16="http://schemas.microsoft.com/office/drawing/2014/main" id="{22935531-D851-A72C-37A4-2B94B0406C75}"/>
               </a:ext>
             </a:extLst>
           </p:cNvPr>
@@ -7124,7 +7124,7 @@
     </p:spTree>
     <p:extLst>
       <p:ext uri="{BB962C8B-B14F-4D97-AF65-F5344CB8AC3E}">
-        <p14:creationId xmlns:p14="http://schemas.microsoft.com/office/powerpoint/2010/main" val="2325430464"/>
+        <p14:creationId xmlns:p14="http://schemas.microsoft.com/office/powerpoint/2010/main" val="3009945822"/>
       </p:ext>
     </p:extLst>
   </p:cSld>
@@ -7156,7 +7156,7 @@
           <p:cNvPr id="7" name="creative_background">
             <a:extLst>
               <a:ext uri="{FF2B5EF4-FFF2-40B4-BE49-F238E27FC236}">
-                <a16:creationId xmlns:a16="http://schemas.microsoft.com/office/drawing/2014/main" id="{B6B1A256-4F2F-83A2-5255-C532721A4D69}"/>
+                <a16:creationId xmlns:a16="http://schemas.microsoft.com/office/drawing/2014/main" id="{8FC34819-A488-51BB-E2A6-A26B833874BF}"/>
               </a:ext>
             </a:extLst>
           </p:cNvPr>
@@ -7229,7 +7229,7 @@
           <a:bodyPr/>
           <a:lstStyle/>
           <a:p>
-            <a:fld id="{596016C9-F9DB-4EE1-B518-EB72C8994E73}" type="datetimeFigureOut">
+            <a:fld id="{8A86AB56-393C-4917-9670-5C316C4C0775}" type="datetimeFigureOut">
               <a:rPr lang="en-US" smtClean="0"/>
               <a:t>10/3/2026</a:t>
             </a:fld>
@@ -7271,7 +7271,7 @@
           <a:bodyPr/>
           <a:lstStyle/>
           <a:p>
-            <a:fld id="{E3F824D1-671D-418F-B16B-13B951B4F770}" type="slidenum">
+            <a:fld id="{FC63DECE-DCAF-48B3-9E38-EA00981B3229}" type="slidenum">
               <a:rPr lang="en-US" smtClean="0"/>
               <a:t>‹#›</a:t>
             </a:fld>
@@ -7284,7 +7284,7 @@
           <p:cNvPr id="8" name="kpi_value_1">
             <a:extLst>
               <a:ext uri="{FF2B5EF4-FFF2-40B4-BE49-F238E27FC236}">
-                <a16:creationId xmlns:a16="http://schemas.microsoft.com/office/drawing/2014/main" id="{08BF788A-EFE1-7760-B65A-246A0405B3F6}"/>
+                <a16:creationId xmlns:a16="http://schemas.microsoft.com/office/drawing/2014/main" id="{BA2177DB-0F92-C176-D641-374863CFC713}"/>
               </a:ext>
             </a:extLst>
           </p:cNvPr>
@@ -7334,7 +7334,7 @@
           <p:cNvPr id="9" name="kpi_label_1">
             <a:extLst>
               <a:ext uri="{FF2B5EF4-FFF2-40B4-BE49-F238E27FC236}">
-                <a16:creationId xmlns:a16="http://schemas.microsoft.com/office/drawing/2014/main" id="{864120FE-775E-1829-1796-2BF2B4C9AAAD}"/>
+                <a16:creationId xmlns:a16="http://schemas.microsoft.com/office/drawing/2014/main" id="{05DDA556-81C9-8BE4-A8D2-0135EFC76CE9}"/>
               </a:ext>
             </a:extLst>
           </p:cNvPr>
@@ -7382,7 +7382,7 @@
           <p:cNvPr id="10" name="quote">
             <a:extLst>
               <a:ext uri="{FF2B5EF4-FFF2-40B4-BE49-F238E27FC236}">
-                <a16:creationId xmlns:a16="http://schemas.microsoft.com/office/drawing/2014/main" id="{191C97A7-5C81-E3E8-8DD1-E9E8B9F24898}"/>
+                <a16:creationId xmlns:a16="http://schemas.microsoft.com/office/drawing/2014/main" id="{B8416755-136D-13B1-B1CD-5BFC8902034D}"/>
               </a:ext>
             </a:extLst>
           </p:cNvPr>
@@ -7432,7 +7432,7 @@
           <p:cNvPr id="11" name="attribution">
             <a:extLst>
               <a:ext uri="{FF2B5EF4-FFF2-40B4-BE49-F238E27FC236}">
-                <a16:creationId xmlns:a16="http://schemas.microsoft.com/office/drawing/2014/main" id="{51D91BA3-27DB-06BA-FCFC-ABB848AB9701}"/>
+                <a16:creationId xmlns:a16="http://schemas.microsoft.com/office/drawing/2014/main" id="{08D80EE8-F9FB-CD4C-FCAF-7A4EB40652EB}"/>
               </a:ext>
             </a:extLst>
           </p:cNvPr>
@@ -7480,7 +7480,7 @@
           <p:cNvPr id="12" name="item_1_title">
             <a:extLst>
               <a:ext uri="{FF2B5EF4-FFF2-40B4-BE49-F238E27FC236}">
-                <a16:creationId xmlns:a16="http://schemas.microsoft.com/office/drawing/2014/main" id="{710AFE10-3F1C-779E-A6D6-BAC32D7283AC}"/>
+                <a16:creationId xmlns:a16="http://schemas.microsoft.com/office/drawing/2014/main" id="{8E7F8B2C-6CD8-AD61-DAD9-983FBB295D82}"/>
               </a:ext>
             </a:extLst>
           </p:cNvPr>
@@ -7533,7 +7533,7 @@
           <p:cNvPr id="13" name="item_1">
             <a:extLst>
               <a:ext uri="{FF2B5EF4-FFF2-40B4-BE49-F238E27FC236}">
-                <a16:creationId xmlns:a16="http://schemas.microsoft.com/office/drawing/2014/main" id="{EA226F26-10AF-6F8A-8D62-3E72688ACFB5}"/>
+                <a16:creationId xmlns:a16="http://schemas.microsoft.com/office/drawing/2014/main" id="{F357A9F1-903B-3C11-F443-FE3DEF6D8DCA}"/>
               </a:ext>
             </a:extLst>
           </p:cNvPr>
@@ -7581,7 +7581,7 @@
           <p:cNvPr id="14" name="source">
             <a:extLst>
               <a:ext uri="{FF2B5EF4-FFF2-40B4-BE49-F238E27FC236}">
-                <a16:creationId xmlns:a16="http://schemas.microsoft.com/office/drawing/2014/main" id="{D8F5BB9B-9E14-EE46-E92A-BD5D0195014F}"/>
+                <a16:creationId xmlns:a16="http://schemas.microsoft.com/office/drawing/2014/main" id="{5648937C-B8FD-EEDD-CBD0-4BF2E23421EB}"/>
               </a:ext>
             </a:extLst>
           </p:cNvPr>
@@ -7636,7 +7636,7 @@
     </p:spTree>
     <p:extLst>
       <p:ext uri="{BB962C8B-B14F-4D97-AF65-F5344CB8AC3E}">
-        <p14:creationId xmlns:p14="http://schemas.microsoft.com/office/powerpoint/2010/main" val="1643589665"/>
+        <p14:creationId xmlns:p14="http://schemas.microsoft.com/office/powerpoint/2010/main" val="3837746254"/>
       </p:ext>
     </p:extLst>
   </p:cSld>
@@ -7668,7 +7668,7 @@
           <p:cNvPr id="7" name="creative_background">
             <a:extLst>
               <a:ext uri="{FF2B5EF4-FFF2-40B4-BE49-F238E27FC236}">
-                <a16:creationId xmlns:a16="http://schemas.microsoft.com/office/drawing/2014/main" id="{752C1EFE-5129-E03C-4B2B-935872C6C933}"/>
+                <a16:creationId xmlns:a16="http://schemas.microsoft.com/office/drawing/2014/main" id="{0E416D25-ADA5-42DF-0F87-BADCDA2754F3}"/>
               </a:ext>
             </a:extLst>
           </p:cNvPr>
@@ -7741,7 +7741,7 @@
           <a:bodyPr/>
           <a:lstStyle/>
           <a:p>
-            <a:fld id="{596016C9-F9DB-4EE1-B518-EB72C8994E73}" type="datetimeFigureOut">
+            <a:fld id="{8A86AB56-393C-4917-9670-5C316C4C0775}" type="datetimeFigureOut">
               <a:rPr lang="en-US" smtClean="0"/>
               <a:t>10/3/2026</a:t>
             </a:fld>
@@ -7783,7 +7783,7 @@
           <a:bodyPr/>
           <a:lstStyle/>
           <a:p>
-            <a:fld id="{E3F824D1-671D-418F-B16B-13B951B4F770}" type="slidenum">
+            <a:fld id="{FC63DECE-DCAF-48B3-9E38-EA00981B3229}" type="slidenum">
               <a:rPr lang="en-US" smtClean="0"/>
               <a:t>‹#›</a:t>
             </a:fld>
@@ -7796,7 +7796,7 @@
           <p:cNvPr id="8" name="item_1_title">
             <a:extLst>
               <a:ext uri="{FF2B5EF4-FFF2-40B4-BE49-F238E27FC236}">
-                <a16:creationId xmlns:a16="http://schemas.microsoft.com/office/drawing/2014/main" id="{C2701E61-6B6B-EF1F-FAF6-98AD3E79ED86}"/>
+                <a16:creationId xmlns:a16="http://schemas.microsoft.com/office/drawing/2014/main" id="{1BA03539-E8CA-B3AB-C073-CFA50ED0C519}"/>
               </a:ext>
             </a:extLst>
           </p:cNvPr>
@@ -7846,7 +7846,7 @@
           <p:cNvPr id="9" name="item_1">
             <a:extLst>
               <a:ext uri="{FF2B5EF4-FFF2-40B4-BE49-F238E27FC236}">
-                <a16:creationId xmlns:a16="http://schemas.microsoft.com/office/drawing/2014/main" id="{D687D2B7-B25F-D3FE-AFDF-6C236803D07C}"/>
+                <a16:creationId xmlns:a16="http://schemas.microsoft.com/office/drawing/2014/main" id="{F7EE72DE-0A66-6931-4D1D-82268229FADB}"/>
               </a:ext>
             </a:extLst>
           </p:cNvPr>
@@ -7894,7 +7894,7 @@
           <p:cNvPr id="10" name="item_2_title">
             <a:extLst>
               <a:ext uri="{FF2B5EF4-FFF2-40B4-BE49-F238E27FC236}">
-                <a16:creationId xmlns:a16="http://schemas.microsoft.com/office/drawing/2014/main" id="{F47E3EBA-583D-2881-FAF5-3072B1FA852D}"/>
+                <a16:creationId xmlns:a16="http://schemas.microsoft.com/office/drawing/2014/main" id="{33CB3ED0-43D1-8DA9-CFB7-3EE089939233}"/>
               </a:ext>
             </a:extLst>
           </p:cNvPr>
@@ -7947,7 +7947,7 @@
           <p:cNvPr id="11" name="item_2">
             <a:extLst>
               <a:ext uri="{FF2B5EF4-FFF2-40B4-BE49-F238E27FC236}">
-                <a16:creationId xmlns:a16="http://schemas.microsoft.com/office/drawing/2014/main" id="{733D911F-259E-855A-FAC6-58040BBE3F65}"/>
+                <a16:creationId xmlns:a16="http://schemas.microsoft.com/office/drawing/2014/main" id="{093E7A86-7145-17C3-4CBD-9C278B4C2FF9}"/>
               </a:ext>
             </a:extLst>
           </p:cNvPr>
@@ -7995,7 +7995,7 @@
           <p:cNvPr id="12" name="item_3_title">
             <a:extLst>
               <a:ext uri="{FF2B5EF4-FFF2-40B4-BE49-F238E27FC236}">
-                <a16:creationId xmlns:a16="http://schemas.microsoft.com/office/drawing/2014/main" id="{FE0F4301-08B2-FDE0-2916-EB624AC132E9}"/>
+                <a16:creationId xmlns:a16="http://schemas.microsoft.com/office/drawing/2014/main" id="{E17FC46C-484D-BD0E-82E1-AAFF9BEE1418}"/>
               </a:ext>
             </a:extLst>
           </p:cNvPr>
@@ -8048,7 +8048,7 @@
           <p:cNvPr id="13" name="item_3">
             <a:extLst>
               <a:ext uri="{FF2B5EF4-FFF2-40B4-BE49-F238E27FC236}">
-                <a16:creationId xmlns:a16="http://schemas.microsoft.com/office/drawing/2014/main" id="{29489D1D-EF09-FB3A-451D-516FF8BBE0FF}"/>
+                <a16:creationId xmlns:a16="http://schemas.microsoft.com/office/drawing/2014/main" id="{44929D53-9B1F-4176-30D8-99535AB77009}"/>
               </a:ext>
             </a:extLst>
           </p:cNvPr>
@@ -8096,7 +8096,7 @@
           <p:cNvPr id="14" name="source">
             <a:extLst>
               <a:ext uri="{FF2B5EF4-FFF2-40B4-BE49-F238E27FC236}">
-                <a16:creationId xmlns:a16="http://schemas.microsoft.com/office/drawing/2014/main" id="{4E46A0FA-B4D6-2B86-F81F-CC024E100ABD}"/>
+                <a16:creationId xmlns:a16="http://schemas.microsoft.com/office/drawing/2014/main" id="{4D06E50A-D579-C971-5DE4-A3772BBA7C1B}"/>
               </a:ext>
             </a:extLst>
           </p:cNvPr>
@@ -8151,7 +8151,7 @@
     </p:spTree>
     <p:extLst>
       <p:ext uri="{BB962C8B-B14F-4D97-AF65-F5344CB8AC3E}">
-        <p14:creationId xmlns:p14="http://schemas.microsoft.com/office/powerpoint/2010/main" val="1961438499"/>
+        <p14:creationId xmlns:p14="http://schemas.microsoft.com/office/powerpoint/2010/main" val="3659167453"/>
       </p:ext>
     </p:extLst>
   </p:cSld>
@@ -8183,7 +8183,7 @@
           <p:cNvPr id="7" name="creative_background">
             <a:extLst>
               <a:ext uri="{FF2B5EF4-FFF2-40B4-BE49-F238E27FC236}">
-                <a16:creationId xmlns:a16="http://schemas.microsoft.com/office/drawing/2014/main" id="{D91ED92E-148C-4EF6-BDC0-62FD1CFB23F7}"/>
+                <a16:creationId xmlns:a16="http://schemas.microsoft.com/office/drawing/2014/main" id="{42C9B0B8-47D5-02E4-E8AC-AB247755E7D8}"/>
               </a:ext>
             </a:extLst>
           </p:cNvPr>
@@ -8256,7 +8256,7 @@
           <a:bodyPr/>
           <a:lstStyle/>
           <a:p>
-            <a:fld id="{596016C9-F9DB-4EE1-B518-EB72C8994E73}" type="datetimeFigureOut">
+            <a:fld id="{8A86AB56-393C-4917-9670-5C316C4C0775}" type="datetimeFigureOut">
               <a:rPr lang="en-US" smtClean="0"/>
               <a:t>10/3/2026</a:t>
             </a:fld>
@@ -8298,7 +8298,7 @@
           <a:bodyPr/>
           <a:lstStyle/>
           <a:p>
-            <a:fld id="{E3F824D1-671D-418F-B16B-13B951B4F770}" type="slidenum">
+            <a:fld id="{FC63DECE-DCAF-48B3-9E38-EA00981B3229}" type="slidenum">
               <a:rPr lang="en-US" smtClean="0"/>
               <a:t>‹#›</a:t>
             </a:fld>
@@ -8311,7 +8311,7 @@
           <p:cNvPr id="8" name="marker_1">
             <a:extLst>
               <a:ext uri="{FF2B5EF4-FFF2-40B4-BE49-F238E27FC236}">
-                <a16:creationId xmlns:a16="http://schemas.microsoft.com/office/drawing/2014/main" id="{94005D60-6837-EA0D-BD35-682C89C9C21A}"/>
+                <a16:creationId xmlns:a16="http://schemas.microsoft.com/office/drawing/2014/main" id="{AC282F9C-0535-6059-3CB4-9EBED4CD888C}"/>
               </a:ext>
             </a:extLst>
           </p:cNvPr>
@@ -8367,7 +8367,7 @@
           <p:cNvPr id="9" name="item_1_title">
             <a:extLst>
               <a:ext uri="{FF2B5EF4-FFF2-40B4-BE49-F238E27FC236}">
-                <a16:creationId xmlns:a16="http://schemas.microsoft.com/office/drawing/2014/main" id="{1C061FD1-F564-2A43-F50E-0BA4B9EEB236}"/>
+                <a16:creationId xmlns:a16="http://schemas.microsoft.com/office/drawing/2014/main" id="{90CD9F54-B1A2-2D60-BA33-1025EE6E503D}"/>
               </a:ext>
             </a:extLst>
           </p:cNvPr>
@@ -8420,7 +8420,7 @@
           <p:cNvPr id="10" name="item_1">
             <a:extLst>
               <a:ext uri="{FF2B5EF4-FFF2-40B4-BE49-F238E27FC236}">
-                <a16:creationId xmlns:a16="http://schemas.microsoft.com/office/drawing/2014/main" id="{1EBB4B0D-D87A-8A5E-9919-7475DC9924B5}"/>
+                <a16:creationId xmlns:a16="http://schemas.microsoft.com/office/drawing/2014/main" id="{754E7F1F-01C6-4D91-FDA9-FB9BB0E5A763}"/>
               </a:ext>
             </a:extLst>
           </p:cNvPr>
@@ -8468,7 +8468,7 @@
           <p:cNvPr id="11" name="marker_2">
             <a:extLst>
               <a:ext uri="{FF2B5EF4-FFF2-40B4-BE49-F238E27FC236}">
-                <a16:creationId xmlns:a16="http://schemas.microsoft.com/office/drawing/2014/main" id="{2AE550FB-502F-9A03-8AF9-CC6C221F425B}"/>
+                <a16:creationId xmlns:a16="http://schemas.microsoft.com/office/drawing/2014/main" id="{94E909DB-D0EC-DE97-6BF5-F35D0B60643E}"/>
               </a:ext>
             </a:extLst>
           </p:cNvPr>
@@ -8524,7 +8524,7 @@
           <p:cNvPr id="12" name="item_2_title">
             <a:extLst>
               <a:ext uri="{FF2B5EF4-FFF2-40B4-BE49-F238E27FC236}">
-                <a16:creationId xmlns:a16="http://schemas.microsoft.com/office/drawing/2014/main" id="{BD6C9773-6F52-32BE-61AB-8922557B2180}"/>
+                <a16:creationId xmlns:a16="http://schemas.microsoft.com/office/drawing/2014/main" id="{BE60DFC3-A94D-6E2A-D909-13706B1E52FE}"/>
               </a:ext>
             </a:extLst>
           </p:cNvPr>
@@ -8577,7 +8577,7 @@
           <p:cNvPr id="13" name="item_2">
             <a:extLst>
               <a:ext uri="{FF2B5EF4-FFF2-40B4-BE49-F238E27FC236}">
-                <a16:creationId xmlns:a16="http://schemas.microsoft.com/office/drawing/2014/main" id="{38BA4BF3-8005-4BC2-3C30-6C44E7554904}"/>
+                <a16:creationId xmlns:a16="http://schemas.microsoft.com/office/drawing/2014/main" id="{AA6CF550-2C97-EE47-10A8-0466F946DDE1}"/>
               </a:ext>
             </a:extLst>
           </p:cNvPr>
@@ -8625,7 +8625,7 @@
           <p:cNvPr id="14" name="source">
             <a:extLst>
               <a:ext uri="{FF2B5EF4-FFF2-40B4-BE49-F238E27FC236}">
-                <a16:creationId xmlns:a16="http://schemas.microsoft.com/office/drawing/2014/main" id="{5DCC1880-BD84-8FDE-50AE-F6FAA63C7C19}"/>
+                <a16:creationId xmlns:a16="http://schemas.microsoft.com/office/drawing/2014/main" id="{9DFF912A-615E-C786-06B8-D1DD283C8D6E}"/>
               </a:ext>
             </a:extLst>
           </p:cNvPr>
@@ -8680,7 +8680,7 @@
     </p:spTree>
     <p:extLst>
       <p:ext uri="{BB962C8B-B14F-4D97-AF65-F5344CB8AC3E}">
-        <p14:creationId xmlns:p14="http://schemas.microsoft.com/office/powerpoint/2010/main" val="662175054"/>
+        <p14:creationId xmlns:p14="http://schemas.microsoft.com/office/powerpoint/2010/main" val="1977879462"/>
       </p:ext>
     </p:extLst>
   </p:cSld>
@@ -8712,7 +8712,7 @@
           <p:cNvPr id="7" name="creative_background">
             <a:extLst>
               <a:ext uri="{FF2B5EF4-FFF2-40B4-BE49-F238E27FC236}">
-                <a16:creationId xmlns:a16="http://schemas.microsoft.com/office/drawing/2014/main" id="{4E45FDCB-13BA-C691-6898-BFF627275EDE}"/>
+                <a16:creationId xmlns:a16="http://schemas.microsoft.com/office/drawing/2014/main" id="{144E6BF6-FCD4-882F-8DEE-7FA3F6F6B06F}"/>
               </a:ext>
             </a:extLst>
           </p:cNvPr>
@@ -8785,7 +8785,7 @@
           <a:bodyPr/>
           <a:lstStyle/>
           <a:p>
-            <a:fld id="{596016C9-F9DB-4EE1-B518-EB72C8994E73}" type="datetimeFigureOut">
+            <a:fld id="{8A86AB56-393C-4917-9670-5C316C4C0775}" type="datetimeFigureOut">
               <a:rPr lang="en-US" smtClean="0"/>
               <a:t>10/3/2026</a:t>
             </a:fld>
@@ -8827,7 +8827,7 @@
           <a:bodyPr/>
           <a:lstStyle/>
           <a:p>
-            <a:fld id="{E3F824D1-671D-418F-B16B-13B951B4F770}" type="slidenum">
+            <a:fld id="{FC63DECE-DCAF-48B3-9E38-EA00981B3229}" type="slidenum">
               <a:rPr lang="en-US" smtClean="0"/>
               <a:t>‹#›</a:t>
             </a:fld>
@@ -8840,7 +8840,7 @@
           <p:cNvPr id="8" name="kpi_value_1">
             <a:extLst>
               <a:ext uri="{FF2B5EF4-FFF2-40B4-BE49-F238E27FC236}">
-                <a16:creationId xmlns:a16="http://schemas.microsoft.com/office/drawing/2014/main" id="{E92E8ED4-D098-B219-B16C-C3E02DE15E73}"/>
+                <a16:creationId xmlns:a16="http://schemas.microsoft.com/office/drawing/2014/main" id="{816C94F2-F778-1031-6A6F-CBDA1FC4B347}"/>
               </a:ext>
             </a:extLst>
           </p:cNvPr>
@@ -8890,7 +8890,7 @@
           <p:cNvPr id="9" name="kpi_label_1">
             <a:extLst>
               <a:ext uri="{FF2B5EF4-FFF2-40B4-BE49-F238E27FC236}">
-                <a16:creationId xmlns:a16="http://schemas.microsoft.com/office/drawing/2014/main" id="{462F35A7-DFA4-6FF4-197F-82C897309E91}"/>
+                <a16:creationId xmlns:a16="http://schemas.microsoft.com/office/drawing/2014/main" id="{3F63A862-ED87-DCCF-0364-4B8BBEAAF0B0}"/>
               </a:ext>
             </a:extLst>
           </p:cNvPr>
@@ -8938,7 +8938,7 @@
           <p:cNvPr id="10" name="quote">
             <a:extLst>
               <a:ext uri="{FF2B5EF4-FFF2-40B4-BE49-F238E27FC236}">
-                <a16:creationId xmlns:a16="http://schemas.microsoft.com/office/drawing/2014/main" id="{152CE876-2C6C-A0B7-9A58-D23B0878C23F}"/>
+                <a16:creationId xmlns:a16="http://schemas.microsoft.com/office/drawing/2014/main" id="{D3EA7EEB-7753-9D74-407D-E5F579A914BE}"/>
               </a:ext>
             </a:extLst>
           </p:cNvPr>
@@ -8988,7 +8988,7 @@
           <p:cNvPr id="11" name="attribution">
             <a:extLst>
               <a:ext uri="{FF2B5EF4-FFF2-40B4-BE49-F238E27FC236}">
-                <a16:creationId xmlns:a16="http://schemas.microsoft.com/office/drawing/2014/main" id="{74320F35-8D39-7C97-FE14-6FAC04130A4B}"/>
+                <a16:creationId xmlns:a16="http://schemas.microsoft.com/office/drawing/2014/main" id="{24F8F0A0-EBEB-F1E5-DEE4-48C4B6DB2AE2}"/>
               </a:ext>
             </a:extLst>
           </p:cNvPr>
@@ -9036,7 +9036,7 @@
           <p:cNvPr id="12" name="item_1_title">
             <a:extLst>
               <a:ext uri="{FF2B5EF4-FFF2-40B4-BE49-F238E27FC236}">
-                <a16:creationId xmlns:a16="http://schemas.microsoft.com/office/drawing/2014/main" id="{2B03A5D9-63BE-CDB6-ABE4-425F5785BFE2}"/>
+                <a16:creationId xmlns:a16="http://schemas.microsoft.com/office/drawing/2014/main" id="{C4595708-FEC4-D122-2EA6-EB41A6734926}"/>
               </a:ext>
             </a:extLst>
           </p:cNvPr>
@@ -9089,7 +9089,7 @@
           <p:cNvPr id="13" name="item_1">
             <a:extLst>
               <a:ext uri="{FF2B5EF4-FFF2-40B4-BE49-F238E27FC236}">
-                <a16:creationId xmlns:a16="http://schemas.microsoft.com/office/drawing/2014/main" id="{6BA5A0DC-C46B-B45D-43E2-286587922089}"/>
+                <a16:creationId xmlns:a16="http://schemas.microsoft.com/office/drawing/2014/main" id="{024F09E4-7D8E-5E8B-1B2B-93F6A6513E60}"/>
               </a:ext>
             </a:extLst>
           </p:cNvPr>
@@ -9137,7 +9137,7 @@
           <p:cNvPr id="14" name="source">
             <a:extLst>
               <a:ext uri="{FF2B5EF4-FFF2-40B4-BE49-F238E27FC236}">
-                <a16:creationId xmlns:a16="http://schemas.microsoft.com/office/drawing/2014/main" id="{2BB78CB8-6C18-0296-2E79-0C4773B50292}"/>
+                <a16:creationId xmlns:a16="http://schemas.microsoft.com/office/drawing/2014/main" id="{B054F9F1-B510-64C4-15C1-F875C881C765}"/>
               </a:ext>
             </a:extLst>
           </p:cNvPr>
@@ -9192,7 +9192,7 @@
     </p:spTree>
     <p:extLst>
       <p:ext uri="{BB962C8B-B14F-4D97-AF65-F5344CB8AC3E}">
-        <p14:creationId xmlns:p14="http://schemas.microsoft.com/office/powerpoint/2010/main" val="609104253"/>
+        <p14:creationId xmlns:p14="http://schemas.microsoft.com/office/powerpoint/2010/main" val="449426727"/>
       </p:ext>
     </p:extLst>
   </p:cSld>
@@ -9224,7 +9224,7 @@
           <p:cNvPr id="7" name="creative_background">
             <a:extLst>
               <a:ext uri="{FF2B5EF4-FFF2-40B4-BE49-F238E27FC236}">
-                <a16:creationId xmlns:a16="http://schemas.microsoft.com/office/drawing/2014/main" id="{F46C3C7F-8D31-CB51-DC10-96E69306233F}"/>
+                <a16:creationId xmlns:a16="http://schemas.microsoft.com/office/drawing/2014/main" id="{B63BAEE4-D5B2-AE8E-2091-DD5D51609A52}"/>
               </a:ext>
             </a:extLst>
           </p:cNvPr>
@@ -9297,7 +9297,7 @@
           <a:bodyPr/>
           <a:lstStyle/>
           <a:p>
-            <a:fld id="{596016C9-F9DB-4EE1-B518-EB72C8994E73}" type="datetimeFigureOut">
+            <a:fld id="{8A86AB56-393C-4917-9670-5C316C4C0775}" type="datetimeFigureOut">
               <a:rPr lang="en-US" smtClean="0"/>
               <a:t>10/3/2026</a:t>
             </a:fld>
@@ -9339,7 +9339,7 @@
           <a:bodyPr/>
           <a:lstStyle/>
           <a:p>
-            <a:fld id="{E3F824D1-671D-418F-B16B-13B951B4F770}" type="slidenum">
+            <a:fld id="{FC63DECE-DCAF-48B3-9E38-EA00981B3229}" type="slidenum">
               <a:rPr lang="en-US" smtClean="0"/>
               <a:t>‹#›</a:t>
             </a:fld>
@@ -9352,7 +9352,7 @@
           <p:cNvPr id="8" name="marker_1">
             <a:extLst>
               <a:ext uri="{FF2B5EF4-FFF2-40B4-BE49-F238E27FC236}">
-                <a16:creationId xmlns:a16="http://schemas.microsoft.com/office/drawing/2014/main" id="{81F23409-203F-B337-A98E-AA01C244DCE6}"/>
+                <a16:creationId xmlns:a16="http://schemas.microsoft.com/office/drawing/2014/main" id="{38177F81-4663-EDD2-467A-F48F43AA358F}"/>
               </a:ext>
             </a:extLst>
           </p:cNvPr>
@@ -9408,7 +9408,7 @@
           <p:cNvPr id="9" name="item_1">
             <a:extLst>
               <a:ext uri="{FF2B5EF4-FFF2-40B4-BE49-F238E27FC236}">
-                <a16:creationId xmlns:a16="http://schemas.microsoft.com/office/drawing/2014/main" id="{0AA006CC-6D49-1E1D-19BD-3BD7BBD3AA31}"/>
+                <a16:creationId xmlns:a16="http://schemas.microsoft.com/office/drawing/2014/main" id="{22876333-1674-CC42-F004-B0B2C5CB8813}"/>
               </a:ext>
             </a:extLst>
           </p:cNvPr>
@@ -9456,7 +9456,7 @@
           <p:cNvPr id="10" name="marker_2">
             <a:extLst>
               <a:ext uri="{FF2B5EF4-FFF2-40B4-BE49-F238E27FC236}">
-                <a16:creationId xmlns:a16="http://schemas.microsoft.com/office/drawing/2014/main" id="{B6CF3838-8949-500F-2544-D5E360482D0F}"/>
+                <a16:creationId xmlns:a16="http://schemas.microsoft.com/office/drawing/2014/main" id="{210DA070-F3AB-4462-52BF-21C9C18FA20C}"/>
               </a:ext>
             </a:extLst>
           </p:cNvPr>
@@ -9512,7 +9512,7 @@
           <p:cNvPr id="11" name="item_2">
             <a:extLst>
               <a:ext uri="{FF2B5EF4-FFF2-40B4-BE49-F238E27FC236}">
-                <a16:creationId xmlns:a16="http://schemas.microsoft.com/office/drawing/2014/main" id="{01F5DBF1-FCFB-9BBC-7E11-D72739B217ED}"/>
+                <a16:creationId xmlns:a16="http://schemas.microsoft.com/office/drawing/2014/main" id="{568236CB-4671-5DB8-13B2-700A026228A0}"/>
               </a:ext>
             </a:extLst>
           </p:cNvPr>
@@ -9560,7 +9560,7 @@
           <p:cNvPr id="12" name="marker_3">
             <a:extLst>
               <a:ext uri="{FF2B5EF4-FFF2-40B4-BE49-F238E27FC236}">
-                <a16:creationId xmlns:a16="http://schemas.microsoft.com/office/drawing/2014/main" id="{7BDD83FB-5931-3CF7-272A-4D14AC761CAD}"/>
+                <a16:creationId xmlns:a16="http://schemas.microsoft.com/office/drawing/2014/main" id="{E7315356-8C5D-6E01-F016-F30DADD5F3E5}"/>
               </a:ext>
             </a:extLst>
           </p:cNvPr>
@@ -9616,7 +9616,7 @@
           <p:cNvPr id="13" name="item_3">
             <a:extLst>
               <a:ext uri="{FF2B5EF4-FFF2-40B4-BE49-F238E27FC236}">
-                <a16:creationId xmlns:a16="http://schemas.microsoft.com/office/drawing/2014/main" id="{56387381-C5B0-737E-2E96-AB6BB650155E}"/>
+                <a16:creationId xmlns:a16="http://schemas.microsoft.com/office/drawing/2014/main" id="{ECC92755-DADF-3F6A-217F-6717DDEE9590}"/>
               </a:ext>
             </a:extLst>
           </p:cNvPr>
@@ -9664,7 +9664,7 @@
           <p:cNvPr id="14" name="marker_4">
             <a:extLst>
               <a:ext uri="{FF2B5EF4-FFF2-40B4-BE49-F238E27FC236}">
-                <a16:creationId xmlns:a16="http://schemas.microsoft.com/office/drawing/2014/main" id="{2DE1E54D-5538-6DE7-7BB0-E125C9F77985}"/>
+                <a16:creationId xmlns:a16="http://schemas.microsoft.com/office/drawing/2014/main" id="{629268F4-7E4A-CF9C-6F17-79D142E0CA2C}"/>
               </a:ext>
             </a:extLst>
           </p:cNvPr>
@@ -9720,7 +9720,7 @@
           <p:cNvPr id="15" name="item_4">
             <a:extLst>
               <a:ext uri="{FF2B5EF4-FFF2-40B4-BE49-F238E27FC236}">
-                <a16:creationId xmlns:a16="http://schemas.microsoft.com/office/drawing/2014/main" id="{8ABEF4DB-C173-50ED-10F5-AC3C0BC3E2C5}"/>
+                <a16:creationId xmlns:a16="http://schemas.microsoft.com/office/drawing/2014/main" id="{D7F29186-BEE9-BF9C-0813-FE0FB2B35774}"/>
               </a:ext>
             </a:extLst>
           </p:cNvPr>
@@ -9768,7 +9768,7 @@
           <p:cNvPr id="16" name="source">
             <a:extLst>
               <a:ext uri="{FF2B5EF4-FFF2-40B4-BE49-F238E27FC236}">
-                <a16:creationId xmlns:a16="http://schemas.microsoft.com/office/drawing/2014/main" id="{862408F5-25FF-961C-18E5-A82BAB66EEFF}"/>
+                <a16:creationId xmlns:a16="http://schemas.microsoft.com/office/drawing/2014/main" id="{C73C61A8-7E47-42F3-A9F4-E2127D75C06A}"/>
               </a:ext>
             </a:extLst>
           </p:cNvPr>
@@ -9823,7 +9823,7 @@
     </p:spTree>
     <p:extLst>
       <p:ext uri="{BB962C8B-B14F-4D97-AF65-F5344CB8AC3E}">
-        <p14:creationId xmlns:p14="http://schemas.microsoft.com/office/powerpoint/2010/main" val="1770309418"/>
+        <p14:creationId xmlns:p14="http://schemas.microsoft.com/office/powerpoint/2010/main" val="2176955903"/>
       </p:ext>
     </p:extLst>
   </p:cSld>
@@ -9855,7 +9855,7 @@
           <p:cNvPr id="7" name="creative_background">
             <a:extLst>
               <a:ext uri="{FF2B5EF4-FFF2-40B4-BE49-F238E27FC236}">
-                <a16:creationId xmlns:a16="http://schemas.microsoft.com/office/drawing/2014/main" id="{9A75474D-DD6D-CAE7-BDF3-1E5EA632157D}"/>
+                <a16:creationId xmlns:a16="http://schemas.microsoft.com/office/drawing/2014/main" id="{F45BCC8C-7A3C-1DFF-77FC-477EC9ACA3BF}"/>
               </a:ext>
             </a:extLst>
           </p:cNvPr>
@@ -9928,7 +9928,7 @@
           <a:bodyPr/>
           <a:lstStyle/>
           <a:p>
-            <a:fld id="{596016C9-F9DB-4EE1-B518-EB72C8994E73}" type="datetimeFigureOut">
+            <a:fld id="{8A86AB56-393C-4917-9670-5C316C4C0775}" type="datetimeFigureOut">
               <a:rPr lang="en-US" smtClean="0"/>
               <a:t>10/3/2026</a:t>
             </a:fld>
@@ -9970,7 +9970,7 @@
           <a:bodyPr/>
           <a:lstStyle/>
           <a:p>
-            <a:fld id="{E3F824D1-671D-418F-B16B-13B951B4F770}" type="slidenum">
+            <a:fld id="{FC63DECE-DCAF-48B3-9E38-EA00981B3229}" type="slidenum">
               <a:rPr lang="en-US" smtClean="0"/>
               <a:t>‹#›</a:t>
             </a:fld>
@@ -9983,7 +9983,7 @@
           <p:cNvPr id="8" name="decisions_title">
             <a:extLst>
               <a:ext uri="{FF2B5EF4-FFF2-40B4-BE49-F238E27FC236}">
-                <a16:creationId xmlns:a16="http://schemas.microsoft.com/office/drawing/2014/main" id="{A1F2F680-4A79-D729-542D-AE7B157DCA88}"/>
+                <a16:creationId xmlns:a16="http://schemas.microsoft.com/office/drawing/2014/main" id="{A7237D08-2005-EE07-1DA1-DBB22AE7716D}"/>
               </a:ext>
             </a:extLst>
           </p:cNvPr>
@@ -10033,7 +10033,7 @@
           <p:cNvPr id="9" name="decisions">
             <a:extLst>
               <a:ext uri="{FF2B5EF4-FFF2-40B4-BE49-F238E27FC236}">
-                <a16:creationId xmlns:a16="http://schemas.microsoft.com/office/drawing/2014/main" id="{00FE65FF-6695-2E11-FABA-948CA416CB6D}"/>
+                <a16:creationId xmlns:a16="http://schemas.microsoft.com/office/drawing/2014/main" id="{8D77DDF7-F98D-4C21-8F74-44047B9B9556}"/>
               </a:ext>
             </a:extLst>
           </p:cNvPr>
@@ -10076,7 +10076,7 @@
           <p:cNvPr id="10" name="item_1_title">
             <a:extLst>
               <a:ext uri="{FF2B5EF4-FFF2-40B4-BE49-F238E27FC236}">
-                <a16:creationId xmlns:a16="http://schemas.microsoft.com/office/drawing/2014/main" id="{AA5563AA-DF03-736D-60C8-6041AB8A34BB}"/>
+                <a16:creationId xmlns:a16="http://schemas.microsoft.com/office/drawing/2014/main" id="{615A4C17-E0D0-E609-E152-CD6238A28265}"/>
               </a:ext>
             </a:extLst>
           </p:cNvPr>
@@ -10129,7 +10129,7 @@
           <p:cNvPr id="11" name="item_1">
             <a:extLst>
               <a:ext uri="{FF2B5EF4-FFF2-40B4-BE49-F238E27FC236}">
-                <a16:creationId xmlns:a16="http://schemas.microsoft.com/office/drawing/2014/main" id="{AA4E5F84-2E62-2A37-1759-4E3915A3D9BB}"/>
+                <a16:creationId xmlns:a16="http://schemas.microsoft.com/office/drawing/2014/main" id="{DD2A42D0-9F49-5B46-9611-EFDA8A0EA88B}"/>
               </a:ext>
             </a:extLst>
           </p:cNvPr>
@@ -10177,7 +10177,7 @@
           <p:cNvPr id="12" name="item_2_title">
             <a:extLst>
               <a:ext uri="{FF2B5EF4-FFF2-40B4-BE49-F238E27FC236}">
-                <a16:creationId xmlns:a16="http://schemas.microsoft.com/office/drawing/2014/main" id="{345BDE0D-6513-B6ED-C06C-236F72A5EB7E}"/>
+                <a16:creationId xmlns:a16="http://schemas.microsoft.com/office/drawing/2014/main" id="{F57CF416-8DC9-5D6C-8CA1-5540AF3472CB}"/>
               </a:ext>
             </a:extLst>
           </p:cNvPr>
@@ -10230,7 +10230,7 @@
           <p:cNvPr id="13" name="item_2">
             <a:extLst>
               <a:ext uri="{FF2B5EF4-FFF2-40B4-BE49-F238E27FC236}">
-                <a16:creationId xmlns:a16="http://schemas.microsoft.com/office/drawing/2014/main" id="{F803FC0B-7E37-5D1F-CBF8-83A23001C3EB}"/>
+                <a16:creationId xmlns:a16="http://schemas.microsoft.com/office/drawing/2014/main" id="{6C0A6810-B4BE-740A-8717-7AD6B265081C}"/>
               </a:ext>
             </a:extLst>
           </p:cNvPr>
@@ -10278,7 +10278,7 @@
           <p:cNvPr id="14" name="item_3_title">
             <a:extLst>
               <a:ext uri="{FF2B5EF4-FFF2-40B4-BE49-F238E27FC236}">
-                <a16:creationId xmlns:a16="http://schemas.microsoft.com/office/drawing/2014/main" id="{3CE2B81D-265B-371C-5A88-EADB39380736}"/>
+                <a16:creationId xmlns:a16="http://schemas.microsoft.com/office/drawing/2014/main" id="{2703C1CF-0DCA-0E24-DB31-069CE8F9C05C}"/>
               </a:ext>
             </a:extLst>
           </p:cNvPr>
@@ -10331,7 +10331,7 @@
           <p:cNvPr id="15" name="item_3">
             <a:extLst>
               <a:ext uri="{FF2B5EF4-FFF2-40B4-BE49-F238E27FC236}">
-                <a16:creationId xmlns:a16="http://schemas.microsoft.com/office/drawing/2014/main" id="{5B38573D-47F3-839A-90C5-1B5CA3650F97}"/>
+                <a16:creationId xmlns:a16="http://schemas.microsoft.com/office/drawing/2014/main" id="{41CFC613-35CE-47E4-9C4A-23D72BFEC7BA}"/>
               </a:ext>
             </a:extLst>
           </p:cNvPr>
@@ -10379,7 +10379,7 @@
           <p:cNvPr id="16" name="source">
             <a:extLst>
               <a:ext uri="{FF2B5EF4-FFF2-40B4-BE49-F238E27FC236}">
-                <a16:creationId xmlns:a16="http://schemas.microsoft.com/office/drawing/2014/main" id="{8E203EB8-C831-D55F-3A26-83A1ACB15CC1}"/>
+                <a16:creationId xmlns:a16="http://schemas.microsoft.com/office/drawing/2014/main" id="{E948CE5B-6F52-99DF-AE2E-74725FA6C6EA}"/>
               </a:ext>
             </a:extLst>
           </p:cNvPr>
@@ -10434,7 +10434,7 @@
     </p:spTree>
     <p:extLst>
       <p:ext uri="{BB962C8B-B14F-4D97-AF65-F5344CB8AC3E}">
-        <p14:creationId xmlns:p14="http://schemas.microsoft.com/office/powerpoint/2010/main" val="883065194"/>
+        <p14:creationId xmlns:p14="http://schemas.microsoft.com/office/powerpoint/2010/main" val="3729448819"/>
       </p:ext>
     </p:extLst>
   </p:cSld>
@@ -10466,7 +10466,7 @@
           <p:cNvPr id="7" name="creative_background">
             <a:extLst>
               <a:ext uri="{FF2B5EF4-FFF2-40B4-BE49-F238E27FC236}">
-                <a16:creationId xmlns:a16="http://schemas.microsoft.com/office/drawing/2014/main" id="{FB6AED21-D355-E2AF-C97C-F80E5461AFC2}"/>
+                <a16:creationId xmlns:a16="http://schemas.microsoft.com/office/drawing/2014/main" id="{09264427-0299-7438-90A2-D994AA1977A8}"/>
               </a:ext>
             </a:extLst>
           </p:cNvPr>
@@ -10539,7 +10539,7 @@
           <a:bodyPr/>
           <a:lstStyle/>
           <a:p>
-            <a:fld id="{596016C9-F9DB-4EE1-B518-EB72C8994E73}" type="datetimeFigureOut">
+            <a:fld id="{8A86AB56-393C-4917-9670-5C316C4C0775}" type="datetimeFigureOut">
               <a:rPr lang="en-US" smtClean="0"/>
               <a:t>10/3/2026</a:t>
             </a:fld>
@@ -10581,7 +10581,7 @@
           <a:bodyPr/>
           <a:lstStyle/>
           <a:p>
-            <a:fld id="{E3F824D1-671D-418F-B16B-13B951B4F770}" type="slidenum">
+            <a:fld id="{FC63DECE-DCAF-48B3-9E38-EA00981B3229}" type="slidenum">
               <a:rPr lang="en-US" smtClean="0"/>
               <a:t>‹#›</a:t>
             </a:fld>
@@ -10594,7 +10594,7 @@
           <p:cNvPr id="8" name="body">
             <a:extLst>
               <a:ext uri="{FF2B5EF4-FFF2-40B4-BE49-F238E27FC236}">
-                <a16:creationId xmlns:a16="http://schemas.microsoft.com/office/drawing/2014/main" id="{485D4E10-7A85-409B-F9FB-02782969798F}"/>
+                <a16:creationId xmlns:a16="http://schemas.microsoft.com/office/drawing/2014/main" id="{40E144DE-D28D-0CA8-F75E-8B921B9A9913}"/>
               </a:ext>
             </a:extLst>
           </p:cNvPr>
@@ -10634,7 +10634,7 @@
           <p:cNvPr id="9" name="kpi_value_1">
             <a:extLst>
               <a:ext uri="{FF2B5EF4-FFF2-40B4-BE49-F238E27FC236}">
-                <a16:creationId xmlns:a16="http://schemas.microsoft.com/office/drawing/2014/main" id="{3C190DF3-D702-6969-908A-42EC8D25BE3F}"/>
+                <a16:creationId xmlns:a16="http://schemas.microsoft.com/office/drawing/2014/main" id="{28687AD8-225B-E7B9-C040-E442F760AD2A}"/>
               </a:ext>
             </a:extLst>
           </p:cNvPr>
@@ -10687,7 +10687,7 @@
           <p:cNvPr id="10" name="kpi_label_1">
             <a:extLst>
               <a:ext uri="{FF2B5EF4-FFF2-40B4-BE49-F238E27FC236}">
-                <a16:creationId xmlns:a16="http://schemas.microsoft.com/office/drawing/2014/main" id="{2A916822-9170-2C89-B43C-879502CA396D}"/>
+                <a16:creationId xmlns:a16="http://schemas.microsoft.com/office/drawing/2014/main" id="{A847B1FA-B173-E426-713D-3E04FA29F13C}"/>
               </a:ext>
             </a:extLst>
           </p:cNvPr>
@@ -10735,7 +10735,7 @@
           <p:cNvPr id="11" name="kpi_value_2">
             <a:extLst>
               <a:ext uri="{FF2B5EF4-FFF2-40B4-BE49-F238E27FC236}">
-                <a16:creationId xmlns:a16="http://schemas.microsoft.com/office/drawing/2014/main" id="{EA201531-3378-FF2D-B5F8-BF0060492A5A}"/>
+                <a16:creationId xmlns:a16="http://schemas.microsoft.com/office/drawing/2014/main" id="{EAC989D3-335B-AEA4-6DAE-0D156796D0F4}"/>
               </a:ext>
             </a:extLst>
           </p:cNvPr>
@@ -10788,7 +10788,7 @@
           <p:cNvPr id="12" name="kpi_label_2">
             <a:extLst>
               <a:ext uri="{FF2B5EF4-FFF2-40B4-BE49-F238E27FC236}">
-                <a16:creationId xmlns:a16="http://schemas.microsoft.com/office/drawing/2014/main" id="{42FCF597-3ECD-F0B2-C668-1EBBAB6E23C9}"/>
+                <a16:creationId xmlns:a16="http://schemas.microsoft.com/office/drawing/2014/main" id="{E8C06F5C-6306-C577-F807-C74DD78BFFAF}"/>
               </a:ext>
             </a:extLst>
           </p:cNvPr>
@@ -10836,7 +10836,7 @@
           <p:cNvPr id="13" name="source">
             <a:extLst>
               <a:ext uri="{FF2B5EF4-FFF2-40B4-BE49-F238E27FC236}">
-                <a16:creationId xmlns:a16="http://schemas.microsoft.com/office/drawing/2014/main" id="{2041C954-60D6-9538-358F-6C845EDF7524}"/>
+                <a16:creationId xmlns:a16="http://schemas.microsoft.com/office/drawing/2014/main" id="{93BA3B03-5C1F-0C2C-D3C0-0BCB452CE2D6}"/>
               </a:ext>
             </a:extLst>
           </p:cNvPr>
@@ -10891,7 +10891,7 @@
     </p:spTree>
     <p:extLst>
       <p:ext uri="{BB962C8B-B14F-4D97-AF65-F5344CB8AC3E}">
-        <p14:creationId xmlns:p14="http://schemas.microsoft.com/office/powerpoint/2010/main" val="2455773806"/>
+        <p14:creationId xmlns:p14="http://schemas.microsoft.com/office/powerpoint/2010/main" val="1678270719"/>
       </p:ext>
     </p:extLst>
   </p:cSld>
@@ -10923,7 +10923,7 @@
           <p:cNvPr id="7" name="creative_background">
             <a:extLst>
               <a:ext uri="{FF2B5EF4-FFF2-40B4-BE49-F238E27FC236}">
-                <a16:creationId xmlns:a16="http://schemas.microsoft.com/office/drawing/2014/main" id="{316100CF-5CC6-4B7F-E48A-64A8D997BB0D}"/>
+                <a16:creationId xmlns:a16="http://schemas.microsoft.com/office/drawing/2014/main" id="{E286D977-ED22-6CD6-9FE5-26D0811B7811}"/>
               </a:ext>
             </a:extLst>
           </p:cNvPr>
@@ -10996,7 +10996,7 @@
           <a:bodyPr/>
           <a:lstStyle/>
           <a:p>
-            <a:fld id="{596016C9-F9DB-4EE1-B518-EB72C8994E73}" type="datetimeFigureOut">
+            <a:fld id="{8A86AB56-393C-4917-9670-5C316C4C0775}" type="datetimeFigureOut">
               <a:rPr lang="en-US" smtClean="0"/>
               <a:t>10/3/2026</a:t>
             </a:fld>
@@ -11038,7 +11038,7 @@
           <a:bodyPr/>
           <a:lstStyle/>
           <a:p>
-            <a:fld id="{E3F824D1-671D-418F-B16B-13B951B4F770}" type="slidenum">
+            <a:fld id="{FC63DECE-DCAF-48B3-9E38-EA00981B3229}" type="slidenum">
               <a:rPr lang="en-US" smtClean="0"/>
               <a:t>‹#›</a:t>
             </a:fld>
@@ -11051,7 +11051,7 @@
           <p:cNvPr id="8" name="body">
             <a:extLst>
               <a:ext uri="{FF2B5EF4-FFF2-40B4-BE49-F238E27FC236}">
-                <a16:creationId xmlns:a16="http://schemas.microsoft.com/office/drawing/2014/main" id="{76280003-1B15-1C27-1493-5592773DFED9}"/>
+                <a16:creationId xmlns:a16="http://schemas.microsoft.com/office/drawing/2014/main" id="{DCD1B6E2-6D55-8C0F-64CD-BF2D13CCCB3B}"/>
               </a:ext>
             </a:extLst>
           </p:cNvPr>
@@ -11091,7 +11091,7 @@
           <p:cNvPr id="9" name="kpi_value_1">
             <a:extLst>
               <a:ext uri="{FF2B5EF4-FFF2-40B4-BE49-F238E27FC236}">
-                <a16:creationId xmlns:a16="http://schemas.microsoft.com/office/drawing/2014/main" id="{B5F98E89-4B32-568F-350A-5709829A8DDD}"/>
+                <a16:creationId xmlns:a16="http://schemas.microsoft.com/office/drawing/2014/main" id="{608648E3-CD01-7C16-9FD5-E159CA6088B6}"/>
               </a:ext>
             </a:extLst>
           </p:cNvPr>
@@ -11144,7 +11144,7 @@
           <p:cNvPr id="10" name="kpi_label_1">
             <a:extLst>
               <a:ext uri="{FF2B5EF4-FFF2-40B4-BE49-F238E27FC236}">
-                <a16:creationId xmlns:a16="http://schemas.microsoft.com/office/drawing/2014/main" id="{D5F48B1C-2761-48D3-96AC-EE041CD61EE1}"/>
+                <a16:creationId xmlns:a16="http://schemas.microsoft.com/office/drawing/2014/main" id="{0836D0BD-7892-EBCB-369D-94DD184C8685}"/>
               </a:ext>
             </a:extLst>
           </p:cNvPr>
@@ -11192,7 +11192,7 @@
           <p:cNvPr id="11" name="kpi_value_2">
             <a:extLst>
               <a:ext uri="{FF2B5EF4-FFF2-40B4-BE49-F238E27FC236}">
-                <a16:creationId xmlns:a16="http://schemas.microsoft.com/office/drawing/2014/main" id="{5A85B746-51DA-B22B-6F1B-598767B0B272}"/>
+                <a16:creationId xmlns:a16="http://schemas.microsoft.com/office/drawing/2014/main" id="{5AB24911-D1DB-737A-61C1-6BF1A05888EC}"/>
               </a:ext>
             </a:extLst>
           </p:cNvPr>
@@ -11245,7 +11245,7 @@
           <p:cNvPr id="12" name="kpi_label_2">
             <a:extLst>
               <a:ext uri="{FF2B5EF4-FFF2-40B4-BE49-F238E27FC236}">
-                <a16:creationId xmlns:a16="http://schemas.microsoft.com/office/drawing/2014/main" id="{60FBE104-511F-CF2C-B647-23AED00F7488}"/>
+                <a16:creationId xmlns:a16="http://schemas.microsoft.com/office/drawing/2014/main" id="{4F87EA06-DAA0-9E7C-50C5-F18A33295F0E}"/>
               </a:ext>
             </a:extLst>
           </p:cNvPr>
@@ -11293,7 +11293,7 @@
           <p:cNvPr id="13" name="kpi_value_3">
             <a:extLst>
               <a:ext uri="{FF2B5EF4-FFF2-40B4-BE49-F238E27FC236}">
-                <a16:creationId xmlns:a16="http://schemas.microsoft.com/office/drawing/2014/main" id="{C5FB8F3D-7C85-5A4C-508B-8046E18401C7}"/>
+                <a16:creationId xmlns:a16="http://schemas.microsoft.com/office/drawing/2014/main" id="{E5A5E709-6489-88EF-3774-4596488BC081}"/>
               </a:ext>
             </a:extLst>
           </p:cNvPr>
@@ -11346,7 +11346,7 @@
           <p:cNvPr id="14" name="kpi_label_3">
             <a:extLst>
               <a:ext uri="{FF2B5EF4-FFF2-40B4-BE49-F238E27FC236}">
-                <a16:creationId xmlns:a16="http://schemas.microsoft.com/office/drawing/2014/main" id="{55C57CDF-A577-E243-77E8-72A31368E3B0}"/>
+                <a16:creationId xmlns:a16="http://schemas.microsoft.com/office/drawing/2014/main" id="{C3C31D36-50E0-9CA0-3D9C-9F9B312954A7}"/>
               </a:ext>
             </a:extLst>
           </p:cNvPr>
@@ -11394,7 +11394,7 @@
           <p:cNvPr id="15" name="kpi_value_4">
             <a:extLst>
               <a:ext uri="{FF2B5EF4-FFF2-40B4-BE49-F238E27FC236}">
-                <a16:creationId xmlns:a16="http://schemas.microsoft.com/office/drawing/2014/main" id="{9F6CB4B7-038A-5432-9555-0D0C128D0213}"/>
+                <a16:creationId xmlns:a16="http://schemas.microsoft.com/office/drawing/2014/main" id="{57E69A38-6FF2-DFBC-AD88-8143DB37E2AA}"/>
               </a:ext>
             </a:extLst>
           </p:cNvPr>
@@ -11447,7 +11447,7 @@
           <p:cNvPr id="16" name="kpi_label_4">
             <a:extLst>
               <a:ext uri="{FF2B5EF4-FFF2-40B4-BE49-F238E27FC236}">
-                <a16:creationId xmlns:a16="http://schemas.microsoft.com/office/drawing/2014/main" id="{DB7149F8-7E3A-39C7-4FAD-F3D320DF3E03}"/>
+                <a16:creationId xmlns:a16="http://schemas.microsoft.com/office/drawing/2014/main" id="{6F737581-C03F-FFFE-5AE3-CA83D827A724}"/>
               </a:ext>
             </a:extLst>
           </p:cNvPr>
@@ -11495,7 +11495,7 @@
           <p:cNvPr id="17" name="source">
             <a:extLst>
               <a:ext uri="{FF2B5EF4-FFF2-40B4-BE49-F238E27FC236}">
-                <a16:creationId xmlns:a16="http://schemas.microsoft.com/office/drawing/2014/main" id="{337B810D-E5B9-2D45-BAEE-3D3A74444E3A}"/>
+                <a16:creationId xmlns:a16="http://schemas.microsoft.com/office/drawing/2014/main" id="{329CD0BD-0F48-4E60-09D6-0B27D5482351}"/>
               </a:ext>
             </a:extLst>
           </p:cNvPr>
@@ -11550,7 +11550,7 @@
     </p:spTree>
     <p:extLst>
       <p:ext uri="{BB962C8B-B14F-4D97-AF65-F5344CB8AC3E}">
-        <p14:creationId xmlns:p14="http://schemas.microsoft.com/office/powerpoint/2010/main" val="2732226662"/>
+        <p14:creationId xmlns:p14="http://schemas.microsoft.com/office/powerpoint/2010/main" val="3349637259"/>
       </p:ext>
     </p:extLst>
   </p:cSld>
@@ -11582,7 +11582,7 @@
           <p:cNvPr id="7" name="creative_background">
             <a:extLst>
               <a:ext uri="{FF2B5EF4-FFF2-40B4-BE49-F238E27FC236}">
-                <a16:creationId xmlns:a16="http://schemas.microsoft.com/office/drawing/2014/main" id="{158420FA-752E-FED5-A631-D2F65A3DBC4B}"/>
+                <a16:creationId xmlns:a16="http://schemas.microsoft.com/office/drawing/2014/main" id="{17C4B7B2-F884-C62C-A91D-AF50280D3C8B}"/>
               </a:ext>
             </a:extLst>
           </p:cNvPr>
@@ -11655,7 +11655,7 @@
           <a:bodyPr/>
           <a:lstStyle/>
           <a:p>
-            <a:fld id="{596016C9-F9DB-4EE1-B518-EB72C8994E73}" type="datetimeFigureOut">
+            <a:fld id="{8A86AB56-393C-4917-9670-5C316C4C0775}" type="datetimeFigureOut">
               <a:rPr lang="en-US" smtClean="0"/>
               <a:t>10/3/2026</a:t>
             </a:fld>
@@ -11697,7 +11697,7 @@
           <a:bodyPr/>
           <a:lstStyle/>
           <a:p>
-            <a:fld id="{E3F824D1-671D-418F-B16B-13B951B4F770}" type="slidenum">
+            <a:fld id="{FC63DECE-DCAF-48B3-9E38-EA00981B3229}" type="slidenum">
               <a:rPr lang="en-US" smtClean="0"/>
               <a:t>‹#›</a:t>
             </a:fld>
@@ -11710,7 +11710,7 @@
           <p:cNvPr id="8" name="body">
             <a:extLst>
               <a:ext uri="{FF2B5EF4-FFF2-40B4-BE49-F238E27FC236}">
-                <a16:creationId xmlns:a16="http://schemas.microsoft.com/office/drawing/2014/main" id="{3C57449E-64E9-C00C-6E67-61DF05939DEA}"/>
+                <a16:creationId xmlns:a16="http://schemas.microsoft.com/office/drawing/2014/main" id="{6C0B4579-D32C-E800-6494-8323D3222A1C}"/>
               </a:ext>
             </a:extLst>
           </p:cNvPr>
@@ -11750,7 +11750,7 @@
           <p:cNvPr id="9" name="quote">
             <a:extLst>
               <a:ext uri="{FF2B5EF4-FFF2-40B4-BE49-F238E27FC236}">
-                <a16:creationId xmlns:a16="http://schemas.microsoft.com/office/drawing/2014/main" id="{9FD859CA-7C31-0D8B-BF74-B31104A1EED3}"/>
+                <a16:creationId xmlns:a16="http://schemas.microsoft.com/office/drawing/2014/main" id="{D9DD3B47-D712-797C-E7CD-D92B1307E611}"/>
               </a:ext>
             </a:extLst>
           </p:cNvPr>
@@ -11800,7 +11800,7 @@
           <p:cNvPr id="10" name="attribution">
             <a:extLst>
               <a:ext uri="{FF2B5EF4-FFF2-40B4-BE49-F238E27FC236}">
-                <a16:creationId xmlns:a16="http://schemas.microsoft.com/office/drawing/2014/main" id="{D01CB317-49ED-23D6-4AED-3226200F2566}"/>
+                <a16:creationId xmlns:a16="http://schemas.microsoft.com/office/drawing/2014/main" id="{D04E18B6-A82E-DE7E-2BE4-8165B0359502}"/>
               </a:ext>
             </a:extLst>
           </p:cNvPr>
@@ -11848,7 +11848,7 @@
           <p:cNvPr id="11" name="source">
             <a:extLst>
               <a:ext uri="{FF2B5EF4-FFF2-40B4-BE49-F238E27FC236}">
-                <a16:creationId xmlns:a16="http://schemas.microsoft.com/office/drawing/2014/main" id="{E3C70BDC-46B2-D75D-F1BC-A334EA2161A4}"/>
+                <a16:creationId xmlns:a16="http://schemas.microsoft.com/office/drawing/2014/main" id="{672801EA-C846-753C-53EE-1599C7E3F2D1}"/>
               </a:ext>
             </a:extLst>
           </p:cNvPr>
@@ -11903,7 +11903,7 @@
     </p:spTree>
     <p:extLst>
       <p:ext uri="{BB962C8B-B14F-4D97-AF65-F5344CB8AC3E}">
-        <p14:creationId xmlns:p14="http://schemas.microsoft.com/office/powerpoint/2010/main" val="3043453818"/>
+        <p14:creationId xmlns:p14="http://schemas.microsoft.com/office/powerpoint/2010/main" val="3894882286"/>
       </p:ext>
     </p:extLst>
   </p:cSld>
@@ -11935,7 +11935,7 @@
           <p:cNvPr id="7" name="creative_background">
             <a:extLst>
               <a:ext uri="{FF2B5EF4-FFF2-40B4-BE49-F238E27FC236}">
-                <a16:creationId xmlns:a16="http://schemas.microsoft.com/office/drawing/2014/main" id="{E1AA6B08-1913-9FA3-8E40-B27A6B66A9E3}"/>
+                <a16:creationId xmlns:a16="http://schemas.microsoft.com/office/drawing/2014/main" id="{F1D2A93B-AEC5-D772-0065-593F39BF9296}"/>
               </a:ext>
             </a:extLst>
           </p:cNvPr>
@@ -12008,7 +12008,7 @@
           <a:bodyPr/>
           <a:lstStyle/>
           <a:p>
-            <a:fld id="{596016C9-F9DB-4EE1-B518-EB72C8994E73}" type="datetimeFigureOut">
+            <a:fld id="{8A86AB56-393C-4917-9670-5C316C4C0775}" type="datetimeFigureOut">
               <a:rPr lang="en-US" smtClean="0"/>
               <a:t>10/3/2026</a:t>
             </a:fld>
@@ -12050,7 +12050,7 @@
           <a:bodyPr/>
           <a:lstStyle/>
           <a:p>
-            <a:fld id="{E3F824D1-671D-418F-B16B-13B951B4F770}" type="slidenum">
+            <a:fld id="{FC63DECE-DCAF-48B3-9E38-EA00981B3229}" type="slidenum">
               <a:rPr lang="en-US" smtClean="0"/>
               <a:t>‹#›</a:t>
             </a:fld>
@@ -12063,7 +12063,7 @@
           <p:cNvPr id="8" name="item_1_title">
             <a:extLst>
               <a:ext uri="{FF2B5EF4-FFF2-40B4-BE49-F238E27FC236}">
-                <a16:creationId xmlns:a16="http://schemas.microsoft.com/office/drawing/2014/main" id="{70DE5D31-3F53-E5FD-7C59-BF318E99E615}"/>
+                <a16:creationId xmlns:a16="http://schemas.microsoft.com/office/drawing/2014/main" id="{7E4ADE9F-8301-090F-BB85-05645F323C46}"/>
               </a:ext>
             </a:extLst>
           </p:cNvPr>
@@ -12113,7 +12113,7 @@
           <p:cNvPr id="9" name="item_1">
             <a:extLst>
               <a:ext uri="{FF2B5EF4-FFF2-40B4-BE49-F238E27FC236}">
-                <a16:creationId xmlns:a16="http://schemas.microsoft.com/office/drawing/2014/main" id="{E8865EF5-4FEC-BFA3-2F93-651C6F2B70F8}"/>
+                <a16:creationId xmlns:a16="http://schemas.microsoft.com/office/drawing/2014/main" id="{A30709D7-0AD6-961C-BEBE-CD0F0D8EDFD8}"/>
               </a:ext>
             </a:extLst>
           </p:cNvPr>
@@ -12161,7 +12161,7 @@
           <p:cNvPr id="10" name="item_2_title">
             <a:extLst>
               <a:ext uri="{FF2B5EF4-FFF2-40B4-BE49-F238E27FC236}">
-                <a16:creationId xmlns:a16="http://schemas.microsoft.com/office/drawing/2014/main" id="{44FC2C37-12D8-A4BA-85DD-1B2A6E02156F}"/>
+                <a16:creationId xmlns:a16="http://schemas.microsoft.com/office/drawing/2014/main" id="{00885F2F-A6D0-2BF5-98B5-DEC0D8ACBDBB}"/>
               </a:ext>
             </a:extLst>
           </p:cNvPr>
@@ -12214,7 +12214,7 @@
           <p:cNvPr id="11" name="item_2">
             <a:extLst>
               <a:ext uri="{FF2B5EF4-FFF2-40B4-BE49-F238E27FC236}">
-                <a16:creationId xmlns:a16="http://schemas.microsoft.com/office/drawing/2014/main" id="{AF084A50-E2ED-B7A1-BD16-24A18EAD7583}"/>
+                <a16:creationId xmlns:a16="http://schemas.microsoft.com/office/drawing/2014/main" id="{4FF375F4-C491-D3BD-7E85-47FF39A49F38}"/>
               </a:ext>
             </a:extLst>
           </p:cNvPr>
@@ -12262,7 +12262,7 @@
           <p:cNvPr id="12" name="item_3_title">
             <a:extLst>
               <a:ext uri="{FF2B5EF4-FFF2-40B4-BE49-F238E27FC236}">
-                <a16:creationId xmlns:a16="http://schemas.microsoft.com/office/drawing/2014/main" id="{ED6D7747-82AC-66E0-14BF-EBACF9B0C82F}"/>
+                <a16:creationId xmlns:a16="http://schemas.microsoft.com/office/drawing/2014/main" id="{031C6AB7-7A10-CE24-66DD-940526C58876}"/>
               </a:ext>
             </a:extLst>
           </p:cNvPr>
@@ -12315,7 +12315,7 @@
           <p:cNvPr id="13" name="item_3">
             <a:extLst>
               <a:ext uri="{FF2B5EF4-FFF2-40B4-BE49-F238E27FC236}">
-                <a16:creationId xmlns:a16="http://schemas.microsoft.com/office/drawing/2014/main" id="{ACD98685-F9D8-0113-B4A9-E6091865A591}"/>
+                <a16:creationId xmlns:a16="http://schemas.microsoft.com/office/drawing/2014/main" id="{724D95F5-E1EB-1D86-EC6B-98207328C0D0}"/>
               </a:ext>
             </a:extLst>
           </p:cNvPr>
@@ -12363,7 +12363,7 @@
           <p:cNvPr id="14" name="source">
             <a:extLst>
               <a:ext uri="{FF2B5EF4-FFF2-40B4-BE49-F238E27FC236}">
-                <a16:creationId xmlns:a16="http://schemas.microsoft.com/office/drawing/2014/main" id="{FC6D5A05-D169-167A-55E5-F5C5272D8899}"/>
+                <a16:creationId xmlns:a16="http://schemas.microsoft.com/office/drawing/2014/main" id="{501AC82D-82FB-FA68-9DC4-0581E025F862}"/>
               </a:ext>
             </a:extLst>
           </p:cNvPr>
@@ -12418,7 +12418,7 @@
     </p:spTree>
     <p:extLst>
       <p:ext uri="{BB962C8B-B14F-4D97-AF65-F5344CB8AC3E}">
-        <p14:creationId xmlns:p14="http://schemas.microsoft.com/office/powerpoint/2010/main" val="3777644052"/>
+        <p14:creationId xmlns:p14="http://schemas.microsoft.com/office/powerpoint/2010/main" val="459572682"/>
       </p:ext>
     </p:extLst>
   </p:cSld>
@@ -12450,7 +12450,7 @@
           <p:cNvPr id="7" name="creative_background">
             <a:extLst>
               <a:ext uri="{FF2B5EF4-FFF2-40B4-BE49-F238E27FC236}">
-                <a16:creationId xmlns:a16="http://schemas.microsoft.com/office/drawing/2014/main" id="{E4DE7749-026B-97E9-DB3E-0E2CECF7E204}"/>
+                <a16:creationId xmlns:a16="http://schemas.microsoft.com/office/drawing/2014/main" id="{47600217-E1FA-0C56-3B5E-4B553F325024}"/>
               </a:ext>
             </a:extLst>
           </p:cNvPr>
@@ -12523,7 +12523,7 @@
           <a:bodyPr/>
           <a:lstStyle/>
           <a:p>
-            <a:fld id="{596016C9-F9DB-4EE1-B518-EB72C8994E73}" type="datetimeFigureOut">
+            <a:fld id="{8A86AB56-393C-4917-9670-5C316C4C0775}" type="datetimeFigureOut">
               <a:rPr lang="en-US" smtClean="0"/>
               <a:t>10/3/2026</a:t>
             </a:fld>
@@ -12565,7 +12565,7 @@
           <a:bodyPr/>
           <a:lstStyle/>
           <a:p>
-            <a:fld id="{E3F824D1-671D-418F-B16B-13B951B4F770}" type="slidenum">
+            <a:fld id="{FC63DECE-DCAF-48B3-9E38-EA00981B3229}" type="slidenum">
               <a:rPr lang="en-US" smtClean="0"/>
               <a:t>‹#›</a:t>
             </a:fld>
@@ -12578,7 +12578,7 @@
           <p:cNvPr id="8" name="item_1_title">
             <a:extLst>
               <a:ext uri="{FF2B5EF4-FFF2-40B4-BE49-F238E27FC236}">
-                <a16:creationId xmlns:a16="http://schemas.microsoft.com/office/drawing/2014/main" id="{74B5C9C5-626B-84AF-2320-1543CDB9CF52}"/>
+                <a16:creationId xmlns:a16="http://schemas.microsoft.com/office/drawing/2014/main" id="{DA44E9B5-89D2-0B7E-30EA-AAE578DF3AF9}"/>
               </a:ext>
             </a:extLst>
           </p:cNvPr>
@@ -12628,7 +12628,7 @@
           <p:cNvPr id="9" name="item_1">
             <a:extLst>
               <a:ext uri="{FF2B5EF4-FFF2-40B4-BE49-F238E27FC236}">
-                <a16:creationId xmlns:a16="http://schemas.microsoft.com/office/drawing/2014/main" id="{D8F5E3CA-81B6-B230-71C2-7075F4CBF09B}"/>
+                <a16:creationId xmlns:a16="http://schemas.microsoft.com/office/drawing/2014/main" id="{D8B2CE64-F81C-B159-0198-FA62607BFA2A}"/>
               </a:ext>
             </a:extLst>
           </p:cNvPr>
@@ -12676,7 +12676,7 @@
           <p:cNvPr id="10" name="item_2_title">
             <a:extLst>
               <a:ext uri="{FF2B5EF4-FFF2-40B4-BE49-F238E27FC236}">
-                <a16:creationId xmlns:a16="http://schemas.microsoft.com/office/drawing/2014/main" id="{CFCFB63E-B834-B98B-4653-B87F2F3CDF83}"/>
+                <a16:creationId xmlns:a16="http://schemas.microsoft.com/office/drawing/2014/main" id="{327C1091-3997-B463-A88B-DE43E63ECA3D}"/>
               </a:ext>
             </a:extLst>
           </p:cNvPr>
@@ -12729,7 +12729,7 @@
           <p:cNvPr id="11" name="item_2">
             <a:extLst>
               <a:ext uri="{FF2B5EF4-FFF2-40B4-BE49-F238E27FC236}">
-                <a16:creationId xmlns:a16="http://schemas.microsoft.com/office/drawing/2014/main" id="{D514C289-1658-EDB6-FD5E-12C06B5B9A93}"/>
+                <a16:creationId xmlns:a16="http://schemas.microsoft.com/office/drawing/2014/main" id="{E428446A-6EDD-26EB-93C9-BA9A41C15F21}"/>
               </a:ext>
             </a:extLst>
           </p:cNvPr>
@@ -12777,7 +12777,7 @@
           <p:cNvPr id="12" name="source">
             <a:extLst>
               <a:ext uri="{FF2B5EF4-FFF2-40B4-BE49-F238E27FC236}">
-                <a16:creationId xmlns:a16="http://schemas.microsoft.com/office/drawing/2014/main" id="{275C9255-3B4A-54F1-35CD-992993D7BD0C}"/>
+                <a16:creationId xmlns:a16="http://schemas.microsoft.com/office/drawing/2014/main" id="{A85708A1-C1FA-5721-2E85-858DB7279E85}"/>
               </a:ext>
             </a:extLst>
           </p:cNvPr>
@@ -12832,7 +12832,7 @@
     </p:spTree>
     <p:extLst>
       <p:ext uri="{BB962C8B-B14F-4D97-AF65-F5344CB8AC3E}">
-        <p14:creationId xmlns:p14="http://schemas.microsoft.com/office/powerpoint/2010/main" val="4121263812"/>
+        <p14:creationId xmlns:p14="http://schemas.microsoft.com/office/powerpoint/2010/main" val="2161880247"/>
       </p:ext>
     </p:extLst>
   </p:cSld>
@@ -12864,7 +12864,7 @@
           <p:cNvPr id="7" name="creative_background">
             <a:extLst>
               <a:ext uri="{FF2B5EF4-FFF2-40B4-BE49-F238E27FC236}">
-                <a16:creationId xmlns:a16="http://schemas.microsoft.com/office/drawing/2014/main" id="{406B1080-0B6E-4279-C5DE-DE75EB1A1A9E}"/>
+                <a16:creationId xmlns:a16="http://schemas.microsoft.com/office/drawing/2014/main" id="{56988661-6D18-1355-2768-EDB8879EF801}"/>
               </a:ext>
             </a:extLst>
           </p:cNvPr>
@@ -12937,7 +12937,7 @@
           <a:bodyPr/>
           <a:lstStyle/>
           <a:p>
-            <a:fld id="{596016C9-F9DB-4EE1-B518-EB72C8994E73}" type="datetimeFigureOut">
+            <a:fld id="{8A86AB56-393C-4917-9670-5C316C4C0775}" type="datetimeFigureOut">
               <a:rPr lang="en-US" smtClean="0"/>
               <a:t>10/3/2026</a:t>
             </a:fld>
@@ -12979,7 +12979,7 @@
           <a:bodyPr/>
           <a:lstStyle/>
           <a:p>
-            <a:fld id="{E3F824D1-671D-418F-B16B-13B951B4F770}" type="slidenum">
+            <a:fld id="{FC63DECE-DCAF-48B3-9E38-EA00981B3229}" type="slidenum">
               <a:rPr lang="en-US" smtClean="0"/>
               <a:t>‹#›</a:t>
             </a:fld>
@@ -12992,7 +12992,7 @@
           <p:cNvPr id="8" name="chart">
             <a:extLst>
               <a:ext uri="{FF2B5EF4-FFF2-40B4-BE49-F238E27FC236}">
-                <a16:creationId xmlns:a16="http://schemas.microsoft.com/office/drawing/2014/main" id="{8F330C7F-9A64-CAAA-5437-3B1542B7E5B5}"/>
+                <a16:creationId xmlns:a16="http://schemas.microsoft.com/office/drawing/2014/main" id="{55F2B8AD-5F80-1EC6-C55A-82E8137F601A}"/>
               </a:ext>
             </a:extLst>
           </p:cNvPr>
@@ -13022,7 +13022,7 @@
           <p:cNvPr id="9" name="body">
             <a:extLst>
               <a:ext uri="{FF2B5EF4-FFF2-40B4-BE49-F238E27FC236}">
-                <a16:creationId xmlns:a16="http://schemas.microsoft.com/office/drawing/2014/main" id="{55B1CBB5-457C-543D-7286-667213380CBE}"/>
+                <a16:creationId xmlns:a16="http://schemas.microsoft.com/office/drawing/2014/main" id="{AC95BC6E-F20F-28C4-35AF-8E13C52339D6}"/>
               </a:ext>
             </a:extLst>
           </p:cNvPr>
@@ -13065,7 +13065,7 @@
           <p:cNvPr id="10" name="source">
             <a:extLst>
               <a:ext uri="{FF2B5EF4-FFF2-40B4-BE49-F238E27FC236}">
-                <a16:creationId xmlns:a16="http://schemas.microsoft.com/office/drawing/2014/main" id="{6C10DA59-8146-93E8-C9C1-D4F3E3A32991}"/>
+                <a16:creationId xmlns:a16="http://schemas.microsoft.com/office/drawing/2014/main" id="{AF932A63-D2A5-FD6B-324B-16EEDEC89D23}"/>
               </a:ext>
             </a:extLst>
           </p:cNvPr>
@@ -13120,7 +13120,7 @@
     </p:spTree>
     <p:extLst>
       <p:ext uri="{BB962C8B-B14F-4D97-AF65-F5344CB8AC3E}">
-        <p14:creationId xmlns:p14="http://schemas.microsoft.com/office/powerpoint/2010/main" val="1311859047"/>
+        <p14:creationId xmlns:p14="http://schemas.microsoft.com/office/powerpoint/2010/main" val="4038020069"/>
       </p:ext>
     </p:extLst>
   </p:cSld>
@@ -13152,7 +13152,7 @@
           <p:cNvPr id="7" name="creative_background">
             <a:extLst>
               <a:ext uri="{FF2B5EF4-FFF2-40B4-BE49-F238E27FC236}">
-                <a16:creationId xmlns:a16="http://schemas.microsoft.com/office/drawing/2014/main" id="{3B76533B-514D-3B50-5B86-6B9049394FE3}"/>
+                <a16:creationId xmlns:a16="http://schemas.microsoft.com/office/drawing/2014/main" id="{9834D430-13D7-42A3-BF75-A974DA6F9323}"/>
               </a:ext>
             </a:extLst>
           </p:cNvPr>
@@ -13225,7 +13225,7 @@
           <a:bodyPr/>
           <a:lstStyle/>
           <a:p>
-            <a:fld id="{596016C9-F9DB-4EE1-B518-EB72C8994E73}" type="datetimeFigureOut">
+            <a:fld id="{8A86AB56-393C-4917-9670-5C316C4C0775}" type="datetimeFigureOut">
               <a:rPr lang="en-US" smtClean="0"/>
               <a:t>10/3/2026</a:t>
             </a:fld>
@@ -13267,7 +13267,7 @@
           <a:bodyPr/>
           <a:lstStyle/>
           <a:p>
-            <a:fld id="{E3F824D1-671D-418F-B16B-13B951B4F770}" type="slidenum">
+            <a:fld id="{FC63DECE-DCAF-48B3-9E38-EA00981B3229}" type="slidenum">
               <a:rPr lang="en-US" smtClean="0"/>
               <a:t>‹#›</a:t>
             </a:fld>
@@ -13280,7 +13280,7 @@
           <p:cNvPr id="8" name="item_1_title">
             <a:extLst>
               <a:ext uri="{FF2B5EF4-FFF2-40B4-BE49-F238E27FC236}">
-                <a16:creationId xmlns:a16="http://schemas.microsoft.com/office/drawing/2014/main" id="{402BD33B-28CF-4E0C-1374-B56E3FA5B035}"/>
+                <a16:creationId xmlns:a16="http://schemas.microsoft.com/office/drawing/2014/main" id="{03B3D000-60EB-3C7C-990E-918DE91EA422}"/>
               </a:ext>
             </a:extLst>
           </p:cNvPr>
@@ -13330,7 +13330,7 @@
           <p:cNvPr id="9" name="item_1">
             <a:extLst>
               <a:ext uri="{FF2B5EF4-FFF2-40B4-BE49-F238E27FC236}">
-                <a16:creationId xmlns:a16="http://schemas.microsoft.com/office/drawing/2014/main" id="{F61225C9-2E06-CF2F-87FB-D7A5163C5CFF}"/>
+                <a16:creationId xmlns:a16="http://schemas.microsoft.com/office/drawing/2014/main" id="{ACFC3CBB-F8F0-B7FE-BD66-13444BA0034A}"/>
               </a:ext>
             </a:extLst>
           </p:cNvPr>
@@ -13378,7 +13378,7 @@
           <p:cNvPr id="10" name="item_2_title">
             <a:extLst>
               <a:ext uri="{FF2B5EF4-FFF2-40B4-BE49-F238E27FC236}">
-                <a16:creationId xmlns:a16="http://schemas.microsoft.com/office/drawing/2014/main" id="{34428A24-6B7E-641E-A8D4-EE5092B5DC60}"/>
+                <a16:creationId xmlns:a16="http://schemas.microsoft.com/office/drawing/2014/main" id="{9C4B9076-FA5C-3EC4-824F-EF4C19EF0677}"/>
               </a:ext>
             </a:extLst>
           </p:cNvPr>
@@ -13431,7 +13431,7 @@
           <p:cNvPr id="11" name="item_2">
             <a:extLst>
               <a:ext uri="{FF2B5EF4-FFF2-40B4-BE49-F238E27FC236}">
-                <a16:creationId xmlns:a16="http://schemas.microsoft.com/office/drawing/2014/main" id="{09738423-C180-EA5C-3F70-63C0D61EF44A}"/>
+                <a16:creationId xmlns:a16="http://schemas.microsoft.com/office/drawing/2014/main" id="{73C08A91-AB39-F06F-8ACC-A23C9B258727}"/>
               </a:ext>
             </a:extLst>
           </p:cNvPr>
@@ -13479,7 +13479,7 @@
           <p:cNvPr id="12" name="item_3_title">
             <a:extLst>
               <a:ext uri="{FF2B5EF4-FFF2-40B4-BE49-F238E27FC236}">
-                <a16:creationId xmlns:a16="http://schemas.microsoft.com/office/drawing/2014/main" id="{5BFFE2C5-1D0C-E529-3B8E-F7DFA6958A37}"/>
+                <a16:creationId xmlns:a16="http://schemas.microsoft.com/office/drawing/2014/main" id="{458FCDD5-C9DB-1A35-54B5-BC4253E418F8}"/>
               </a:ext>
             </a:extLst>
           </p:cNvPr>
@@ -13532,7 +13532,7 @@
           <p:cNvPr id="13" name="item_3">
             <a:extLst>
               <a:ext uri="{FF2B5EF4-FFF2-40B4-BE49-F238E27FC236}">
-                <a16:creationId xmlns:a16="http://schemas.microsoft.com/office/drawing/2014/main" id="{6C88B43C-6B31-589B-BBE3-76ED6DF0AFD3}"/>
+                <a16:creationId xmlns:a16="http://schemas.microsoft.com/office/drawing/2014/main" id="{E02C8871-1278-8E01-BB96-452B0A3AAAB5}"/>
               </a:ext>
             </a:extLst>
           </p:cNvPr>
@@ -13580,7 +13580,7 @@
           <p:cNvPr id="14" name="item_4_title">
             <a:extLst>
               <a:ext uri="{FF2B5EF4-FFF2-40B4-BE49-F238E27FC236}">
-                <a16:creationId xmlns:a16="http://schemas.microsoft.com/office/drawing/2014/main" id="{6C247BF0-07BD-EE34-ADCF-9312A81271AC}"/>
+                <a16:creationId xmlns:a16="http://schemas.microsoft.com/office/drawing/2014/main" id="{CF5C21CF-C8A9-4363-2249-003BBC110CF3}"/>
               </a:ext>
             </a:extLst>
           </p:cNvPr>
@@ -13633,7 +13633,7 @@
           <p:cNvPr id="15" name="item_4">
             <a:extLst>
               <a:ext uri="{FF2B5EF4-FFF2-40B4-BE49-F238E27FC236}">
-                <a16:creationId xmlns:a16="http://schemas.microsoft.com/office/drawing/2014/main" id="{7C2F8787-2D48-B994-724D-C5DF8E43FAD5}"/>
+                <a16:creationId xmlns:a16="http://schemas.microsoft.com/office/drawing/2014/main" id="{70CBF8A5-661F-3B85-767E-E91D8F93AD2C}"/>
               </a:ext>
             </a:extLst>
           </p:cNvPr>
@@ -13681,7 +13681,7 @@
           <p:cNvPr id="16" name="source">
             <a:extLst>
               <a:ext uri="{FF2B5EF4-FFF2-40B4-BE49-F238E27FC236}">
-                <a16:creationId xmlns:a16="http://schemas.microsoft.com/office/drawing/2014/main" id="{2789BDB2-D86D-CAAE-8EA5-C90FA0263091}"/>
+                <a16:creationId xmlns:a16="http://schemas.microsoft.com/office/drawing/2014/main" id="{DFE969E6-02C0-D13A-22B3-62BF077F29CB}"/>
               </a:ext>
             </a:extLst>
           </p:cNvPr>
@@ -13736,7 +13736,7 @@
     </p:spTree>
     <p:extLst>
       <p:ext uri="{BB962C8B-B14F-4D97-AF65-F5344CB8AC3E}">
-        <p14:creationId xmlns:p14="http://schemas.microsoft.com/office/powerpoint/2010/main" val="916477251"/>
+        <p14:creationId xmlns:p14="http://schemas.microsoft.com/office/powerpoint/2010/main" val="3761840478"/>
       </p:ext>
     </p:extLst>
   </p:cSld>
@@ -13773,7 +13773,7 @@
           <p:cNvPr id="9" name="creative_background_master">
             <a:extLst>
               <a:ext uri="{FF2B5EF4-FFF2-40B4-BE49-F238E27FC236}">
-                <a16:creationId xmlns:a16="http://schemas.microsoft.com/office/drawing/2014/main" id="{14B14F95-229E-E148-AB6F-FB1875461434}"/>
+                <a16:creationId xmlns:a16="http://schemas.microsoft.com/office/drawing/2014/main" id="{BB81384A-9FAE-1C79-E653-E7DBF48BB54A}"/>
               </a:ext>
             </a:extLst>
           </p:cNvPr>
@@ -13934,7 +13934,7 @@
             </a:lvl1pPr>
           </a:lstStyle>
           <a:p>
-            <a:fld id="{596016C9-F9DB-4EE1-B518-EB72C8994E73}" type="datetimeFigureOut">
+            <a:fld id="{8A86AB56-393C-4917-9670-5C316C4C0775}" type="datetimeFigureOut">
               <a:rPr lang="en-US" smtClean="0"/>
               <a:t>10/3/2026</a:t>
             </a:fld>
@@ -14016,7 +14016,7 @@
             </a:lvl1pPr>
           </a:lstStyle>
           <a:p>
-            <a:fld id="{E3F824D1-671D-418F-B16B-13B951B4F770}" type="slidenum">
+            <a:fld id="{FC63DECE-DCAF-48B3-9E38-EA00981B3229}" type="slidenum">
               <a:rPr lang="en-US" smtClean="0"/>
               <a:t>‹#›</a:t>
             </a:fld>
@@ -14027,7 +14027,7 @@
     </p:spTree>
     <p:extLst>
       <p:ext uri="{BB962C8B-B14F-4D97-AF65-F5344CB8AC3E}">
-        <p14:creationId xmlns:p14="http://schemas.microsoft.com/office/powerpoint/2010/main" val="362712182"/>
+        <p14:creationId xmlns:p14="http://schemas.microsoft.com/office/powerpoint/2010/main" val="1272659141"/>
       </p:ext>
     </p:extLst>
   </p:cSld>
@@ -14420,10 +14420,10 @@
         <a:srgbClr val="E9E8E5"/>
       </a:lt2>
       <a:accent1>
-        <a:srgbClr val="1E59A5"/>
+        <a:srgbClr val="17324D"/>
       </a:accent1>
       <a:accent2>
-        <a:srgbClr val="17324D"/>
+        <a:srgbClr val="1E59A5"/>
       </a:accent2>
       <a:accent3>
         <a:srgbClr val="4B5057"/>
@@ -14432,7 +14432,7 @@
         <a:srgbClr val="17324D"/>
       </a:accent4>
       <a:accent5>
-        <a:srgbClr val="1E59A5"/>
+        <a:srgbClr val="17324D"/>
       </a:accent5>
       <a:accent6>
         <a:srgbClr val="4B5057"/>

--- a/design/templates/papyrus/template.pptx
+++ b/design/templates/papyrus/template.pptx
@@ -126,7 +126,7 @@
           <p:cNvPr id="9" name="creative_background">
             <a:extLst>
               <a:ext uri="{FF2B5EF4-FFF2-40B4-BE49-F238E27FC236}">
-                <a16:creationId xmlns:a16="http://schemas.microsoft.com/office/drawing/2014/main" id="{BB6ECEA3-DDF0-23A9-D017-298D00B05042}"/>
+                <a16:creationId xmlns:a16="http://schemas.microsoft.com/office/drawing/2014/main" id="{5082BB98-FC1B-9E44-E4FC-780A43B34011}"/>
               </a:ext>
             </a:extLst>
           </p:cNvPr>
@@ -290,9 +290,9 @@
             </a:lvl1pPr>
           </a:lstStyle>
           <a:p>
-            <a:fld id="{8A86AB56-393C-4917-9670-5C316C4C0775}" type="datetimeFigureOut">
+            <a:fld id="{A25588AC-933F-4B05-B4F9-0387B2A9C63D}" type="datetimeFigureOut">
               <a:rPr lang="en-US" smtClean="0"/>
-              <a:t>10/3/2026</a:t>
+              <a:t>10/4/2026</a:t>
             </a:fld>
             <a:endParaRPr lang="en-US"/>
           </a:p>
@@ -332,7 +332,7 @@
           <a:bodyPr/>
           <a:lstStyle/>
           <a:p>
-            <a:fld id="{FC63DECE-DCAF-48B3-9E38-EA00981B3229}" type="slidenum">
+            <a:fld id="{B96B5B2C-9731-4665-8499-523F6B9BFF00}" type="slidenum">
               <a:rPr lang="en-US" smtClean="0"/>
               <a:t>‹#›</a:t>
             </a:fld>
@@ -343,7 +343,7 @@
     </p:spTree>
     <p:extLst>
       <p:ext uri="{BB962C8B-B14F-4D97-AF65-F5344CB8AC3E}">
-        <p14:creationId xmlns:p14="http://schemas.microsoft.com/office/powerpoint/2010/main" val="72173667"/>
+        <p14:creationId xmlns:p14="http://schemas.microsoft.com/office/powerpoint/2010/main" val="206948339"/>
       </p:ext>
     </p:extLst>
   </p:cSld>
@@ -375,7 +375,7 @@
           <p:cNvPr id="7" name="creative_background">
             <a:extLst>
               <a:ext uri="{FF2B5EF4-FFF2-40B4-BE49-F238E27FC236}">
-                <a16:creationId xmlns:a16="http://schemas.microsoft.com/office/drawing/2014/main" id="{9DE1B459-29E3-F053-FE18-739DF6C639DB}"/>
+                <a16:creationId xmlns:a16="http://schemas.microsoft.com/office/drawing/2014/main" id="{7DE04B7B-20DE-295E-B288-A329CE052582}"/>
               </a:ext>
             </a:extLst>
           </p:cNvPr>
@@ -448,9 +448,9 @@
           <a:bodyPr/>
           <a:lstStyle/>
           <a:p>
-            <a:fld id="{8A86AB56-393C-4917-9670-5C316C4C0775}" type="datetimeFigureOut">
+            <a:fld id="{A25588AC-933F-4B05-B4F9-0387B2A9C63D}" type="datetimeFigureOut">
               <a:rPr lang="en-US" smtClean="0"/>
-              <a:t>10/3/2026</a:t>
+              <a:t>10/4/2026</a:t>
             </a:fld>
             <a:endParaRPr lang="en-US"/>
           </a:p>
@@ -490,7 +490,7 @@
           <a:bodyPr/>
           <a:lstStyle/>
           <a:p>
-            <a:fld id="{FC63DECE-DCAF-48B3-9E38-EA00981B3229}" type="slidenum">
+            <a:fld id="{B96B5B2C-9731-4665-8499-523F6B9BFF00}" type="slidenum">
               <a:rPr lang="en-US" smtClean="0"/>
               <a:t>‹#›</a:t>
             </a:fld>
@@ -503,7 +503,7 @@
           <p:cNvPr id="8" name="body">
             <a:extLst>
               <a:ext uri="{FF2B5EF4-FFF2-40B4-BE49-F238E27FC236}">
-                <a16:creationId xmlns:a16="http://schemas.microsoft.com/office/drawing/2014/main" id="{30DB15DA-BBCC-8F60-7FA9-CD16AB475016}"/>
+                <a16:creationId xmlns:a16="http://schemas.microsoft.com/office/drawing/2014/main" id="{BB4470C9-01F4-008B-DB96-8127CC8160DF}"/>
               </a:ext>
             </a:extLst>
           </p:cNvPr>
@@ -543,7 +543,7 @@
           <p:cNvPr id="9" name="source">
             <a:extLst>
               <a:ext uri="{FF2B5EF4-FFF2-40B4-BE49-F238E27FC236}">
-                <a16:creationId xmlns:a16="http://schemas.microsoft.com/office/drawing/2014/main" id="{E5C1C171-CD31-B750-BC62-D88F2EF86B88}"/>
+                <a16:creationId xmlns:a16="http://schemas.microsoft.com/office/drawing/2014/main" id="{1F0DEC8F-6111-9FCE-C74E-E6E329EF701A}"/>
               </a:ext>
             </a:extLst>
           </p:cNvPr>
@@ -598,7 +598,7 @@
     </p:spTree>
     <p:extLst>
       <p:ext uri="{BB962C8B-B14F-4D97-AF65-F5344CB8AC3E}">
-        <p14:creationId xmlns:p14="http://schemas.microsoft.com/office/powerpoint/2010/main" val="2850072880"/>
+        <p14:creationId xmlns:p14="http://schemas.microsoft.com/office/powerpoint/2010/main" val="699579755"/>
       </p:ext>
     </p:extLst>
   </p:cSld>
@@ -630,7 +630,7 @@
           <p:cNvPr id="7" name="creative_background">
             <a:extLst>
               <a:ext uri="{FF2B5EF4-FFF2-40B4-BE49-F238E27FC236}">
-                <a16:creationId xmlns:a16="http://schemas.microsoft.com/office/drawing/2014/main" id="{2F57A078-2FF6-B3CD-95FA-C6135E0EF62C}"/>
+                <a16:creationId xmlns:a16="http://schemas.microsoft.com/office/drawing/2014/main" id="{84DE44AC-FC13-2193-9C1F-1A0FF4C30B49}"/>
               </a:ext>
             </a:extLst>
           </p:cNvPr>
@@ -703,9 +703,9 @@
           <a:bodyPr/>
           <a:lstStyle/>
           <a:p>
-            <a:fld id="{8A86AB56-393C-4917-9670-5C316C4C0775}" type="datetimeFigureOut">
+            <a:fld id="{A25588AC-933F-4B05-B4F9-0387B2A9C63D}" type="datetimeFigureOut">
               <a:rPr lang="en-US" smtClean="0"/>
-              <a:t>10/3/2026</a:t>
+              <a:t>10/4/2026</a:t>
             </a:fld>
             <a:endParaRPr lang="en-US"/>
           </a:p>
@@ -745,7 +745,7 @@
           <a:bodyPr/>
           <a:lstStyle/>
           <a:p>
-            <a:fld id="{FC63DECE-DCAF-48B3-9E38-EA00981B3229}" type="slidenum">
+            <a:fld id="{B96B5B2C-9731-4665-8499-523F6B9BFF00}" type="slidenum">
               <a:rPr lang="en-US" smtClean="0"/>
               <a:t>‹#›</a:t>
             </a:fld>
@@ -758,7 +758,7 @@
           <p:cNvPr id="8" name="body">
             <a:extLst>
               <a:ext uri="{FF2B5EF4-FFF2-40B4-BE49-F238E27FC236}">
-                <a16:creationId xmlns:a16="http://schemas.microsoft.com/office/drawing/2014/main" id="{CFA5C973-19C1-82E0-2F87-4B75F4D635B0}"/>
+                <a16:creationId xmlns:a16="http://schemas.microsoft.com/office/drawing/2014/main" id="{93786052-61F8-9538-EF2D-299A49264C38}"/>
               </a:ext>
             </a:extLst>
           </p:cNvPr>
@@ -801,7 +801,7 @@
     </p:spTree>
     <p:extLst>
       <p:ext uri="{BB962C8B-B14F-4D97-AF65-F5344CB8AC3E}">
-        <p14:creationId xmlns:p14="http://schemas.microsoft.com/office/powerpoint/2010/main" val="990606608"/>
+        <p14:creationId xmlns:p14="http://schemas.microsoft.com/office/powerpoint/2010/main" val="2859273675"/>
       </p:ext>
     </p:extLst>
   </p:cSld>
@@ -877,7 +877,7 @@
           <p:cNvPr id="6" name="section_number">
             <a:extLst>
               <a:ext uri="{FF2B5EF4-FFF2-40B4-BE49-F238E27FC236}">
-                <a16:creationId xmlns:a16="http://schemas.microsoft.com/office/drawing/2014/main" id="{0FEBE1C4-CA39-0311-4482-3E4418589548}"/>
+                <a16:creationId xmlns:a16="http://schemas.microsoft.com/office/drawing/2014/main" id="{5D58CFFF-AD51-3435-8097-9C66E10F31C0}"/>
               </a:ext>
             </a:extLst>
           </p:cNvPr>
@@ -933,7 +933,7 @@
           <p:cNvPr id="7" name="subtitle">
             <a:extLst>
               <a:ext uri="{FF2B5EF4-FFF2-40B4-BE49-F238E27FC236}">
-                <a16:creationId xmlns:a16="http://schemas.microsoft.com/office/drawing/2014/main" id="{FDC4CEAC-846E-A910-214E-843F851D4DBA}"/>
+                <a16:creationId xmlns:a16="http://schemas.microsoft.com/office/drawing/2014/main" id="{112BBB55-93D8-B539-9CAE-C9461264B4AF}"/>
               </a:ext>
             </a:extLst>
           </p:cNvPr>
@@ -985,7 +985,7 @@
           <p:cNvPr id="8" name="divider_rule">
             <a:extLst>
               <a:ext uri="{FF2B5EF4-FFF2-40B4-BE49-F238E27FC236}">
-                <a16:creationId xmlns:a16="http://schemas.microsoft.com/office/drawing/2014/main" id="{28882A88-E946-9D9C-1AED-B6B06442382F}"/>
+                <a16:creationId xmlns:a16="http://schemas.microsoft.com/office/drawing/2014/main" id="{C9BEA3A1-3DF0-D767-B631-DBDC56519E96}"/>
               </a:ext>
             </a:extLst>
           </p:cNvPr>
@@ -1032,7 +1032,7 @@
           <p:cNvPr id="9" name="divider_rule">
             <a:extLst>
               <a:ext uri="{FF2B5EF4-FFF2-40B4-BE49-F238E27FC236}">
-                <a16:creationId xmlns:a16="http://schemas.microsoft.com/office/drawing/2014/main" id="{5C33A3AC-428C-F086-C00B-6605DC33031A}"/>
+                <a16:creationId xmlns:a16="http://schemas.microsoft.com/office/drawing/2014/main" id="{DE427DA8-DE97-515A-C7F8-B1870A5A2309}"/>
               </a:ext>
             </a:extLst>
           </p:cNvPr>
@@ -1079,7 +1079,7 @@
           <p:cNvPr id="10" name="divider_rule">
             <a:extLst>
               <a:ext uri="{FF2B5EF4-FFF2-40B4-BE49-F238E27FC236}">
-                <a16:creationId xmlns:a16="http://schemas.microsoft.com/office/drawing/2014/main" id="{BFC5669D-6FCF-1E20-B112-301F633A9A0A}"/>
+                <a16:creationId xmlns:a16="http://schemas.microsoft.com/office/drawing/2014/main" id="{BC2D8C86-6344-5746-754B-EF81DFD516E0}"/>
               </a:ext>
             </a:extLst>
           </p:cNvPr>
@@ -1124,7 +1124,7 @@
     </p:spTree>
     <p:extLst>
       <p:ext uri="{BB962C8B-B14F-4D97-AF65-F5344CB8AC3E}">
-        <p14:creationId xmlns:p14="http://schemas.microsoft.com/office/powerpoint/2010/main" val="3706200531"/>
+        <p14:creationId xmlns:p14="http://schemas.microsoft.com/office/powerpoint/2010/main" val="663763063"/>
       </p:ext>
     </p:extLst>
   </p:cSld>
@@ -1156,7 +1156,7 @@
           <p:cNvPr id="7" name="creative_background">
             <a:extLst>
               <a:ext uri="{FF2B5EF4-FFF2-40B4-BE49-F238E27FC236}">
-                <a16:creationId xmlns:a16="http://schemas.microsoft.com/office/drawing/2014/main" id="{88FACE82-65D1-8D61-632D-AD6E933109E6}"/>
+                <a16:creationId xmlns:a16="http://schemas.microsoft.com/office/drawing/2014/main" id="{7F6F64DF-9908-E6F8-988E-564A6D3D890F}"/>
               </a:ext>
             </a:extLst>
           </p:cNvPr>
@@ -1229,9 +1229,9 @@
           <a:bodyPr/>
           <a:lstStyle/>
           <a:p>
-            <a:fld id="{8A86AB56-393C-4917-9670-5C316C4C0775}" type="datetimeFigureOut">
+            <a:fld id="{A25588AC-933F-4B05-B4F9-0387B2A9C63D}" type="datetimeFigureOut">
               <a:rPr lang="en-US" smtClean="0"/>
-              <a:t>10/3/2026</a:t>
+              <a:t>10/4/2026</a:t>
             </a:fld>
             <a:endParaRPr lang="en-US"/>
           </a:p>
@@ -1271,7 +1271,7 @@
           <a:bodyPr/>
           <a:lstStyle/>
           <a:p>
-            <a:fld id="{FC63DECE-DCAF-48B3-9E38-EA00981B3229}" type="slidenum">
+            <a:fld id="{B96B5B2C-9731-4665-8499-523F6B9BFF00}" type="slidenum">
               <a:rPr lang="en-US" smtClean="0"/>
               <a:t>‹#›</a:t>
             </a:fld>
@@ -1284,7 +1284,7 @@
           <p:cNvPr id="8" name="item_1_title">
             <a:extLst>
               <a:ext uri="{FF2B5EF4-FFF2-40B4-BE49-F238E27FC236}">
-                <a16:creationId xmlns:a16="http://schemas.microsoft.com/office/drawing/2014/main" id="{05878709-F44C-5139-D5DB-57F822AFD6F1}"/>
+                <a16:creationId xmlns:a16="http://schemas.microsoft.com/office/drawing/2014/main" id="{7AF4C0A3-8FB7-1B88-EABD-411D99BC3DD5}"/>
               </a:ext>
             </a:extLst>
           </p:cNvPr>
@@ -1334,7 +1334,7 @@
           <p:cNvPr id="9" name="item_1">
             <a:extLst>
               <a:ext uri="{FF2B5EF4-FFF2-40B4-BE49-F238E27FC236}">
-                <a16:creationId xmlns:a16="http://schemas.microsoft.com/office/drawing/2014/main" id="{7414C0AE-066F-415A-31F5-90C62C319503}"/>
+                <a16:creationId xmlns:a16="http://schemas.microsoft.com/office/drawing/2014/main" id="{DF6D9C03-A1B1-B8F7-8684-29509D1C5A48}"/>
               </a:ext>
             </a:extLst>
           </p:cNvPr>
@@ -1382,7 +1382,7 @@
           <p:cNvPr id="10" name="item_2_title">
             <a:extLst>
               <a:ext uri="{FF2B5EF4-FFF2-40B4-BE49-F238E27FC236}">
-                <a16:creationId xmlns:a16="http://schemas.microsoft.com/office/drawing/2014/main" id="{FF350D37-5912-0FAA-67A2-325819BCCFEB}"/>
+                <a16:creationId xmlns:a16="http://schemas.microsoft.com/office/drawing/2014/main" id="{5CED644A-6097-6EF6-6565-F217ACC3BBA4}"/>
               </a:ext>
             </a:extLst>
           </p:cNvPr>
@@ -1435,7 +1435,7 @@
           <p:cNvPr id="11" name="item_2">
             <a:extLst>
               <a:ext uri="{FF2B5EF4-FFF2-40B4-BE49-F238E27FC236}">
-                <a16:creationId xmlns:a16="http://schemas.microsoft.com/office/drawing/2014/main" id="{E7B8528E-7ABC-0D0B-0017-169221ABF9E2}"/>
+                <a16:creationId xmlns:a16="http://schemas.microsoft.com/office/drawing/2014/main" id="{CB814AFF-AF4C-461C-260A-C86D3B2D7C4A}"/>
               </a:ext>
             </a:extLst>
           </p:cNvPr>
@@ -1483,7 +1483,7 @@
           <p:cNvPr id="12" name="item_3_title">
             <a:extLst>
               <a:ext uri="{FF2B5EF4-FFF2-40B4-BE49-F238E27FC236}">
-                <a16:creationId xmlns:a16="http://schemas.microsoft.com/office/drawing/2014/main" id="{4A6D8CBD-2B10-2D5B-70A5-178A0A68C173}"/>
+                <a16:creationId xmlns:a16="http://schemas.microsoft.com/office/drawing/2014/main" id="{0C4A3C6A-92E7-823B-CF80-056E9E7D9F3A}"/>
               </a:ext>
             </a:extLst>
           </p:cNvPr>
@@ -1536,7 +1536,7 @@
           <p:cNvPr id="13" name="item_3">
             <a:extLst>
               <a:ext uri="{FF2B5EF4-FFF2-40B4-BE49-F238E27FC236}">
-                <a16:creationId xmlns:a16="http://schemas.microsoft.com/office/drawing/2014/main" id="{242DA4DC-8667-1D9F-67AD-5DB3239F1DDF}"/>
+                <a16:creationId xmlns:a16="http://schemas.microsoft.com/office/drawing/2014/main" id="{3BB1CE7A-61DE-BE95-A86F-010E2E5EB60E}"/>
               </a:ext>
             </a:extLst>
           </p:cNvPr>
@@ -1584,7 +1584,7 @@
           <p:cNvPr id="14" name="item_4_title">
             <a:extLst>
               <a:ext uri="{FF2B5EF4-FFF2-40B4-BE49-F238E27FC236}">
-                <a16:creationId xmlns:a16="http://schemas.microsoft.com/office/drawing/2014/main" id="{3F4152C1-D6D3-3E8C-4F5A-7E7BF16528DD}"/>
+                <a16:creationId xmlns:a16="http://schemas.microsoft.com/office/drawing/2014/main" id="{9B041B7F-B16A-E2CC-CCAE-26A3DAA0FB0D}"/>
               </a:ext>
             </a:extLst>
           </p:cNvPr>
@@ -1637,7 +1637,7 @@
           <p:cNvPr id="15" name="item_4">
             <a:extLst>
               <a:ext uri="{FF2B5EF4-FFF2-40B4-BE49-F238E27FC236}">
-                <a16:creationId xmlns:a16="http://schemas.microsoft.com/office/drawing/2014/main" id="{499207E5-FAB3-879E-3E98-1FD945BD1320}"/>
+                <a16:creationId xmlns:a16="http://schemas.microsoft.com/office/drawing/2014/main" id="{3326B483-FFFB-0916-3297-C1738A8A2B74}"/>
               </a:ext>
             </a:extLst>
           </p:cNvPr>
@@ -1685,7 +1685,7 @@
           <p:cNvPr id="16" name="source">
             <a:extLst>
               <a:ext uri="{FF2B5EF4-FFF2-40B4-BE49-F238E27FC236}">
-                <a16:creationId xmlns:a16="http://schemas.microsoft.com/office/drawing/2014/main" id="{3637D1FB-38C3-F34A-80C1-FF76F9F9D382}"/>
+                <a16:creationId xmlns:a16="http://schemas.microsoft.com/office/drawing/2014/main" id="{4B891704-E449-6BA1-4680-7C77B013C353}"/>
               </a:ext>
             </a:extLst>
           </p:cNvPr>
@@ -1740,7 +1740,7 @@
     </p:spTree>
     <p:extLst>
       <p:ext uri="{BB962C8B-B14F-4D97-AF65-F5344CB8AC3E}">
-        <p14:creationId xmlns:p14="http://schemas.microsoft.com/office/powerpoint/2010/main" val="2521191983"/>
+        <p14:creationId xmlns:p14="http://schemas.microsoft.com/office/powerpoint/2010/main" val="946671552"/>
       </p:ext>
     </p:extLst>
   </p:cSld>
@@ -1772,7 +1772,7 @@
           <p:cNvPr id="7" name="creative_background">
             <a:extLst>
               <a:ext uri="{FF2B5EF4-FFF2-40B4-BE49-F238E27FC236}">
-                <a16:creationId xmlns:a16="http://schemas.microsoft.com/office/drawing/2014/main" id="{F0A67B3B-92FE-C264-8C1B-95D79EC2C908}"/>
+                <a16:creationId xmlns:a16="http://schemas.microsoft.com/office/drawing/2014/main" id="{D20BC66C-A606-114D-3036-95E4B90BD9FC}"/>
               </a:ext>
             </a:extLst>
           </p:cNvPr>
@@ -1845,9 +1845,9 @@
           <a:bodyPr/>
           <a:lstStyle/>
           <a:p>
-            <a:fld id="{8A86AB56-393C-4917-9670-5C316C4C0775}" type="datetimeFigureOut">
+            <a:fld id="{A25588AC-933F-4B05-B4F9-0387B2A9C63D}" type="datetimeFigureOut">
               <a:rPr lang="en-US" smtClean="0"/>
-              <a:t>10/3/2026</a:t>
+              <a:t>10/4/2026</a:t>
             </a:fld>
             <a:endParaRPr lang="en-US"/>
           </a:p>
@@ -1887,7 +1887,7 @@
           <a:bodyPr/>
           <a:lstStyle/>
           <a:p>
-            <a:fld id="{FC63DECE-DCAF-48B3-9E38-EA00981B3229}" type="slidenum">
+            <a:fld id="{B96B5B2C-9731-4665-8499-523F6B9BFF00}" type="slidenum">
               <a:rPr lang="en-US" smtClean="0"/>
               <a:t>‹#›</a:t>
             </a:fld>
@@ -1900,7 +1900,7 @@
           <p:cNvPr id="8" name="body">
             <a:extLst>
               <a:ext uri="{FF2B5EF4-FFF2-40B4-BE49-F238E27FC236}">
-                <a16:creationId xmlns:a16="http://schemas.microsoft.com/office/drawing/2014/main" id="{EF9E1DED-BC77-F048-818D-88F2695C2481}"/>
+                <a16:creationId xmlns:a16="http://schemas.microsoft.com/office/drawing/2014/main" id="{D973F120-D760-7AE4-B084-0747B6D20453}"/>
               </a:ext>
             </a:extLst>
           </p:cNvPr>
@@ -1945,7 +1945,7 @@
           <p:cNvPr id="9" name="source">
             <a:extLst>
               <a:ext uri="{FF2B5EF4-FFF2-40B4-BE49-F238E27FC236}">
-                <a16:creationId xmlns:a16="http://schemas.microsoft.com/office/drawing/2014/main" id="{825F2658-C18A-A817-97FF-F8C5B2B31844}"/>
+                <a16:creationId xmlns:a16="http://schemas.microsoft.com/office/drawing/2014/main" id="{9DA6EA1D-3369-086A-8032-5E8DE5AC87E4}"/>
               </a:ext>
             </a:extLst>
           </p:cNvPr>
@@ -2000,7 +2000,7 @@
     </p:spTree>
     <p:extLst>
       <p:ext uri="{BB962C8B-B14F-4D97-AF65-F5344CB8AC3E}">
-        <p14:creationId xmlns:p14="http://schemas.microsoft.com/office/powerpoint/2010/main" val="821589793"/>
+        <p14:creationId xmlns:p14="http://schemas.microsoft.com/office/powerpoint/2010/main" val="4169400782"/>
       </p:ext>
     </p:extLst>
   </p:cSld>
@@ -2032,7 +2032,7 @@
           <p:cNvPr id="7" name="creative_background">
             <a:extLst>
               <a:ext uri="{FF2B5EF4-FFF2-40B4-BE49-F238E27FC236}">
-                <a16:creationId xmlns:a16="http://schemas.microsoft.com/office/drawing/2014/main" id="{869C00FE-8AE8-EF5F-EA61-ACAEA5608B9B}"/>
+                <a16:creationId xmlns:a16="http://schemas.microsoft.com/office/drawing/2014/main" id="{DFADE336-3550-6B8B-F9F3-08C795F6161D}"/>
               </a:ext>
             </a:extLst>
           </p:cNvPr>
@@ -2105,9 +2105,9 @@
           <a:bodyPr/>
           <a:lstStyle/>
           <a:p>
-            <a:fld id="{8A86AB56-393C-4917-9670-5C316C4C0775}" type="datetimeFigureOut">
+            <a:fld id="{A25588AC-933F-4B05-B4F9-0387B2A9C63D}" type="datetimeFigureOut">
               <a:rPr lang="en-US" smtClean="0"/>
-              <a:t>10/3/2026</a:t>
+              <a:t>10/4/2026</a:t>
             </a:fld>
             <a:endParaRPr lang="en-US"/>
           </a:p>
@@ -2147,7 +2147,7 @@
           <a:bodyPr/>
           <a:lstStyle/>
           <a:p>
-            <a:fld id="{FC63DECE-DCAF-48B3-9E38-EA00981B3229}" type="slidenum">
+            <a:fld id="{B96B5B2C-9731-4665-8499-523F6B9BFF00}" type="slidenum">
               <a:rPr lang="en-US" smtClean="0"/>
               <a:t>‹#›</a:t>
             </a:fld>
@@ -2160,7 +2160,7 @@
           <p:cNvPr id="8" name="item_1_title">
             <a:extLst>
               <a:ext uri="{FF2B5EF4-FFF2-40B4-BE49-F238E27FC236}">
-                <a16:creationId xmlns:a16="http://schemas.microsoft.com/office/drawing/2014/main" id="{6C5EA5E8-D279-98CD-31DE-782AEFF448BD}"/>
+                <a16:creationId xmlns:a16="http://schemas.microsoft.com/office/drawing/2014/main" id="{5ABD6CCD-1EDD-1A83-C95C-7C2C7BB70F2D}"/>
               </a:ext>
             </a:extLst>
           </p:cNvPr>
@@ -2210,7 +2210,7 @@
           <p:cNvPr id="9" name="item_1">
             <a:extLst>
               <a:ext uri="{FF2B5EF4-FFF2-40B4-BE49-F238E27FC236}">
-                <a16:creationId xmlns:a16="http://schemas.microsoft.com/office/drawing/2014/main" id="{16956901-1F82-788F-7495-F52B983F46B5}"/>
+                <a16:creationId xmlns:a16="http://schemas.microsoft.com/office/drawing/2014/main" id="{A09779BF-ABA3-7A49-3521-0CE1DFE69BF3}"/>
               </a:ext>
             </a:extLst>
           </p:cNvPr>
@@ -2258,7 +2258,7 @@
           <p:cNvPr id="10" name="item_2_title">
             <a:extLst>
               <a:ext uri="{FF2B5EF4-FFF2-40B4-BE49-F238E27FC236}">
-                <a16:creationId xmlns:a16="http://schemas.microsoft.com/office/drawing/2014/main" id="{49F4AD89-E3B1-B5C6-FC57-E6B4BAD6413C}"/>
+                <a16:creationId xmlns:a16="http://schemas.microsoft.com/office/drawing/2014/main" id="{A1311973-D221-266B-3FA4-56895AB24E1E}"/>
               </a:ext>
             </a:extLst>
           </p:cNvPr>
@@ -2311,7 +2311,7 @@
           <p:cNvPr id="11" name="item_2">
             <a:extLst>
               <a:ext uri="{FF2B5EF4-FFF2-40B4-BE49-F238E27FC236}">
-                <a16:creationId xmlns:a16="http://schemas.microsoft.com/office/drawing/2014/main" id="{9E566FE4-0EDB-5F0B-A67E-C36979EBE4A1}"/>
+                <a16:creationId xmlns:a16="http://schemas.microsoft.com/office/drawing/2014/main" id="{EBA4AA24-9EE3-61F5-AE63-A3DA47941F08}"/>
               </a:ext>
             </a:extLst>
           </p:cNvPr>
@@ -2359,7 +2359,7 @@
           <p:cNvPr id="12" name="item_3_title">
             <a:extLst>
               <a:ext uri="{FF2B5EF4-FFF2-40B4-BE49-F238E27FC236}">
-                <a16:creationId xmlns:a16="http://schemas.microsoft.com/office/drawing/2014/main" id="{F2ADBECF-8288-85D1-134D-1B9551EC8FCC}"/>
+                <a16:creationId xmlns:a16="http://schemas.microsoft.com/office/drawing/2014/main" id="{BAD9C8DD-7D2E-B825-9DD4-864400014D27}"/>
               </a:ext>
             </a:extLst>
           </p:cNvPr>
@@ -2412,7 +2412,7 @@
           <p:cNvPr id="13" name="item_3">
             <a:extLst>
               <a:ext uri="{FF2B5EF4-FFF2-40B4-BE49-F238E27FC236}">
-                <a16:creationId xmlns:a16="http://schemas.microsoft.com/office/drawing/2014/main" id="{F8AB3485-614F-90B1-72B9-BA18765D854D}"/>
+                <a16:creationId xmlns:a16="http://schemas.microsoft.com/office/drawing/2014/main" id="{3A19F0AE-2469-2293-F8A2-AB839676BA93}"/>
               </a:ext>
             </a:extLst>
           </p:cNvPr>
@@ -2460,7 +2460,7 @@
           <p:cNvPr id="14" name="item_4_title">
             <a:extLst>
               <a:ext uri="{FF2B5EF4-FFF2-40B4-BE49-F238E27FC236}">
-                <a16:creationId xmlns:a16="http://schemas.microsoft.com/office/drawing/2014/main" id="{AAADB151-9395-F6A1-E885-4AAFEF9DA651}"/>
+                <a16:creationId xmlns:a16="http://schemas.microsoft.com/office/drawing/2014/main" id="{95F3E0D1-8027-9BDC-4D1D-07C5A1702958}"/>
               </a:ext>
             </a:extLst>
           </p:cNvPr>
@@ -2513,7 +2513,7 @@
           <p:cNvPr id="15" name="item_4">
             <a:extLst>
               <a:ext uri="{FF2B5EF4-FFF2-40B4-BE49-F238E27FC236}">
-                <a16:creationId xmlns:a16="http://schemas.microsoft.com/office/drawing/2014/main" id="{9BAB4B25-95A6-457F-DD4A-3C92F5FA2541}"/>
+                <a16:creationId xmlns:a16="http://schemas.microsoft.com/office/drawing/2014/main" id="{4FD1FFD9-F03C-B38D-46A3-625D00B8795C}"/>
               </a:ext>
             </a:extLst>
           </p:cNvPr>
@@ -2561,7 +2561,7 @@
           <p:cNvPr id="16" name="source">
             <a:extLst>
               <a:ext uri="{FF2B5EF4-FFF2-40B4-BE49-F238E27FC236}">
-                <a16:creationId xmlns:a16="http://schemas.microsoft.com/office/drawing/2014/main" id="{68B5B661-3750-017E-4852-75433121E929}"/>
+                <a16:creationId xmlns:a16="http://schemas.microsoft.com/office/drawing/2014/main" id="{C4E992FE-3A0C-6D91-F2A1-94F03CEABB22}"/>
               </a:ext>
             </a:extLst>
           </p:cNvPr>
@@ -2616,7 +2616,7 @@
     </p:spTree>
     <p:extLst>
       <p:ext uri="{BB962C8B-B14F-4D97-AF65-F5344CB8AC3E}">
-        <p14:creationId xmlns:p14="http://schemas.microsoft.com/office/powerpoint/2010/main" val="1875576600"/>
+        <p14:creationId xmlns:p14="http://schemas.microsoft.com/office/powerpoint/2010/main" val="2825741926"/>
       </p:ext>
     </p:extLst>
   </p:cSld>
@@ -2648,7 +2648,7 @@
           <p:cNvPr id="7" name="creative_background">
             <a:extLst>
               <a:ext uri="{FF2B5EF4-FFF2-40B4-BE49-F238E27FC236}">
-                <a16:creationId xmlns:a16="http://schemas.microsoft.com/office/drawing/2014/main" id="{80D69B75-BECD-CEDA-DAE0-1BE9877870C1}"/>
+                <a16:creationId xmlns:a16="http://schemas.microsoft.com/office/drawing/2014/main" id="{605B0C0D-5A0F-3152-3198-99D24EE34B7D}"/>
               </a:ext>
             </a:extLst>
           </p:cNvPr>
@@ -2721,9 +2721,9 @@
           <a:bodyPr/>
           <a:lstStyle/>
           <a:p>
-            <a:fld id="{8A86AB56-393C-4917-9670-5C316C4C0775}" type="datetimeFigureOut">
+            <a:fld id="{A25588AC-933F-4B05-B4F9-0387B2A9C63D}" type="datetimeFigureOut">
               <a:rPr lang="en-US" smtClean="0"/>
-              <a:t>10/3/2026</a:t>
+              <a:t>10/4/2026</a:t>
             </a:fld>
             <a:endParaRPr lang="en-US"/>
           </a:p>
@@ -2763,7 +2763,7 @@
           <a:bodyPr/>
           <a:lstStyle/>
           <a:p>
-            <a:fld id="{FC63DECE-DCAF-48B3-9E38-EA00981B3229}" type="slidenum">
+            <a:fld id="{B96B5B2C-9731-4665-8499-523F6B9BFF00}" type="slidenum">
               <a:rPr lang="en-US" smtClean="0"/>
               <a:t>‹#›</a:t>
             </a:fld>
@@ -2776,7 +2776,7 @@
           <p:cNvPr id="8" name="body">
             <a:extLst>
               <a:ext uri="{FF2B5EF4-FFF2-40B4-BE49-F238E27FC236}">
-                <a16:creationId xmlns:a16="http://schemas.microsoft.com/office/drawing/2014/main" id="{213D738C-82FB-F6AF-4926-601B4777CE54}"/>
+                <a16:creationId xmlns:a16="http://schemas.microsoft.com/office/drawing/2014/main" id="{3E407195-FB46-8F22-5542-09E1CBFAD27D}"/>
               </a:ext>
             </a:extLst>
           </p:cNvPr>
@@ -2816,7 +2816,7 @@
           <p:cNvPr id="9" name="kpi_value_1">
             <a:extLst>
               <a:ext uri="{FF2B5EF4-FFF2-40B4-BE49-F238E27FC236}">
-                <a16:creationId xmlns:a16="http://schemas.microsoft.com/office/drawing/2014/main" id="{5CF85154-3685-A475-2D40-BFEBE598876B}"/>
+                <a16:creationId xmlns:a16="http://schemas.microsoft.com/office/drawing/2014/main" id="{BE03394A-1B45-3276-B382-7A35E83BDC42}"/>
               </a:ext>
             </a:extLst>
           </p:cNvPr>
@@ -2869,7 +2869,7 @@
           <p:cNvPr id="10" name="kpi_label_1">
             <a:extLst>
               <a:ext uri="{FF2B5EF4-FFF2-40B4-BE49-F238E27FC236}">
-                <a16:creationId xmlns:a16="http://schemas.microsoft.com/office/drawing/2014/main" id="{284F0542-2DBA-2823-27FA-F3F3DBB872EF}"/>
+                <a16:creationId xmlns:a16="http://schemas.microsoft.com/office/drawing/2014/main" id="{A79E97B7-0B1A-5497-D78E-93C2F79A99C3}"/>
               </a:ext>
             </a:extLst>
           </p:cNvPr>
@@ -2917,7 +2917,7 @@
           <p:cNvPr id="11" name="source">
             <a:extLst>
               <a:ext uri="{FF2B5EF4-FFF2-40B4-BE49-F238E27FC236}">
-                <a16:creationId xmlns:a16="http://schemas.microsoft.com/office/drawing/2014/main" id="{79536C51-7854-5CEE-2864-BE638FA1844D}"/>
+                <a16:creationId xmlns:a16="http://schemas.microsoft.com/office/drawing/2014/main" id="{7487FB0E-9B23-9DC3-A373-F28312BD492F}"/>
               </a:ext>
             </a:extLst>
           </p:cNvPr>
@@ -2972,7 +2972,7 @@
     </p:spTree>
     <p:extLst>
       <p:ext uri="{BB962C8B-B14F-4D97-AF65-F5344CB8AC3E}">
-        <p14:creationId xmlns:p14="http://schemas.microsoft.com/office/powerpoint/2010/main" val="75527103"/>
+        <p14:creationId xmlns:p14="http://schemas.microsoft.com/office/powerpoint/2010/main" val="586299350"/>
       </p:ext>
     </p:extLst>
   </p:cSld>
@@ -3004,7 +3004,7 @@
           <p:cNvPr id="7" name="creative_background">
             <a:extLst>
               <a:ext uri="{FF2B5EF4-FFF2-40B4-BE49-F238E27FC236}">
-                <a16:creationId xmlns:a16="http://schemas.microsoft.com/office/drawing/2014/main" id="{FC84586C-C420-27B0-3199-820B536C4D5D}"/>
+                <a16:creationId xmlns:a16="http://schemas.microsoft.com/office/drawing/2014/main" id="{90591A4C-FAC8-BEA9-8096-F07753BC159A}"/>
               </a:ext>
             </a:extLst>
           </p:cNvPr>
@@ -3077,9 +3077,9 @@
           <a:bodyPr/>
           <a:lstStyle/>
           <a:p>
-            <a:fld id="{8A86AB56-393C-4917-9670-5C316C4C0775}" type="datetimeFigureOut">
+            <a:fld id="{A25588AC-933F-4B05-B4F9-0387B2A9C63D}" type="datetimeFigureOut">
               <a:rPr lang="en-US" smtClean="0"/>
-              <a:t>10/3/2026</a:t>
+              <a:t>10/4/2026</a:t>
             </a:fld>
             <a:endParaRPr lang="en-US"/>
           </a:p>
@@ -3119,7 +3119,7 @@
           <a:bodyPr/>
           <a:lstStyle/>
           <a:p>
-            <a:fld id="{FC63DECE-DCAF-48B3-9E38-EA00981B3229}" type="slidenum">
+            <a:fld id="{B96B5B2C-9731-4665-8499-523F6B9BFF00}" type="slidenum">
               <a:rPr lang="en-US" smtClean="0"/>
               <a:t>‹#›</a:t>
             </a:fld>
@@ -3132,7 +3132,7 @@
           <p:cNvPr id="8" name="body">
             <a:extLst>
               <a:ext uri="{FF2B5EF4-FFF2-40B4-BE49-F238E27FC236}">
-                <a16:creationId xmlns:a16="http://schemas.microsoft.com/office/drawing/2014/main" id="{80B2B12E-FB15-64A2-5393-D017B4162A1F}"/>
+                <a16:creationId xmlns:a16="http://schemas.microsoft.com/office/drawing/2014/main" id="{14FAF0F9-C7B1-23C8-7444-25B7BFB2D087}"/>
               </a:ext>
             </a:extLst>
           </p:cNvPr>
@@ -3172,7 +3172,7 @@
           <p:cNvPr id="9" name="kpi_value_1">
             <a:extLst>
               <a:ext uri="{FF2B5EF4-FFF2-40B4-BE49-F238E27FC236}">
-                <a16:creationId xmlns:a16="http://schemas.microsoft.com/office/drawing/2014/main" id="{9C07EEA3-01D2-74C0-1947-99E1B3505406}"/>
+                <a16:creationId xmlns:a16="http://schemas.microsoft.com/office/drawing/2014/main" id="{93C42A0B-39BF-DBAF-B4CC-E5D59E70D28C}"/>
               </a:ext>
             </a:extLst>
           </p:cNvPr>
@@ -3225,7 +3225,7 @@
           <p:cNvPr id="10" name="kpi_label_1">
             <a:extLst>
               <a:ext uri="{FF2B5EF4-FFF2-40B4-BE49-F238E27FC236}">
-                <a16:creationId xmlns:a16="http://schemas.microsoft.com/office/drawing/2014/main" id="{5BF83D7A-2A9D-C752-E58D-7054A2BAF9A8}"/>
+                <a16:creationId xmlns:a16="http://schemas.microsoft.com/office/drawing/2014/main" id="{C7060146-A7D5-8AC1-802C-ACC279AA286F}"/>
               </a:ext>
             </a:extLst>
           </p:cNvPr>
@@ -3273,7 +3273,7 @@
           <p:cNvPr id="11" name="kpi_value_2">
             <a:extLst>
               <a:ext uri="{FF2B5EF4-FFF2-40B4-BE49-F238E27FC236}">
-                <a16:creationId xmlns:a16="http://schemas.microsoft.com/office/drawing/2014/main" id="{9507F4CE-1E4C-5556-752B-FD36AE0504FA}"/>
+                <a16:creationId xmlns:a16="http://schemas.microsoft.com/office/drawing/2014/main" id="{29C7E449-4B4B-F184-55A0-D54CCB7FFD15}"/>
               </a:ext>
             </a:extLst>
           </p:cNvPr>
@@ -3326,7 +3326,7 @@
           <p:cNvPr id="12" name="kpi_label_2">
             <a:extLst>
               <a:ext uri="{FF2B5EF4-FFF2-40B4-BE49-F238E27FC236}">
-                <a16:creationId xmlns:a16="http://schemas.microsoft.com/office/drawing/2014/main" id="{ADE76006-7805-13EE-F821-E0C67BF92309}"/>
+                <a16:creationId xmlns:a16="http://schemas.microsoft.com/office/drawing/2014/main" id="{4B5613E7-C8AA-927E-7F85-4250A284BE42}"/>
               </a:ext>
             </a:extLst>
           </p:cNvPr>
@@ -3374,7 +3374,7 @@
           <p:cNvPr id="13" name="kpi_value_3">
             <a:extLst>
               <a:ext uri="{FF2B5EF4-FFF2-40B4-BE49-F238E27FC236}">
-                <a16:creationId xmlns:a16="http://schemas.microsoft.com/office/drawing/2014/main" id="{B072C646-678D-E767-B89E-F151788C379D}"/>
+                <a16:creationId xmlns:a16="http://schemas.microsoft.com/office/drawing/2014/main" id="{867D23FB-2DE8-937F-B5EA-9C1FAEB5FD13}"/>
               </a:ext>
             </a:extLst>
           </p:cNvPr>
@@ -3427,7 +3427,7 @@
           <p:cNvPr id="14" name="kpi_label_3">
             <a:extLst>
               <a:ext uri="{FF2B5EF4-FFF2-40B4-BE49-F238E27FC236}">
-                <a16:creationId xmlns:a16="http://schemas.microsoft.com/office/drawing/2014/main" id="{A19DA8CE-FC95-71AE-4BA2-A1AD0C886C55}"/>
+                <a16:creationId xmlns:a16="http://schemas.microsoft.com/office/drawing/2014/main" id="{BB6629B4-43D6-CD4E-5F70-AC66E383CACD}"/>
               </a:ext>
             </a:extLst>
           </p:cNvPr>
@@ -3475,7 +3475,7 @@
           <p:cNvPr id="15" name="kpi_value_4">
             <a:extLst>
               <a:ext uri="{FF2B5EF4-FFF2-40B4-BE49-F238E27FC236}">
-                <a16:creationId xmlns:a16="http://schemas.microsoft.com/office/drawing/2014/main" id="{30C1131E-3AA6-821F-0663-B80CAE5C4602}"/>
+                <a16:creationId xmlns:a16="http://schemas.microsoft.com/office/drawing/2014/main" id="{2B181FD4-CD0E-466D-4788-AF724D8BE362}"/>
               </a:ext>
             </a:extLst>
           </p:cNvPr>
@@ -3528,7 +3528,7 @@
           <p:cNvPr id="16" name="kpi_label_4">
             <a:extLst>
               <a:ext uri="{FF2B5EF4-FFF2-40B4-BE49-F238E27FC236}">
-                <a16:creationId xmlns:a16="http://schemas.microsoft.com/office/drawing/2014/main" id="{C75C1AA3-15A5-351B-6DFE-031AEF46EB0C}"/>
+                <a16:creationId xmlns:a16="http://schemas.microsoft.com/office/drawing/2014/main" id="{AC7D4376-B7AC-A6E8-3301-1F2BFC9052E6}"/>
               </a:ext>
             </a:extLst>
           </p:cNvPr>
@@ -3576,7 +3576,7 @@
           <p:cNvPr id="17" name="source">
             <a:extLst>
               <a:ext uri="{FF2B5EF4-FFF2-40B4-BE49-F238E27FC236}">
-                <a16:creationId xmlns:a16="http://schemas.microsoft.com/office/drawing/2014/main" id="{C8210712-58F4-FC58-1341-DC534C36C53B}"/>
+                <a16:creationId xmlns:a16="http://schemas.microsoft.com/office/drawing/2014/main" id="{4BD0D8E2-9733-5517-181F-22DA2409138D}"/>
               </a:ext>
             </a:extLst>
           </p:cNvPr>
@@ -3631,7 +3631,7 @@
     </p:spTree>
     <p:extLst>
       <p:ext uri="{BB962C8B-B14F-4D97-AF65-F5344CB8AC3E}">
-        <p14:creationId xmlns:p14="http://schemas.microsoft.com/office/powerpoint/2010/main" val="275124891"/>
+        <p14:creationId xmlns:p14="http://schemas.microsoft.com/office/powerpoint/2010/main" val="2182348781"/>
       </p:ext>
     </p:extLst>
   </p:cSld>
@@ -3663,7 +3663,7 @@
           <p:cNvPr id="7" name="creative_background">
             <a:extLst>
               <a:ext uri="{FF2B5EF4-FFF2-40B4-BE49-F238E27FC236}">
-                <a16:creationId xmlns:a16="http://schemas.microsoft.com/office/drawing/2014/main" id="{21CE9A3A-CA79-DAB5-7550-F0DA4A3832D4}"/>
+                <a16:creationId xmlns:a16="http://schemas.microsoft.com/office/drawing/2014/main" id="{362EBA70-0A4F-80BA-5502-51FCD39EAC4A}"/>
               </a:ext>
             </a:extLst>
           </p:cNvPr>
@@ -3736,9 +3736,9 @@
           <a:bodyPr/>
           <a:lstStyle/>
           <a:p>
-            <a:fld id="{8A86AB56-393C-4917-9670-5C316C4C0775}" type="datetimeFigureOut">
+            <a:fld id="{A25588AC-933F-4B05-B4F9-0387B2A9C63D}" type="datetimeFigureOut">
               <a:rPr lang="en-US" smtClean="0"/>
-              <a:t>10/3/2026</a:t>
+              <a:t>10/4/2026</a:t>
             </a:fld>
             <a:endParaRPr lang="en-US"/>
           </a:p>
@@ -3778,7 +3778,7 @@
           <a:bodyPr/>
           <a:lstStyle/>
           <a:p>
-            <a:fld id="{FC63DECE-DCAF-48B3-9E38-EA00981B3229}" type="slidenum">
+            <a:fld id="{B96B5B2C-9731-4665-8499-523F6B9BFF00}" type="slidenum">
               <a:rPr lang="en-US" smtClean="0"/>
               <a:t>‹#›</a:t>
             </a:fld>
@@ -3791,7 +3791,7 @@
           <p:cNvPr id="8" name="body">
             <a:extLst>
               <a:ext uri="{FF2B5EF4-FFF2-40B4-BE49-F238E27FC236}">
-                <a16:creationId xmlns:a16="http://schemas.microsoft.com/office/drawing/2014/main" id="{50A6EA44-CD41-89CC-C720-51FD90AA21F7}"/>
+                <a16:creationId xmlns:a16="http://schemas.microsoft.com/office/drawing/2014/main" id="{592C601E-1833-8AB1-2581-B433AEC51381}"/>
               </a:ext>
             </a:extLst>
           </p:cNvPr>
@@ -3831,7 +3831,7 @@
           <p:cNvPr id="9" name="kpi_value_1">
             <a:extLst>
               <a:ext uri="{FF2B5EF4-FFF2-40B4-BE49-F238E27FC236}">
-                <a16:creationId xmlns:a16="http://schemas.microsoft.com/office/drawing/2014/main" id="{8747195F-9333-53F6-575F-55D5D3262642}"/>
+                <a16:creationId xmlns:a16="http://schemas.microsoft.com/office/drawing/2014/main" id="{E8183D43-FAA8-CD46-C714-DC3E36D85E08}"/>
               </a:ext>
             </a:extLst>
           </p:cNvPr>
@@ -3884,7 +3884,7 @@
           <p:cNvPr id="10" name="kpi_label_1">
             <a:extLst>
               <a:ext uri="{FF2B5EF4-FFF2-40B4-BE49-F238E27FC236}">
-                <a16:creationId xmlns:a16="http://schemas.microsoft.com/office/drawing/2014/main" id="{450F1495-73C5-F666-0D82-A5D9441940B3}"/>
+                <a16:creationId xmlns:a16="http://schemas.microsoft.com/office/drawing/2014/main" id="{9A71BF12-779C-EB33-828E-8D2EB37AE9A1}"/>
               </a:ext>
             </a:extLst>
           </p:cNvPr>
@@ -3932,7 +3932,7 @@
           <p:cNvPr id="11" name="kpi_value_2">
             <a:extLst>
               <a:ext uri="{FF2B5EF4-FFF2-40B4-BE49-F238E27FC236}">
-                <a16:creationId xmlns:a16="http://schemas.microsoft.com/office/drawing/2014/main" id="{6CC1A85E-E8AD-DAA7-923C-9B0A9A4FA3B0}"/>
+                <a16:creationId xmlns:a16="http://schemas.microsoft.com/office/drawing/2014/main" id="{87DFA185-91AB-8DC1-B932-E3856A92D4BB}"/>
               </a:ext>
             </a:extLst>
           </p:cNvPr>
@@ -3985,7 +3985,7 @@
           <p:cNvPr id="12" name="kpi_label_2">
             <a:extLst>
               <a:ext uri="{FF2B5EF4-FFF2-40B4-BE49-F238E27FC236}">
-                <a16:creationId xmlns:a16="http://schemas.microsoft.com/office/drawing/2014/main" id="{23D377EF-83F8-0093-EDE2-FB795EEDC792}"/>
+                <a16:creationId xmlns:a16="http://schemas.microsoft.com/office/drawing/2014/main" id="{CA250F4B-B469-F6D6-51D1-73D074654A35}"/>
               </a:ext>
             </a:extLst>
           </p:cNvPr>
@@ -4033,7 +4033,7 @@
           <p:cNvPr id="13" name="source">
             <a:extLst>
               <a:ext uri="{FF2B5EF4-FFF2-40B4-BE49-F238E27FC236}">
-                <a16:creationId xmlns:a16="http://schemas.microsoft.com/office/drawing/2014/main" id="{48436001-506A-E710-F45A-2B8641805883}"/>
+                <a16:creationId xmlns:a16="http://schemas.microsoft.com/office/drawing/2014/main" id="{614F6034-06CD-C904-388E-9B7771D73996}"/>
               </a:ext>
             </a:extLst>
           </p:cNvPr>
@@ -4088,7 +4088,7 @@
     </p:spTree>
     <p:extLst>
       <p:ext uri="{BB962C8B-B14F-4D97-AF65-F5344CB8AC3E}">
-        <p14:creationId xmlns:p14="http://schemas.microsoft.com/office/powerpoint/2010/main" val="104612425"/>
+        <p14:creationId xmlns:p14="http://schemas.microsoft.com/office/powerpoint/2010/main" val="3116180026"/>
       </p:ext>
     </p:extLst>
   </p:cSld>
@@ -4120,7 +4120,7 @@
           <p:cNvPr id="7" name="creative_background">
             <a:extLst>
               <a:ext uri="{FF2B5EF4-FFF2-40B4-BE49-F238E27FC236}">
-                <a16:creationId xmlns:a16="http://schemas.microsoft.com/office/drawing/2014/main" id="{3E4B5C36-1600-5E68-0A6E-CDB15B6E7A29}"/>
+                <a16:creationId xmlns:a16="http://schemas.microsoft.com/office/drawing/2014/main" id="{A2E78B68-871B-E478-7317-C36DED1AD2F5}"/>
               </a:ext>
             </a:extLst>
           </p:cNvPr>
@@ -4193,9 +4193,9 @@
           <a:bodyPr/>
           <a:lstStyle/>
           <a:p>
-            <a:fld id="{8A86AB56-393C-4917-9670-5C316C4C0775}" type="datetimeFigureOut">
+            <a:fld id="{A25588AC-933F-4B05-B4F9-0387B2A9C63D}" type="datetimeFigureOut">
               <a:rPr lang="en-US" smtClean="0"/>
-              <a:t>10/3/2026</a:t>
+              <a:t>10/4/2026</a:t>
             </a:fld>
             <a:endParaRPr lang="en-US"/>
           </a:p>
@@ -4235,7 +4235,7 @@
           <a:bodyPr/>
           <a:lstStyle/>
           <a:p>
-            <a:fld id="{FC63DECE-DCAF-48B3-9E38-EA00981B3229}" type="slidenum">
+            <a:fld id="{B96B5B2C-9731-4665-8499-523F6B9BFF00}" type="slidenum">
               <a:rPr lang="en-US" smtClean="0"/>
               <a:t>‹#›</a:t>
             </a:fld>
@@ -4248,7 +4248,7 @@
           <p:cNvPr id="8" name="body">
             <a:extLst>
               <a:ext uri="{FF2B5EF4-FFF2-40B4-BE49-F238E27FC236}">
-                <a16:creationId xmlns:a16="http://schemas.microsoft.com/office/drawing/2014/main" id="{E5DFA109-194B-ECDC-EE57-AFEBC4CA75E1}"/>
+                <a16:creationId xmlns:a16="http://schemas.microsoft.com/office/drawing/2014/main" id="{95EC8158-5F2A-FCF2-ED87-0D43F04F2171}"/>
               </a:ext>
             </a:extLst>
           </p:cNvPr>
@@ -4288,7 +4288,7 @@
           <p:cNvPr id="9" name="kpi_value_1">
             <a:extLst>
               <a:ext uri="{FF2B5EF4-FFF2-40B4-BE49-F238E27FC236}">
-                <a16:creationId xmlns:a16="http://schemas.microsoft.com/office/drawing/2014/main" id="{12BF01DF-ABA9-C400-72F0-EBFC568C6BEF}"/>
+                <a16:creationId xmlns:a16="http://schemas.microsoft.com/office/drawing/2014/main" id="{F727EE42-2422-B4EB-8273-B16E845C75A5}"/>
               </a:ext>
             </a:extLst>
           </p:cNvPr>
@@ -4341,7 +4341,7 @@
           <p:cNvPr id="10" name="kpi_label_1">
             <a:extLst>
               <a:ext uri="{FF2B5EF4-FFF2-40B4-BE49-F238E27FC236}">
-                <a16:creationId xmlns:a16="http://schemas.microsoft.com/office/drawing/2014/main" id="{67AD7BBE-027D-22D7-112D-75800DC2C59D}"/>
+                <a16:creationId xmlns:a16="http://schemas.microsoft.com/office/drawing/2014/main" id="{2E5D03D1-7A75-DF44-791D-28D53D84BEAF}"/>
               </a:ext>
             </a:extLst>
           </p:cNvPr>
@@ -4389,7 +4389,7 @@
           <p:cNvPr id="11" name="kpi_value_2">
             <a:extLst>
               <a:ext uri="{FF2B5EF4-FFF2-40B4-BE49-F238E27FC236}">
-                <a16:creationId xmlns:a16="http://schemas.microsoft.com/office/drawing/2014/main" id="{D90F7904-0589-6B05-78B7-205A8D9CB2C8}"/>
+                <a16:creationId xmlns:a16="http://schemas.microsoft.com/office/drawing/2014/main" id="{800FAB4D-C016-85C1-4A80-87155F1F5160}"/>
               </a:ext>
             </a:extLst>
           </p:cNvPr>
@@ -4442,7 +4442,7 @@
           <p:cNvPr id="12" name="kpi_label_2">
             <a:extLst>
               <a:ext uri="{FF2B5EF4-FFF2-40B4-BE49-F238E27FC236}">
-                <a16:creationId xmlns:a16="http://schemas.microsoft.com/office/drawing/2014/main" id="{7402A253-90B9-0B0B-733B-302D4F465702}"/>
+                <a16:creationId xmlns:a16="http://schemas.microsoft.com/office/drawing/2014/main" id="{2C822DBA-E225-9C36-EC2E-A963538961EC}"/>
               </a:ext>
             </a:extLst>
           </p:cNvPr>
@@ -4490,7 +4490,7 @@
           <p:cNvPr id="13" name="kpi_value_3">
             <a:extLst>
               <a:ext uri="{FF2B5EF4-FFF2-40B4-BE49-F238E27FC236}">
-                <a16:creationId xmlns:a16="http://schemas.microsoft.com/office/drawing/2014/main" id="{0E136099-6EE1-5C8B-960F-970C0FC30AB7}"/>
+                <a16:creationId xmlns:a16="http://schemas.microsoft.com/office/drawing/2014/main" id="{80A36E64-12F1-471C-6AA2-8B7AEFD18B90}"/>
               </a:ext>
             </a:extLst>
           </p:cNvPr>
@@ -4543,7 +4543,7 @@
           <p:cNvPr id="14" name="kpi_label_3">
             <a:extLst>
               <a:ext uri="{FF2B5EF4-FFF2-40B4-BE49-F238E27FC236}">
-                <a16:creationId xmlns:a16="http://schemas.microsoft.com/office/drawing/2014/main" id="{4366DE89-154C-8205-3B96-68E1CADCA4F0}"/>
+                <a16:creationId xmlns:a16="http://schemas.microsoft.com/office/drawing/2014/main" id="{1FFBE346-5F5B-C2A6-7AEE-E9110BD10CB5}"/>
               </a:ext>
             </a:extLst>
           </p:cNvPr>
@@ -4591,7 +4591,7 @@
           <p:cNvPr id="15" name="kpi_value_4">
             <a:extLst>
               <a:ext uri="{FF2B5EF4-FFF2-40B4-BE49-F238E27FC236}">
-                <a16:creationId xmlns:a16="http://schemas.microsoft.com/office/drawing/2014/main" id="{7FAB2AF5-3979-E19B-E997-C657E1F6A5B0}"/>
+                <a16:creationId xmlns:a16="http://schemas.microsoft.com/office/drawing/2014/main" id="{742A2070-B9AE-8E87-A8F9-5EA62C941E31}"/>
               </a:ext>
             </a:extLst>
           </p:cNvPr>
@@ -4644,7 +4644,7 @@
           <p:cNvPr id="16" name="kpi_label_4">
             <a:extLst>
               <a:ext uri="{FF2B5EF4-FFF2-40B4-BE49-F238E27FC236}">
-                <a16:creationId xmlns:a16="http://schemas.microsoft.com/office/drawing/2014/main" id="{D7D991AB-E1B3-3DBF-01EB-43B74FE5A7A4}"/>
+                <a16:creationId xmlns:a16="http://schemas.microsoft.com/office/drawing/2014/main" id="{049BEABD-56F0-2DE5-2372-B021A46F75D6}"/>
               </a:ext>
             </a:extLst>
           </p:cNvPr>
@@ -4692,7 +4692,7 @@
           <p:cNvPr id="17" name="source">
             <a:extLst>
               <a:ext uri="{FF2B5EF4-FFF2-40B4-BE49-F238E27FC236}">
-                <a16:creationId xmlns:a16="http://schemas.microsoft.com/office/drawing/2014/main" id="{6FFF149D-FC1F-7F64-667A-CFC21FB80BBA}"/>
+                <a16:creationId xmlns:a16="http://schemas.microsoft.com/office/drawing/2014/main" id="{81F0325B-317F-17A3-A521-8A369F65B464}"/>
               </a:ext>
             </a:extLst>
           </p:cNvPr>
@@ -4747,7 +4747,7 @@
     </p:spTree>
     <p:extLst>
       <p:ext uri="{BB962C8B-B14F-4D97-AF65-F5344CB8AC3E}">
-        <p14:creationId xmlns:p14="http://schemas.microsoft.com/office/powerpoint/2010/main" val="48227563"/>
+        <p14:creationId xmlns:p14="http://schemas.microsoft.com/office/powerpoint/2010/main" val="3518231429"/>
       </p:ext>
     </p:extLst>
   </p:cSld>
@@ -4779,7 +4779,7 @@
           <p:cNvPr id="7" name="creative_background">
             <a:extLst>
               <a:ext uri="{FF2B5EF4-FFF2-40B4-BE49-F238E27FC236}">
-                <a16:creationId xmlns:a16="http://schemas.microsoft.com/office/drawing/2014/main" id="{4376A85B-A346-A801-9024-EDC22F87F3A0}"/>
+                <a16:creationId xmlns:a16="http://schemas.microsoft.com/office/drawing/2014/main" id="{4E857CFC-7675-2DD9-AEEB-2573DF55AC5A}"/>
               </a:ext>
             </a:extLst>
           </p:cNvPr>
@@ -4852,9 +4852,9 @@
           <a:bodyPr/>
           <a:lstStyle/>
           <a:p>
-            <a:fld id="{8A86AB56-393C-4917-9670-5C316C4C0775}" type="datetimeFigureOut">
+            <a:fld id="{A25588AC-933F-4B05-B4F9-0387B2A9C63D}" type="datetimeFigureOut">
               <a:rPr lang="en-US" smtClean="0"/>
-              <a:t>10/3/2026</a:t>
+              <a:t>10/4/2026</a:t>
             </a:fld>
             <a:endParaRPr lang="en-US"/>
           </a:p>
@@ -4894,7 +4894,7 @@
           <a:bodyPr/>
           <a:lstStyle/>
           <a:p>
-            <a:fld id="{FC63DECE-DCAF-48B3-9E38-EA00981B3229}" type="slidenum">
+            <a:fld id="{B96B5B2C-9731-4665-8499-523F6B9BFF00}" type="slidenum">
               <a:rPr lang="en-US" smtClean="0"/>
               <a:t>‹#›</a:t>
             </a:fld>
@@ -4907,7 +4907,7 @@
           <p:cNvPr id="8" name="item_1_title">
             <a:extLst>
               <a:ext uri="{FF2B5EF4-FFF2-40B4-BE49-F238E27FC236}">
-                <a16:creationId xmlns:a16="http://schemas.microsoft.com/office/drawing/2014/main" id="{A6DE7F83-D9A9-2C23-A4D1-E50C988D43A7}"/>
+                <a16:creationId xmlns:a16="http://schemas.microsoft.com/office/drawing/2014/main" id="{3DB03965-9B70-E889-40C0-9FCAEC06FF67}"/>
               </a:ext>
             </a:extLst>
           </p:cNvPr>
@@ -4957,7 +4957,7 @@
           <p:cNvPr id="9" name="item_1">
             <a:extLst>
               <a:ext uri="{FF2B5EF4-FFF2-40B4-BE49-F238E27FC236}">
-                <a16:creationId xmlns:a16="http://schemas.microsoft.com/office/drawing/2014/main" id="{73714A01-5DB0-0B64-D328-9AB47C343967}"/>
+                <a16:creationId xmlns:a16="http://schemas.microsoft.com/office/drawing/2014/main" id="{FE2858DE-44D1-F26B-60A7-70EA28239993}"/>
               </a:ext>
             </a:extLst>
           </p:cNvPr>
@@ -5005,7 +5005,7 @@
           <p:cNvPr id="10" name="item_2_title">
             <a:extLst>
               <a:ext uri="{FF2B5EF4-FFF2-40B4-BE49-F238E27FC236}">
-                <a16:creationId xmlns:a16="http://schemas.microsoft.com/office/drawing/2014/main" id="{3C31A2B5-52AA-03EE-C219-028DD0B4A80B}"/>
+                <a16:creationId xmlns:a16="http://schemas.microsoft.com/office/drawing/2014/main" id="{EE99079A-8651-3EBF-8F7A-8C2ADC54DBD2}"/>
               </a:ext>
             </a:extLst>
           </p:cNvPr>
@@ -5058,7 +5058,7 @@
           <p:cNvPr id="11" name="item_2">
             <a:extLst>
               <a:ext uri="{FF2B5EF4-FFF2-40B4-BE49-F238E27FC236}">
-                <a16:creationId xmlns:a16="http://schemas.microsoft.com/office/drawing/2014/main" id="{3E85E518-5BD2-665D-731A-122941B09BED}"/>
+                <a16:creationId xmlns:a16="http://schemas.microsoft.com/office/drawing/2014/main" id="{0370A7D6-FAEA-2838-05A6-2CB5B403C946}"/>
               </a:ext>
             </a:extLst>
           </p:cNvPr>
@@ -5106,7 +5106,7 @@
           <p:cNvPr id="12" name="item_3_title">
             <a:extLst>
               <a:ext uri="{FF2B5EF4-FFF2-40B4-BE49-F238E27FC236}">
-                <a16:creationId xmlns:a16="http://schemas.microsoft.com/office/drawing/2014/main" id="{401926FE-666D-2BE1-1BCC-32C381B4E2B2}"/>
+                <a16:creationId xmlns:a16="http://schemas.microsoft.com/office/drawing/2014/main" id="{2613E297-C78D-7CD7-9819-864EAA043713}"/>
               </a:ext>
             </a:extLst>
           </p:cNvPr>
@@ -5159,7 +5159,7 @@
           <p:cNvPr id="13" name="item_3">
             <a:extLst>
               <a:ext uri="{FF2B5EF4-FFF2-40B4-BE49-F238E27FC236}">
-                <a16:creationId xmlns:a16="http://schemas.microsoft.com/office/drawing/2014/main" id="{7D1776F2-7719-F41C-C241-23F2723AF85F}"/>
+                <a16:creationId xmlns:a16="http://schemas.microsoft.com/office/drawing/2014/main" id="{8522A7BF-D9B2-2450-D967-C18491136997}"/>
               </a:ext>
             </a:extLst>
           </p:cNvPr>
@@ -5207,7 +5207,7 @@
           <p:cNvPr id="14" name="item_4_title">
             <a:extLst>
               <a:ext uri="{FF2B5EF4-FFF2-40B4-BE49-F238E27FC236}">
-                <a16:creationId xmlns:a16="http://schemas.microsoft.com/office/drawing/2014/main" id="{80D3FF56-E97B-0D9B-76FF-F07DA2836384}"/>
+                <a16:creationId xmlns:a16="http://schemas.microsoft.com/office/drawing/2014/main" id="{1C04F4AE-D0E7-CE0B-07EA-7DAC91F9FC54}"/>
               </a:ext>
             </a:extLst>
           </p:cNvPr>
@@ -5260,7 +5260,7 @@
           <p:cNvPr id="15" name="item_4">
             <a:extLst>
               <a:ext uri="{FF2B5EF4-FFF2-40B4-BE49-F238E27FC236}">
-                <a16:creationId xmlns:a16="http://schemas.microsoft.com/office/drawing/2014/main" id="{F74D71D7-3356-8303-3383-E02D03EDE4E4}"/>
+                <a16:creationId xmlns:a16="http://schemas.microsoft.com/office/drawing/2014/main" id="{F619DAB4-B6C0-8797-06D0-76E30C563EDB}"/>
               </a:ext>
             </a:extLst>
           </p:cNvPr>
@@ -5308,7 +5308,7 @@
           <p:cNvPr id="16" name="source">
             <a:extLst>
               <a:ext uri="{FF2B5EF4-FFF2-40B4-BE49-F238E27FC236}">
-                <a16:creationId xmlns:a16="http://schemas.microsoft.com/office/drawing/2014/main" id="{A6EC2CC0-8F2C-DB51-0E03-1DB1F8F0DE44}"/>
+                <a16:creationId xmlns:a16="http://schemas.microsoft.com/office/drawing/2014/main" id="{8C7C2B95-C0F6-903D-4F48-923B072CB65E}"/>
               </a:ext>
             </a:extLst>
           </p:cNvPr>
@@ -5363,7 +5363,7 @@
     </p:spTree>
     <p:extLst>
       <p:ext uri="{BB962C8B-B14F-4D97-AF65-F5344CB8AC3E}">
-        <p14:creationId xmlns:p14="http://schemas.microsoft.com/office/powerpoint/2010/main" val="723017372"/>
+        <p14:creationId xmlns:p14="http://schemas.microsoft.com/office/powerpoint/2010/main" val="295051477"/>
       </p:ext>
     </p:extLst>
   </p:cSld>
@@ -5395,7 +5395,7 @@
           <p:cNvPr id="7" name="creative_background">
             <a:extLst>
               <a:ext uri="{FF2B5EF4-FFF2-40B4-BE49-F238E27FC236}">
-                <a16:creationId xmlns:a16="http://schemas.microsoft.com/office/drawing/2014/main" id="{81480C18-CCF2-F213-CE52-2F2A3E9E9E73}"/>
+                <a16:creationId xmlns:a16="http://schemas.microsoft.com/office/drawing/2014/main" id="{643AC18F-0E03-ED43-C5CB-ED4715273194}"/>
               </a:ext>
             </a:extLst>
           </p:cNvPr>
@@ -5468,9 +5468,9 @@
           <a:bodyPr/>
           <a:lstStyle/>
           <a:p>
-            <a:fld id="{8A86AB56-393C-4917-9670-5C316C4C0775}" type="datetimeFigureOut">
+            <a:fld id="{A25588AC-933F-4B05-B4F9-0387B2A9C63D}" type="datetimeFigureOut">
               <a:rPr lang="en-US" smtClean="0"/>
-              <a:t>10/3/2026</a:t>
+              <a:t>10/4/2026</a:t>
             </a:fld>
             <a:endParaRPr lang="en-US"/>
           </a:p>
@@ -5510,7 +5510,7 @@
           <a:bodyPr/>
           <a:lstStyle/>
           <a:p>
-            <a:fld id="{FC63DECE-DCAF-48B3-9E38-EA00981B3229}" type="slidenum">
+            <a:fld id="{B96B5B2C-9731-4665-8499-523F6B9BFF00}" type="slidenum">
               <a:rPr lang="en-US" smtClean="0"/>
               <a:t>‹#›</a:t>
             </a:fld>
@@ -5523,7 +5523,7 @@
           <p:cNvPr id="8" name="marker_1">
             <a:extLst>
               <a:ext uri="{FF2B5EF4-FFF2-40B4-BE49-F238E27FC236}">
-                <a16:creationId xmlns:a16="http://schemas.microsoft.com/office/drawing/2014/main" id="{EB6DB9E1-D78B-8E25-9EC6-8F6DB2F26B98}"/>
+                <a16:creationId xmlns:a16="http://schemas.microsoft.com/office/drawing/2014/main" id="{5028AEBA-44DD-FCB8-26FC-203A5269D2F1}"/>
               </a:ext>
             </a:extLst>
           </p:cNvPr>
@@ -5579,7 +5579,7 @@
           <p:cNvPr id="9" name="item_1_title">
             <a:extLst>
               <a:ext uri="{FF2B5EF4-FFF2-40B4-BE49-F238E27FC236}">
-                <a16:creationId xmlns:a16="http://schemas.microsoft.com/office/drawing/2014/main" id="{D391D954-81D1-3F55-2395-7A2BB0487DB6}"/>
+                <a16:creationId xmlns:a16="http://schemas.microsoft.com/office/drawing/2014/main" id="{CDDF9348-C438-E4C6-CFC0-D480F622333A}"/>
               </a:ext>
             </a:extLst>
           </p:cNvPr>
@@ -5632,7 +5632,7 @@
           <p:cNvPr id="10" name="item_1">
             <a:extLst>
               <a:ext uri="{FF2B5EF4-FFF2-40B4-BE49-F238E27FC236}">
-                <a16:creationId xmlns:a16="http://schemas.microsoft.com/office/drawing/2014/main" id="{E8CC23CE-B43D-353B-9229-1C5957D137F7}"/>
+                <a16:creationId xmlns:a16="http://schemas.microsoft.com/office/drawing/2014/main" id="{AED973F3-E153-423D-B562-58501CD3991A}"/>
               </a:ext>
             </a:extLst>
           </p:cNvPr>
@@ -5680,7 +5680,7 @@
           <p:cNvPr id="11" name="marker_2">
             <a:extLst>
               <a:ext uri="{FF2B5EF4-FFF2-40B4-BE49-F238E27FC236}">
-                <a16:creationId xmlns:a16="http://schemas.microsoft.com/office/drawing/2014/main" id="{C73DD8CF-2BDF-F9C2-AF93-48E1D600AE00}"/>
+                <a16:creationId xmlns:a16="http://schemas.microsoft.com/office/drawing/2014/main" id="{0AB019AC-0C8C-1EBA-B606-CF30029C8D3E}"/>
               </a:ext>
             </a:extLst>
           </p:cNvPr>
@@ -5736,7 +5736,7 @@
           <p:cNvPr id="12" name="item_2_title">
             <a:extLst>
               <a:ext uri="{FF2B5EF4-FFF2-40B4-BE49-F238E27FC236}">
-                <a16:creationId xmlns:a16="http://schemas.microsoft.com/office/drawing/2014/main" id="{AEF4F28B-5A3B-771D-E9E4-FF16D9D0F0E2}"/>
+                <a16:creationId xmlns:a16="http://schemas.microsoft.com/office/drawing/2014/main" id="{8B3765E4-EB92-BB0E-6893-0D24CEA4BD01}"/>
               </a:ext>
             </a:extLst>
           </p:cNvPr>
@@ -5789,7 +5789,7 @@
           <p:cNvPr id="13" name="item_2">
             <a:extLst>
               <a:ext uri="{FF2B5EF4-FFF2-40B4-BE49-F238E27FC236}">
-                <a16:creationId xmlns:a16="http://schemas.microsoft.com/office/drawing/2014/main" id="{101F5986-F577-CD9E-6164-4E67FDF8EF7D}"/>
+                <a16:creationId xmlns:a16="http://schemas.microsoft.com/office/drawing/2014/main" id="{430F5CAC-A607-09FF-257B-E74685E8B443}"/>
               </a:ext>
             </a:extLst>
           </p:cNvPr>
@@ -5837,7 +5837,7 @@
           <p:cNvPr id="14" name="source">
             <a:extLst>
               <a:ext uri="{FF2B5EF4-FFF2-40B4-BE49-F238E27FC236}">
-                <a16:creationId xmlns:a16="http://schemas.microsoft.com/office/drawing/2014/main" id="{4780ABE8-4AC9-2454-DE0C-90E0822909DF}"/>
+                <a16:creationId xmlns:a16="http://schemas.microsoft.com/office/drawing/2014/main" id="{6FE7D4B1-7868-0032-6E4A-888291F2E730}"/>
               </a:ext>
             </a:extLst>
           </p:cNvPr>
@@ -5892,7 +5892,7 @@
     </p:spTree>
     <p:extLst>
       <p:ext uri="{BB962C8B-B14F-4D97-AF65-F5344CB8AC3E}">
-        <p14:creationId xmlns:p14="http://schemas.microsoft.com/office/powerpoint/2010/main" val="4157894567"/>
+        <p14:creationId xmlns:p14="http://schemas.microsoft.com/office/powerpoint/2010/main" val="1541419871"/>
       </p:ext>
     </p:extLst>
   </p:cSld>
@@ -5924,7 +5924,7 @@
           <p:cNvPr id="7" name="creative_background">
             <a:extLst>
               <a:ext uri="{FF2B5EF4-FFF2-40B4-BE49-F238E27FC236}">
-                <a16:creationId xmlns:a16="http://schemas.microsoft.com/office/drawing/2014/main" id="{89BCC19C-7958-D45A-C13B-F0491E5B1C0D}"/>
+                <a16:creationId xmlns:a16="http://schemas.microsoft.com/office/drawing/2014/main" id="{5AE806A8-51F1-95E9-F22D-7F3B7B571459}"/>
               </a:ext>
             </a:extLst>
           </p:cNvPr>
@@ -5997,9 +5997,9 @@
           <a:bodyPr/>
           <a:lstStyle/>
           <a:p>
-            <a:fld id="{8A86AB56-393C-4917-9670-5C316C4C0775}" type="datetimeFigureOut">
+            <a:fld id="{A25588AC-933F-4B05-B4F9-0387B2A9C63D}" type="datetimeFigureOut">
               <a:rPr lang="en-US" smtClean="0"/>
-              <a:t>10/3/2026</a:t>
+              <a:t>10/4/2026</a:t>
             </a:fld>
             <a:endParaRPr lang="en-US"/>
           </a:p>
@@ -6039,7 +6039,7 @@
           <a:bodyPr/>
           <a:lstStyle/>
           <a:p>
-            <a:fld id="{FC63DECE-DCAF-48B3-9E38-EA00981B3229}" type="slidenum">
+            <a:fld id="{B96B5B2C-9731-4665-8499-523F6B9BFF00}" type="slidenum">
               <a:rPr lang="en-US" smtClean="0"/>
               <a:t>‹#›</a:t>
             </a:fld>
@@ -6052,7 +6052,7 @@
           <p:cNvPr id="8" name="item_1_title">
             <a:extLst>
               <a:ext uri="{FF2B5EF4-FFF2-40B4-BE49-F238E27FC236}">
-                <a16:creationId xmlns:a16="http://schemas.microsoft.com/office/drawing/2014/main" id="{089F28A4-95BB-2027-8DE4-8C372BEAB05C}"/>
+                <a16:creationId xmlns:a16="http://schemas.microsoft.com/office/drawing/2014/main" id="{4379D7CF-FBB1-9673-E5F9-C2FAE687EB93}"/>
               </a:ext>
             </a:extLst>
           </p:cNvPr>
@@ -6102,7 +6102,7 @@
           <p:cNvPr id="9" name="item_1">
             <a:extLst>
               <a:ext uri="{FF2B5EF4-FFF2-40B4-BE49-F238E27FC236}">
-                <a16:creationId xmlns:a16="http://schemas.microsoft.com/office/drawing/2014/main" id="{B619F82A-BB91-F79B-FCFD-5DDF7615EC4E}"/>
+                <a16:creationId xmlns:a16="http://schemas.microsoft.com/office/drawing/2014/main" id="{8C7A10FE-9A18-0A58-8588-0D6E017619E3}"/>
               </a:ext>
             </a:extLst>
           </p:cNvPr>
@@ -6150,7 +6150,7 @@
           <p:cNvPr id="10" name="item_2_title">
             <a:extLst>
               <a:ext uri="{FF2B5EF4-FFF2-40B4-BE49-F238E27FC236}">
-                <a16:creationId xmlns:a16="http://schemas.microsoft.com/office/drawing/2014/main" id="{1F5ECAB6-6346-4271-3DE8-733C6F2E6930}"/>
+                <a16:creationId xmlns:a16="http://schemas.microsoft.com/office/drawing/2014/main" id="{1C871631-C05F-935E-AC6E-606E5F0A46DD}"/>
               </a:ext>
             </a:extLst>
           </p:cNvPr>
@@ -6203,7 +6203,7 @@
           <p:cNvPr id="11" name="item_2">
             <a:extLst>
               <a:ext uri="{FF2B5EF4-FFF2-40B4-BE49-F238E27FC236}">
-                <a16:creationId xmlns:a16="http://schemas.microsoft.com/office/drawing/2014/main" id="{BA8C489B-47D6-ECC2-C7B5-7E8F46F97218}"/>
+                <a16:creationId xmlns:a16="http://schemas.microsoft.com/office/drawing/2014/main" id="{C8B9666B-723F-C98C-432D-47B0D453A2FA}"/>
               </a:ext>
             </a:extLst>
           </p:cNvPr>
@@ -6251,7 +6251,7 @@
           <p:cNvPr id="12" name="item_3_title">
             <a:extLst>
               <a:ext uri="{FF2B5EF4-FFF2-40B4-BE49-F238E27FC236}">
-                <a16:creationId xmlns:a16="http://schemas.microsoft.com/office/drawing/2014/main" id="{D72FC3C2-6511-8488-9C26-FE513C79B768}"/>
+                <a16:creationId xmlns:a16="http://schemas.microsoft.com/office/drawing/2014/main" id="{DCE46341-989F-4E31-CF35-0EFF5E2CB6B6}"/>
               </a:ext>
             </a:extLst>
           </p:cNvPr>
@@ -6304,7 +6304,7 @@
           <p:cNvPr id="13" name="item_3">
             <a:extLst>
               <a:ext uri="{FF2B5EF4-FFF2-40B4-BE49-F238E27FC236}">
-                <a16:creationId xmlns:a16="http://schemas.microsoft.com/office/drawing/2014/main" id="{9C241E8A-E5D8-BB83-7B58-E3754E4B17FE}"/>
+                <a16:creationId xmlns:a16="http://schemas.microsoft.com/office/drawing/2014/main" id="{EA09FA75-7357-6CAB-400A-6DB6F7CA5E68}"/>
               </a:ext>
             </a:extLst>
           </p:cNvPr>
@@ -6352,7 +6352,7 @@
           <p:cNvPr id="14" name="item_4_title">
             <a:extLst>
               <a:ext uri="{FF2B5EF4-FFF2-40B4-BE49-F238E27FC236}">
-                <a16:creationId xmlns:a16="http://schemas.microsoft.com/office/drawing/2014/main" id="{B593584A-D91A-E8BD-3B8F-F0382920ED2A}"/>
+                <a16:creationId xmlns:a16="http://schemas.microsoft.com/office/drawing/2014/main" id="{BFD445DD-A47E-6C5E-80C1-6BF1991A8F26}"/>
               </a:ext>
             </a:extLst>
           </p:cNvPr>
@@ -6405,7 +6405,7 @@
           <p:cNvPr id="15" name="item_4">
             <a:extLst>
               <a:ext uri="{FF2B5EF4-FFF2-40B4-BE49-F238E27FC236}">
-                <a16:creationId xmlns:a16="http://schemas.microsoft.com/office/drawing/2014/main" id="{C40425AF-1C50-5B7E-7904-E4A635AC3A1F}"/>
+                <a16:creationId xmlns:a16="http://schemas.microsoft.com/office/drawing/2014/main" id="{C183A0AF-19D9-DBFC-FBEB-610B0DF6659C}"/>
               </a:ext>
             </a:extLst>
           </p:cNvPr>
@@ -6453,7 +6453,7 @@
           <p:cNvPr id="16" name="source">
             <a:extLst>
               <a:ext uri="{FF2B5EF4-FFF2-40B4-BE49-F238E27FC236}">
-                <a16:creationId xmlns:a16="http://schemas.microsoft.com/office/drawing/2014/main" id="{F22FFED7-4548-73C8-E78B-8AF335EAEE42}"/>
+                <a16:creationId xmlns:a16="http://schemas.microsoft.com/office/drawing/2014/main" id="{D40DECE3-0FCA-96E6-82B3-DD134A243FC7}"/>
               </a:ext>
             </a:extLst>
           </p:cNvPr>
@@ -6508,7 +6508,7 @@
     </p:spTree>
     <p:extLst>
       <p:ext uri="{BB962C8B-B14F-4D97-AF65-F5344CB8AC3E}">
-        <p14:creationId xmlns:p14="http://schemas.microsoft.com/office/powerpoint/2010/main" val="3901711979"/>
+        <p14:creationId xmlns:p14="http://schemas.microsoft.com/office/powerpoint/2010/main" val="1310735304"/>
       </p:ext>
     </p:extLst>
   </p:cSld>
@@ -6540,7 +6540,7 @@
           <p:cNvPr id="7" name="creative_background">
             <a:extLst>
               <a:ext uri="{FF2B5EF4-FFF2-40B4-BE49-F238E27FC236}">
-                <a16:creationId xmlns:a16="http://schemas.microsoft.com/office/drawing/2014/main" id="{5E495139-7A4C-F88E-10F4-8C0A8FD2B626}"/>
+                <a16:creationId xmlns:a16="http://schemas.microsoft.com/office/drawing/2014/main" id="{35755725-3D3B-3D08-5AF3-2ACE928432AB}"/>
               </a:ext>
             </a:extLst>
           </p:cNvPr>
@@ -6613,9 +6613,9 @@
           <a:bodyPr/>
           <a:lstStyle/>
           <a:p>
-            <a:fld id="{8A86AB56-393C-4917-9670-5C316C4C0775}" type="datetimeFigureOut">
+            <a:fld id="{A25588AC-933F-4B05-B4F9-0387B2A9C63D}" type="datetimeFigureOut">
               <a:rPr lang="en-US" smtClean="0"/>
-              <a:t>10/3/2026</a:t>
+              <a:t>10/4/2026</a:t>
             </a:fld>
             <a:endParaRPr lang="en-US"/>
           </a:p>
@@ -6655,7 +6655,7 @@
           <a:bodyPr/>
           <a:lstStyle/>
           <a:p>
-            <a:fld id="{FC63DECE-DCAF-48B3-9E38-EA00981B3229}" type="slidenum">
+            <a:fld id="{B96B5B2C-9731-4665-8499-523F6B9BFF00}" type="slidenum">
               <a:rPr lang="en-US" smtClean="0"/>
               <a:t>‹#›</a:t>
             </a:fld>
@@ -6668,7 +6668,7 @@
           <p:cNvPr id="8" name="item_1_title">
             <a:extLst>
               <a:ext uri="{FF2B5EF4-FFF2-40B4-BE49-F238E27FC236}">
-                <a16:creationId xmlns:a16="http://schemas.microsoft.com/office/drawing/2014/main" id="{37BE7071-02A9-C238-7941-98BA1B4EDDE5}"/>
+                <a16:creationId xmlns:a16="http://schemas.microsoft.com/office/drawing/2014/main" id="{3E3C9C10-DE8C-4D87-AA62-13CD39A9DDBC}"/>
               </a:ext>
             </a:extLst>
           </p:cNvPr>
@@ -6718,7 +6718,7 @@
           <p:cNvPr id="9" name="item_1">
             <a:extLst>
               <a:ext uri="{FF2B5EF4-FFF2-40B4-BE49-F238E27FC236}">
-                <a16:creationId xmlns:a16="http://schemas.microsoft.com/office/drawing/2014/main" id="{9D51CD31-A48A-7EEC-2DB3-C62A499459B2}"/>
+                <a16:creationId xmlns:a16="http://schemas.microsoft.com/office/drawing/2014/main" id="{42FCAA36-B794-8DA2-FA6A-573C36B1DEAC}"/>
               </a:ext>
             </a:extLst>
           </p:cNvPr>
@@ -6766,7 +6766,7 @@
           <p:cNvPr id="10" name="item_2_title">
             <a:extLst>
               <a:ext uri="{FF2B5EF4-FFF2-40B4-BE49-F238E27FC236}">
-                <a16:creationId xmlns:a16="http://schemas.microsoft.com/office/drawing/2014/main" id="{47FFE3D8-3B7F-765F-4BC2-66F90EA8A911}"/>
+                <a16:creationId xmlns:a16="http://schemas.microsoft.com/office/drawing/2014/main" id="{752024DF-D382-0298-99DB-E15651B1F805}"/>
               </a:ext>
             </a:extLst>
           </p:cNvPr>
@@ -6819,7 +6819,7 @@
           <p:cNvPr id="11" name="item_2">
             <a:extLst>
               <a:ext uri="{FF2B5EF4-FFF2-40B4-BE49-F238E27FC236}">
-                <a16:creationId xmlns:a16="http://schemas.microsoft.com/office/drawing/2014/main" id="{A0A21ACA-18AC-B462-FB2D-DEE8CB33F919}"/>
+                <a16:creationId xmlns:a16="http://schemas.microsoft.com/office/drawing/2014/main" id="{452160B6-D30E-4A7A-69BC-07EB43C6E6FA}"/>
               </a:ext>
             </a:extLst>
           </p:cNvPr>
@@ -6867,7 +6867,7 @@
           <p:cNvPr id="12" name="item_3_title">
             <a:extLst>
               <a:ext uri="{FF2B5EF4-FFF2-40B4-BE49-F238E27FC236}">
-                <a16:creationId xmlns:a16="http://schemas.microsoft.com/office/drawing/2014/main" id="{838C86F2-64A9-4382-638B-A674128D9D66}"/>
+                <a16:creationId xmlns:a16="http://schemas.microsoft.com/office/drawing/2014/main" id="{0E433B18-003B-B4D6-1ECA-A7B76CE19B52}"/>
               </a:ext>
             </a:extLst>
           </p:cNvPr>
@@ -6920,7 +6920,7 @@
           <p:cNvPr id="13" name="item_3">
             <a:extLst>
               <a:ext uri="{FF2B5EF4-FFF2-40B4-BE49-F238E27FC236}">
-                <a16:creationId xmlns:a16="http://schemas.microsoft.com/office/drawing/2014/main" id="{5C4863AC-F968-7904-BCF0-F0488516D9F5}"/>
+                <a16:creationId xmlns:a16="http://schemas.microsoft.com/office/drawing/2014/main" id="{8D5013C9-8B0F-6D99-D597-599BA8521A55}"/>
               </a:ext>
             </a:extLst>
           </p:cNvPr>
@@ -6968,7 +6968,7 @@
           <p:cNvPr id="14" name="item_4_title">
             <a:extLst>
               <a:ext uri="{FF2B5EF4-FFF2-40B4-BE49-F238E27FC236}">
-                <a16:creationId xmlns:a16="http://schemas.microsoft.com/office/drawing/2014/main" id="{6E2CBB50-749C-3988-A281-493C7C8FA6C2}"/>
+                <a16:creationId xmlns:a16="http://schemas.microsoft.com/office/drawing/2014/main" id="{31787609-9AE8-E5BC-0630-17D7CB30B8FF}"/>
               </a:ext>
             </a:extLst>
           </p:cNvPr>
@@ -7021,7 +7021,7 @@
           <p:cNvPr id="15" name="item_4">
             <a:extLst>
               <a:ext uri="{FF2B5EF4-FFF2-40B4-BE49-F238E27FC236}">
-                <a16:creationId xmlns:a16="http://schemas.microsoft.com/office/drawing/2014/main" id="{7FA5278D-E5F2-3C40-8A19-A8EB99018312}"/>
+                <a16:creationId xmlns:a16="http://schemas.microsoft.com/office/drawing/2014/main" id="{8CE7F5AD-34AC-6E53-A5A5-E60215BD4B1E}"/>
               </a:ext>
             </a:extLst>
           </p:cNvPr>
@@ -7069,7 +7069,7 @@
           <p:cNvPr id="16" name="source">
             <a:extLst>
               <a:ext uri="{FF2B5EF4-FFF2-40B4-BE49-F238E27FC236}">
-                <a16:creationId xmlns:a16="http://schemas.microsoft.com/office/drawing/2014/main" id="{22935531-D851-A72C-37A4-2B94B0406C75}"/>
+                <a16:creationId xmlns:a16="http://schemas.microsoft.com/office/drawing/2014/main" id="{E1D780AD-2AC2-8A93-0106-E8BB690AC8F0}"/>
               </a:ext>
             </a:extLst>
           </p:cNvPr>
@@ -7124,7 +7124,7 @@
     </p:spTree>
     <p:extLst>
       <p:ext uri="{BB962C8B-B14F-4D97-AF65-F5344CB8AC3E}">
-        <p14:creationId xmlns:p14="http://schemas.microsoft.com/office/powerpoint/2010/main" val="3009945822"/>
+        <p14:creationId xmlns:p14="http://schemas.microsoft.com/office/powerpoint/2010/main" val="2635820955"/>
       </p:ext>
     </p:extLst>
   </p:cSld>
@@ -7156,7 +7156,7 @@
           <p:cNvPr id="7" name="creative_background">
             <a:extLst>
               <a:ext uri="{FF2B5EF4-FFF2-40B4-BE49-F238E27FC236}">
-                <a16:creationId xmlns:a16="http://schemas.microsoft.com/office/drawing/2014/main" id="{8FC34819-A488-51BB-E2A6-A26B833874BF}"/>
+                <a16:creationId xmlns:a16="http://schemas.microsoft.com/office/drawing/2014/main" id="{9A588185-7F96-2671-65CC-1C4646D6926E}"/>
               </a:ext>
             </a:extLst>
           </p:cNvPr>
@@ -7229,9 +7229,9 @@
           <a:bodyPr/>
           <a:lstStyle/>
           <a:p>
-            <a:fld id="{8A86AB56-393C-4917-9670-5C316C4C0775}" type="datetimeFigureOut">
+            <a:fld id="{A25588AC-933F-4B05-B4F9-0387B2A9C63D}" type="datetimeFigureOut">
               <a:rPr lang="en-US" smtClean="0"/>
-              <a:t>10/3/2026</a:t>
+              <a:t>10/4/2026</a:t>
             </a:fld>
             <a:endParaRPr lang="en-US"/>
           </a:p>
@@ -7271,7 +7271,7 @@
           <a:bodyPr/>
           <a:lstStyle/>
           <a:p>
-            <a:fld id="{FC63DECE-DCAF-48B3-9E38-EA00981B3229}" type="slidenum">
+            <a:fld id="{B96B5B2C-9731-4665-8499-523F6B9BFF00}" type="slidenum">
               <a:rPr lang="en-US" smtClean="0"/>
               <a:t>‹#›</a:t>
             </a:fld>
@@ -7284,7 +7284,7 @@
           <p:cNvPr id="8" name="kpi_value_1">
             <a:extLst>
               <a:ext uri="{FF2B5EF4-FFF2-40B4-BE49-F238E27FC236}">
-                <a16:creationId xmlns:a16="http://schemas.microsoft.com/office/drawing/2014/main" id="{BA2177DB-0F92-C176-D641-374863CFC713}"/>
+                <a16:creationId xmlns:a16="http://schemas.microsoft.com/office/drawing/2014/main" id="{1E02C134-0082-02FA-A494-981A584CAEB8}"/>
               </a:ext>
             </a:extLst>
           </p:cNvPr>
@@ -7334,7 +7334,7 @@
           <p:cNvPr id="9" name="kpi_label_1">
             <a:extLst>
               <a:ext uri="{FF2B5EF4-FFF2-40B4-BE49-F238E27FC236}">
-                <a16:creationId xmlns:a16="http://schemas.microsoft.com/office/drawing/2014/main" id="{05DDA556-81C9-8BE4-A8D2-0135EFC76CE9}"/>
+                <a16:creationId xmlns:a16="http://schemas.microsoft.com/office/drawing/2014/main" id="{D37FD24C-39DE-1773-EC32-35795B03FD8C}"/>
               </a:ext>
             </a:extLst>
           </p:cNvPr>
@@ -7382,7 +7382,7 @@
           <p:cNvPr id="10" name="quote">
             <a:extLst>
               <a:ext uri="{FF2B5EF4-FFF2-40B4-BE49-F238E27FC236}">
-                <a16:creationId xmlns:a16="http://schemas.microsoft.com/office/drawing/2014/main" id="{B8416755-136D-13B1-B1CD-5BFC8902034D}"/>
+                <a16:creationId xmlns:a16="http://schemas.microsoft.com/office/drawing/2014/main" id="{72C31E68-85FD-3D9E-4676-37B5FEA0451C}"/>
               </a:ext>
             </a:extLst>
           </p:cNvPr>
@@ -7432,7 +7432,7 @@
           <p:cNvPr id="11" name="attribution">
             <a:extLst>
               <a:ext uri="{FF2B5EF4-FFF2-40B4-BE49-F238E27FC236}">
-                <a16:creationId xmlns:a16="http://schemas.microsoft.com/office/drawing/2014/main" id="{08D80EE8-F9FB-CD4C-FCAF-7A4EB40652EB}"/>
+                <a16:creationId xmlns:a16="http://schemas.microsoft.com/office/drawing/2014/main" id="{9C24080D-0B8D-815E-1AF9-930CCF4B672D}"/>
               </a:ext>
             </a:extLst>
           </p:cNvPr>
@@ -7480,7 +7480,7 @@
           <p:cNvPr id="12" name="item_1_title">
             <a:extLst>
               <a:ext uri="{FF2B5EF4-FFF2-40B4-BE49-F238E27FC236}">
-                <a16:creationId xmlns:a16="http://schemas.microsoft.com/office/drawing/2014/main" id="{8E7F8B2C-6CD8-AD61-DAD9-983FBB295D82}"/>
+                <a16:creationId xmlns:a16="http://schemas.microsoft.com/office/drawing/2014/main" id="{14A86234-B7C0-E008-22BF-F24AA9059ECD}"/>
               </a:ext>
             </a:extLst>
           </p:cNvPr>
@@ -7533,7 +7533,7 @@
           <p:cNvPr id="13" name="item_1">
             <a:extLst>
               <a:ext uri="{FF2B5EF4-FFF2-40B4-BE49-F238E27FC236}">
-                <a16:creationId xmlns:a16="http://schemas.microsoft.com/office/drawing/2014/main" id="{F357A9F1-903B-3C11-F443-FE3DEF6D8DCA}"/>
+                <a16:creationId xmlns:a16="http://schemas.microsoft.com/office/drawing/2014/main" id="{C9B1BABD-5041-FD34-6C36-72F8D73B5B45}"/>
               </a:ext>
             </a:extLst>
           </p:cNvPr>
@@ -7581,7 +7581,7 @@
           <p:cNvPr id="14" name="source">
             <a:extLst>
               <a:ext uri="{FF2B5EF4-FFF2-40B4-BE49-F238E27FC236}">
-                <a16:creationId xmlns:a16="http://schemas.microsoft.com/office/drawing/2014/main" id="{5648937C-B8FD-EEDD-CBD0-4BF2E23421EB}"/>
+                <a16:creationId xmlns:a16="http://schemas.microsoft.com/office/drawing/2014/main" id="{7E518263-1410-962C-F5B3-34D2C1BEEA4C}"/>
               </a:ext>
             </a:extLst>
           </p:cNvPr>
@@ -7636,7 +7636,7 @@
     </p:spTree>
     <p:extLst>
       <p:ext uri="{BB962C8B-B14F-4D97-AF65-F5344CB8AC3E}">
-        <p14:creationId xmlns:p14="http://schemas.microsoft.com/office/powerpoint/2010/main" val="3837746254"/>
+        <p14:creationId xmlns:p14="http://schemas.microsoft.com/office/powerpoint/2010/main" val="3565938136"/>
       </p:ext>
     </p:extLst>
   </p:cSld>
@@ -7668,7 +7668,7 @@
           <p:cNvPr id="7" name="creative_background">
             <a:extLst>
               <a:ext uri="{FF2B5EF4-FFF2-40B4-BE49-F238E27FC236}">
-                <a16:creationId xmlns:a16="http://schemas.microsoft.com/office/drawing/2014/main" id="{0E416D25-ADA5-42DF-0F87-BADCDA2754F3}"/>
+                <a16:creationId xmlns:a16="http://schemas.microsoft.com/office/drawing/2014/main" id="{E6C37337-FD0F-9134-5BB9-6550C9B9FF83}"/>
               </a:ext>
             </a:extLst>
           </p:cNvPr>
@@ -7741,9 +7741,9 @@
           <a:bodyPr/>
           <a:lstStyle/>
           <a:p>
-            <a:fld id="{8A86AB56-393C-4917-9670-5C316C4C0775}" type="datetimeFigureOut">
+            <a:fld id="{A25588AC-933F-4B05-B4F9-0387B2A9C63D}" type="datetimeFigureOut">
               <a:rPr lang="en-US" smtClean="0"/>
-              <a:t>10/3/2026</a:t>
+              <a:t>10/4/2026</a:t>
             </a:fld>
             <a:endParaRPr lang="en-US"/>
           </a:p>
@@ -7783,7 +7783,7 @@
           <a:bodyPr/>
           <a:lstStyle/>
           <a:p>
-            <a:fld id="{FC63DECE-DCAF-48B3-9E38-EA00981B3229}" type="slidenum">
+            <a:fld id="{B96B5B2C-9731-4665-8499-523F6B9BFF00}" type="slidenum">
               <a:rPr lang="en-US" smtClean="0"/>
               <a:t>‹#›</a:t>
             </a:fld>
@@ -7796,7 +7796,7 @@
           <p:cNvPr id="8" name="item_1_title">
             <a:extLst>
               <a:ext uri="{FF2B5EF4-FFF2-40B4-BE49-F238E27FC236}">
-                <a16:creationId xmlns:a16="http://schemas.microsoft.com/office/drawing/2014/main" id="{1BA03539-E8CA-B3AB-C073-CFA50ED0C519}"/>
+                <a16:creationId xmlns:a16="http://schemas.microsoft.com/office/drawing/2014/main" id="{53028154-B908-5049-50D5-F6BC43282752}"/>
               </a:ext>
             </a:extLst>
           </p:cNvPr>
@@ -7846,7 +7846,7 @@
           <p:cNvPr id="9" name="item_1">
             <a:extLst>
               <a:ext uri="{FF2B5EF4-FFF2-40B4-BE49-F238E27FC236}">
-                <a16:creationId xmlns:a16="http://schemas.microsoft.com/office/drawing/2014/main" id="{F7EE72DE-0A66-6931-4D1D-82268229FADB}"/>
+                <a16:creationId xmlns:a16="http://schemas.microsoft.com/office/drawing/2014/main" id="{76AB6133-0735-91F9-1426-AA3B96F6EA14}"/>
               </a:ext>
             </a:extLst>
           </p:cNvPr>
@@ -7894,7 +7894,7 @@
           <p:cNvPr id="10" name="item_2_title">
             <a:extLst>
               <a:ext uri="{FF2B5EF4-FFF2-40B4-BE49-F238E27FC236}">
-                <a16:creationId xmlns:a16="http://schemas.microsoft.com/office/drawing/2014/main" id="{33CB3ED0-43D1-8DA9-CFB7-3EE089939233}"/>
+                <a16:creationId xmlns:a16="http://schemas.microsoft.com/office/drawing/2014/main" id="{6748C5AA-3610-2A31-2C22-DF54435558CB}"/>
               </a:ext>
             </a:extLst>
           </p:cNvPr>
@@ -7947,7 +7947,7 @@
           <p:cNvPr id="11" name="item_2">
             <a:extLst>
               <a:ext uri="{FF2B5EF4-FFF2-40B4-BE49-F238E27FC236}">
-                <a16:creationId xmlns:a16="http://schemas.microsoft.com/office/drawing/2014/main" id="{093E7A86-7145-17C3-4CBD-9C278B4C2FF9}"/>
+                <a16:creationId xmlns:a16="http://schemas.microsoft.com/office/drawing/2014/main" id="{82C03F15-F103-F362-C296-40E274564CEA}"/>
               </a:ext>
             </a:extLst>
           </p:cNvPr>
@@ -7995,7 +7995,7 @@
           <p:cNvPr id="12" name="item_3_title">
             <a:extLst>
               <a:ext uri="{FF2B5EF4-FFF2-40B4-BE49-F238E27FC236}">
-                <a16:creationId xmlns:a16="http://schemas.microsoft.com/office/drawing/2014/main" id="{E17FC46C-484D-BD0E-82E1-AAFF9BEE1418}"/>
+                <a16:creationId xmlns:a16="http://schemas.microsoft.com/office/drawing/2014/main" id="{C72A2CE0-3302-7446-FBB6-5DFC25A15833}"/>
               </a:ext>
             </a:extLst>
           </p:cNvPr>
@@ -8048,7 +8048,7 @@
           <p:cNvPr id="13" name="item_3">
             <a:extLst>
               <a:ext uri="{FF2B5EF4-FFF2-40B4-BE49-F238E27FC236}">
-                <a16:creationId xmlns:a16="http://schemas.microsoft.com/office/drawing/2014/main" id="{44929D53-9B1F-4176-30D8-99535AB77009}"/>
+                <a16:creationId xmlns:a16="http://schemas.microsoft.com/office/drawing/2014/main" id="{A1422C96-BECF-BC90-08C2-BF179E08B301}"/>
               </a:ext>
             </a:extLst>
           </p:cNvPr>
@@ -8096,7 +8096,7 @@
           <p:cNvPr id="14" name="source">
             <a:extLst>
               <a:ext uri="{FF2B5EF4-FFF2-40B4-BE49-F238E27FC236}">
-                <a16:creationId xmlns:a16="http://schemas.microsoft.com/office/drawing/2014/main" id="{4D06E50A-D579-C971-5DE4-A3772BBA7C1B}"/>
+                <a16:creationId xmlns:a16="http://schemas.microsoft.com/office/drawing/2014/main" id="{23F7137C-CDAC-A418-B851-B2B6F3D39247}"/>
               </a:ext>
             </a:extLst>
           </p:cNvPr>
@@ -8151,7 +8151,7 @@
     </p:spTree>
     <p:extLst>
       <p:ext uri="{BB962C8B-B14F-4D97-AF65-F5344CB8AC3E}">
-        <p14:creationId xmlns:p14="http://schemas.microsoft.com/office/powerpoint/2010/main" val="3659167453"/>
+        <p14:creationId xmlns:p14="http://schemas.microsoft.com/office/powerpoint/2010/main" val="3767666549"/>
       </p:ext>
     </p:extLst>
   </p:cSld>
@@ -8183,7 +8183,7 @@
           <p:cNvPr id="7" name="creative_background">
             <a:extLst>
               <a:ext uri="{FF2B5EF4-FFF2-40B4-BE49-F238E27FC236}">
-                <a16:creationId xmlns:a16="http://schemas.microsoft.com/office/drawing/2014/main" id="{42C9B0B8-47D5-02E4-E8AC-AB247755E7D8}"/>
+                <a16:creationId xmlns:a16="http://schemas.microsoft.com/office/drawing/2014/main" id="{4D29D7A5-5C7F-31BF-768C-B78F95439FE6}"/>
               </a:ext>
             </a:extLst>
           </p:cNvPr>
@@ -8256,9 +8256,9 @@
           <a:bodyPr/>
           <a:lstStyle/>
           <a:p>
-            <a:fld id="{8A86AB56-393C-4917-9670-5C316C4C0775}" type="datetimeFigureOut">
+            <a:fld id="{A25588AC-933F-4B05-B4F9-0387B2A9C63D}" type="datetimeFigureOut">
               <a:rPr lang="en-US" smtClean="0"/>
-              <a:t>10/3/2026</a:t>
+              <a:t>10/4/2026</a:t>
             </a:fld>
             <a:endParaRPr lang="en-US"/>
           </a:p>
@@ -8298,7 +8298,7 @@
           <a:bodyPr/>
           <a:lstStyle/>
           <a:p>
-            <a:fld id="{FC63DECE-DCAF-48B3-9E38-EA00981B3229}" type="slidenum">
+            <a:fld id="{B96B5B2C-9731-4665-8499-523F6B9BFF00}" type="slidenum">
               <a:rPr lang="en-US" smtClean="0"/>
               <a:t>‹#›</a:t>
             </a:fld>
@@ -8311,7 +8311,7 @@
           <p:cNvPr id="8" name="marker_1">
             <a:extLst>
               <a:ext uri="{FF2B5EF4-FFF2-40B4-BE49-F238E27FC236}">
-                <a16:creationId xmlns:a16="http://schemas.microsoft.com/office/drawing/2014/main" id="{AC282F9C-0535-6059-3CB4-9EBED4CD888C}"/>
+                <a16:creationId xmlns:a16="http://schemas.microsoft.com/office/drawing/2014/main" id="{A3A4DBC0-1E11-2FF3-4654-080CF76C44ED}"/>
               </a:ext>
             </a:extLst>
           </p:cNvPr>
@@ -8367,7 +8367,7 @@
           <p:cNvPr id="9" name="item_1_title">
             <a:extLst>
               <a:ext uri="{FF2B5EF4-FFF2-40B4-BE49-F238E27FC236}">
-                <a16:creationId xmlns:a16="http://schemas.microsoft.com/office/drawing/2014/main" id="{90CD9F54-B1A2-2D60-BA33-1025EE6E503D}"/>
+                <a16:creationId xmlns:a16="http://schemas.microsoft.com/office/drawing/2014/main" id="{1C54C324-747B-760C-CF57-B79BDB6F518D}"/>
               </a:ext>
             </a:extLst>
           </p:cNvPr>
@@ -8420,7 +8420,7 @@
           <p:cNvPr id="10" name="item_1">
             <a:extLst>
               <a:ext uri="{FF2B5EF4-FFF2-40B4-BE49-F238E27FC236}">
-                <a16:creationId xmlns:a16="http://schemas.microsoft.com/office/drawing/2014/main" id="{754E7F1F-01C6-4D91-FDA9-FB9BB0E5A763}"/>
+                <a16:creationId xmlns:a16="http://schemas.microsoft.com/office/drawing/2014/main" id="{7E879324-6973-E949-867E-A348A5C731E8}"/>
               </a:ext>
             </a:extLst>
           </p:cNvPr>
@@ -8468,7 +8468,7 @@
           <p:cNvPr id="11" name="marker_2">
             <a:extLst>
               <a:ext uri="{FF2B5EF4-FFF2-40B4-BE49-F238E27FC236}">
-                <a16:creationId xmlns:a16="http://schemas.microsoft.com/office/drawing/2014/main" id="{94E909DB-D0EC-DE97-6BF5-F35D0B60643E}"/>
+                <a16:creationId xmlns:a16="http://schemas.microsoft.com/office/drawing/2014/main" id="{BA379EA6-ABB1-24EB-2D39-A6AD3C1CB9C4}"/>
               </a:ext>
             </a:extLst>
           </p:cNvPr>
@@ -8524,7 +8524,7 @@
           <p:cNvPr id="12" name="item_2_title">
             <a:extLst>
               <a:ext uri="{FF2B5EF4-FFF2-40B4-BE49-F238E27FC236}">
-                <a16:creationId xmlns:a16="http://schemas.microsoft.com/office/drawing/2014/main" id="{BE60DFC3-A94D-6E2A-D909-13706B1E52FE}"/>
+                <a16:creationId xmlns:a16="http://schemas.microsoft.com/office/drawing/2014/main" id="{ECDB09AF-B61A-E037-0617-D06C854166A7}"/>
               </a:ext>
             </a:extLst>
           </p:cNvPr>
@@ -8577,7 +8577,7 @@
           <p:cNvPr id="13" name="item_2">
             <a:extLst>
               <a:ext uri="{FF2B5EF4-FFF2-40B4-BE49-F238E27FC236}">
-                <a16:creationId xmlns:a16="http://schemas.microsoft.com/office/drawing/2014/main" id="{AA6CF550-2C97-EE47-10A8-0466F946DDE1}"/>
+                <a16:creationId xmlns:a16="http://schemas.microsoft.com/office/drawing/2014/main" id="{BA5E69EE-4E17-46E2-1FD3-AD7D571F17D2}"/>
               </a:ext>
             </a:extLst>
           </p:cNvPr>
@@ -8625,7 +8625,7 @@
           <p:cNvPr id="14" name="source">
             <a:extLst>
               <a:ext uri="{FF2B5EF4-FFF2-40B4-BE49-F238E27FC236}">
-                <a16:creationId xmlns:a16="http://schemas.microsoft.com/office/drawing/2014/main" id="{9DFF912A-615E-C786-06B8-D1DD283C8D6E}"/>
+                <a16:creationId xmlns:a16="http://schemas.microsoft.com/office/drawing/2014/main" id="{D839DE4B-3EA8-43F5-0CD0-2F7819FE2243}"/>
               </a:ext>
             </a:extLst>
           </p:cNvPr>
@@ -8680,7 +8680,7 @@
     </p:spTree>
     <p:extLst>
       <p:ext uri="{BB962C8B-B14F-4D97-AF65-F5344CB8AC3E}">
-        <p14:creationId xmlns:p14="http://schemas.microsoft.com/office/powerpoint/2010/main" val="1977879462"/>
+        <p14:creationId xmlns:p14="http://schemas.microsoft.com/office/powerpoint/2010/main" val="3003878100"/>
       </p:ext>
     </p:extLst>
   </p:cSld>
@@ -8712,7 +8712,7 @@
           <p:cNvPr id="7" name="creative_background">
             <a:extLst>
               <a:ext uri="{FF2B5EF4-FFF2-40B4-BE49-F238E27FC236}">
-                <a16:creationId xmlns:a16="http://schemas.microsoft.com/office/drawing/2014/main" id="{144E6BF6-FCD4-882F-8DEE-7FA3F6F6B06F}"/>
+                <a16:creationId xmlns:a16="http://schemas.microsoft.com/office/drawing/2014/main" id="{878F50D9-3635-B61B-3903-68281E4E8C07}"/>
               </a:ext>
             </a:extLst>
           </p:cNvPr>
@@ -8785,9 +8785,9 @@
           <a:bodyPr/>
           <a:lstStyle/>
           <a:p>
-            <a:fld id="{8A86AB56-393C-4917-9670-5C316C4C0775}" type="datetimeFigureOut">
+            <a:fld id="{A25588AC-933F-4B05-B4F9-0387B2A9C63D}" type="datetimeFigureOut">
               <a:rPr lang="en-US" smtClean="0"/>
-              <a:t>10/3/2026</a:t>
+              <a:t>10/4/2026</a:t>
             </a:fld>
             <a:endParaRPr lang="en-US"/>
           </a:p>
@@ -8827,7 +8827,7 @@
           <a:bodyPr/>
           <a:lstStyle/>
           <a:p>
-            <a:fld id="{FC63DECE-DCAF-48B3-9E38-EA00981B3229}" type="slidenum">
+            <a:fld id="{B96B5B2C-9731-4665-8499-523F6B9BFF00}" type="slidenum">
               <a:rPr lang="en-US" smtClean="0"/>
               <a:t>‹#›</a:t>
             </a:fld>
@@ -8840,7 +8840,7 @@
           <p:cNvPr id="8" name="kpi_value_1">
             <a:extLst>
               <a:ext uri="{FF2B5EF4-FFF2-40B4-BE49-F238E27FC236}">
-                <a16:creationId xmlns:a16="http://schemas.microsoft.com/office/drawing/2014/main" id="{816C94F2-F778-1031-6A6F-CBDA1FC4B347}"/>
+                <a16:creationId xmlns:a16="http://schemas.microsoft.com/office/drawing/2014/main" id="{DA072DD3-A5BC-22C4-83D7-C2DD28E980A6}"/>
               </a:ext>
             </a:extLst>
           </p:cNvPr>
@@ -8890,7 +8890,7 @@
           <p:cNvPr id="9" name="kpi_label_1">
             <a:extLst>
               <a:ext uri="{FF2B5EF4-FFF2-40B4-BE49-F238E27FC236}">
-                <a16:creationId xmlns:a16="http://schemas.microsoft.com/office/drawing/2014/main" id="{3F63A862-ED87-DCCF-0364-4B8BBEAAF0B0}"/>
+                <a16:creationId xmlns:a16="http://schemas.microsoft.com/office/drawing/2014/main" id="{FD588C3A-0D3D-F423-EA95-21F4E4385355}"/>
               </a:ext>
             </a:extLst>
           </p:cNvPr>
@@ -8938,7 +8938,7 @@
           <p:cNvPr id="10" name="quote">
             <a:extLst>
               <a:ext uri="{FF2B5EF4-FFF2-40B4-BE49-F238E27FC236}">
-                <a16:creationId xmlns:a16="http://schemas.microsoft.com/office/drawing/2014/main" id="{D3EA7EEB-7753-9D74-407D-E5F579A914BE}"/>
+                <a16:creationId xmlns:a16="http://schemas.microsoft.com/office/drawing/2014/main" id="{98830D99-F095-FC02-EB6F-CDBC22505CEE}"/>
               </a:ext>
             </a:extLst>
           </p:cNvPr>
@@ -8988,7 +8988,7 @@
           <p:cNvPr id="11" name="attribution">
             <a:extLst>
               <a:ext uri="{FF2B5EF4-FFF2-40B4-BE49-F238E27FC236}">
-                <a16:creationId xmlns:a16="http://schemas.microsoft.com/office/drawing/2014/main" id="{24F8F0A0-EBEB-F1E5-DEE4-48C4B6DB2AE2}"/>
+                <a16:creationId xmlns:a16="http://schemas.microsoft.com/office/drawing/2014/main" id="{A6853379-7D91-C06D-B032-FA2DECD62AF7}"/>
               </a:ext>
             </a:extLst>
           </p:cNvPr>
@@ -9036,7 +9036,7 @@
           <p:cNvPr id="12" name="item_1_title">
             <a:extLst>
               <a:ext uri="{FF2B5EF4-FFF2-40B4-BE49-F238E27FC236}">
-                <a16:creationId xmlns:a16="http://schemas.microsoft.com/office/drawing/2014/main" id="{C4595708-FEC4-D122-2EA6-EB41A6734926}"/>
+                <a16:creationId xmlns:a16="http://schemas.microsoft.com/office/drawing/2014/main" id="{B3F4D4A5-63D1-0564-DBF0-990BFF12C8C8}"/>
               </a:ext>
             </a:extLst>
           </p:cNvPr>
@@ -9089,7 +9089,7 @@
           <p:cNvPr id="13" name="item_1">
             <a:extLst>
               <a:ext uri="{FF2B5EF4-FFF2-40B4-BE49-F238E27FC236}">
-                <a16:creationId xmlns:a16="http://schemas.microsoft.com/office/drawing/2014/main" id="{024F09E4-7D8E-5E8B-1B2B-93F6A6513E60}"/>
+                <a16:creationId xmlns:a16="http://schemas.microsoft.com/office/drawing/2014/main" id="{E35E29E4-0BDA-207F-6A44-362A53055F4F}"/>
               </a:ext>
             </a:extLst>
           </p:cNvPr>
@@ -9137,7 +9137,7 @@
           <p:cNvPr id="14" name="source">
             <a:extLst>
               <a:ext uri="{FF2B5EF4-FFF2-40B4-BE49-F238E27FC236}">
-                <a16:creationId xmlns:a16="http://schemas.microsoft.com/office/drawing/2014/main" id="{B054F9F1-B510-64C4-15C1-F875C881C765}"/>
+                <a16:creationId xmlns:a16="http://schemas.microsoft.com/office/drawing/2014/main" id="{C9DB89A0-5960-5463-B83E-351B677402F8}"/>
               </a:ext>
             </a:extLst>
           </p:cNvPr>
@@ -9192,7 +9192,7 @@
     </p:spTree>
     <p:extLst>
       <p:ext uri="{BB962C8B-B14F-4D97-AF65-F5344CB8AC3E}">
-        <p14:creationId xmlns:p14="http://schemas.microsoft.com/office/powerpoint/2010/main" val="449426727"/>
+        <p14:creationId xmlns:p14="http://schemas.microsoft.com/office/powerpoint/2010/main" val="3697925355"/>
       </p:ext>
     </p:extLst>
   </p:cSld>
@@ -9224,7 +9224,7 @@
           <p:cNvPr id="7" name="creative_background">
             <a:extLst>
               <a:ext uri="{FF2B5EF4-FFF2-40B4-BE49-F238E27FC236}">
-                <a16:creationId xmlns:a16="http://schemas.microsoft.com/office/drawing/2014/main" id="{B63BAEE4-D5B2-AE8E-2091-DD5D51609A52}"/>
+                <a16:creationId xmlns:a16="http://schemas.microsoft.com/office/drawing/2014/main" id="{D01CC1CD-387D-ADEB-8D8A-C2004AEC2896}"/>
               </a:ext>
             </a:extLst>
           </p:cNvPr>
@@ -9297,9 +9297,9 @@
           <a:bodyPr/>
           <a:lstStyle/>
           <a:p>
-            <a:fld id="{8A86AB56-393C-4917-9670-5C316C4C0775}" type="datetimeFigureOut">
+            <a:fld id="{A25588AC-933F-4B05-B4F9-0387B2A9C63D}" type="datetimeFigureOut">
               <a:rPr lang="en-US" smtClean="0"/>
-              <a:t>10/3/2026</a:t>
+              <a:t>10/4/2026</a:t>
             </a:fld>
             <a:endParaRPr lang="en-US"/>
           </a:p>
@@ -9339,7 +9339,7 @@
           <a:bodyPr/>
           <a:lstStyle/>
           <a:p>
-            <a:fld id="{FC63DECE-DCAF-48B3-9E38-EA00981B3229}" type="slidenum">
+            <a:fld id="{B96B5B2C-9731-4665-8499-523F6B9BFF00}" type="slidenum">
               <a:rPr lang="en-US" smtClean="0"/>
               <a:t>‹#›</a:t>
             </a:fld>
@@ -9352,7 +9352,7 @@
           <p:cNvPr id="8" name="marker_1">
             <a:extLst>
               <a:ext uri="{FF2B5EF4-FFF2-40B4-BE49-F238E27FC236}">
-                <a16:creationId xmlns:a16="http://schemas.microsoft.com/office/drawing/2014/main" id="{38177F81-4663-EDD2-467A-F48F43AA358F}"/>
+                <a16:creationId xmlns:a16="http://schemas.microsoft.com/office/drawing/2014/main" id="{A7635C4C-301F-4AE5-443C-BF02AD913422}"/>
               </a:ext>
             </a:extLst>
           </p:cNvPr>
@@ -9408,7 +9408,7 @@
           <p:cNvPr id="9" name="item_1">
             <a:extLst>
               <a:ext uri="{FF2B5EF4-FFF2-40B4-BE49-F238E27FC236}">
-                <a16:creationId xmlns:a16="http://schemas.microsoft.com/office/drawing/2014/main" id="{22876333-1674-CC42-F004-B0B2C5CB8813}"/>
+                <a16:creationId xmlns:a16="http://schemas.microsoft.com/office/drawing/2014/main" id="{646B4604-6F49-4904-49B8-43BF69F4B34F}"/>
               </a:ext>
             </a:extLst>
           </p:cNvPr>
@@ -9456,7 +9456,7 @@
           <p:cNvPr id="10" name="marker_2">
             <a:extLst>
               <a:ext uri="{FF2B5EF4-FFF2-40B4-BE49-F238E27FC236}">
-                <a16:creationId xmlns:a16="http://schemas.microsoft.com/office/drawing/2014/main" id="{210DA070-F3AB-4462-52BF-21C9C18FA20C}"/>
+                <a16:creationId xmlns:a16="http://schemas.microsoft.com/office/drawing/2014/main" id="{38AEFE02-F068-814B-17CB-115341CE3555}"/>
               </a:ext>
             </a:extLst>
           </p:cNvPr>
@@ -9512,7 +9512,7 @@
           <p:cNvPr id="11" name="item_2">
             <a:extLst>
               <a:ext uri="{FF2B5EF4-FFF2-40B4-BE49-F238E27FC236}">
-                <a16:creationId xmlns:a16="http://schemas.microsoft.com/office/drawing/2014/main" id="{568236CB-4671-5DB8-13B2-700A026228A0}"/>
+                <a16:creationId xmlns:a16="http://schemas.microsoft.com/office/drawing/2014/main" id="{2A40D07C-5332-F30A-690B-D00C6EC383B2}"/>
               </a:ext>
             </a:extLst>
           </p:cNvPr>
@@ -9560,7 +9560,7 @@
           <p:cNvPr id="12" name="marker_3">
             <a:extLst>
               <a:ext uri="{FF2B5EF4-FFF2-40B4-BE49-F238E27FC236}">
-                <a16:creationId xmlns:a16="http://schemas.microsoft.com/office/drawing/2014/main" id="{E7315356-8C5D-6E01-F016-F30DADD5F3E5}"/>
+                <a16:creationId xmlns:a16="http://schemas.microsoft.com/office/drawing/2014/main" id="{1EBBB7A8-8D13-69FF-8A4F-CC55C6AC8CCB}"/>
               </a:ext>
             </a:extLst>
           </p:cNvPr>
@@ -9616,7 +9616,7 @@
           <p:cNvPr id="13" name="item_3">
             <a:extLst>
               <a:ext uri="{FF2B5EF4-FFF2-40B4-BE49-F238E27FC236}">
-                <a16:creationId xmlns:a16="http://schemas.microsoft.com/office/drawing/2014/main" id="{ECC92755-DADF-3F6A-217F-6717DDEE9590}"/>
+                <a16:creationId xmlns:a16="http://schemas.microsoft.com/office/drawing/2014/main" id="{496CCC3D-4261-F3C2-DCEC-737B1C013550}"/>
               </a:ext>
             </a:extLst>
           </p:cNvPr>
@@ -9664,7 +9664,7 @@
           <p:cNvPr id="14" name="marker_4">
             <a:extLst>
               <a:ext uri="{FF2B5EF4-FFF2-40B4-BE49-F238E27FC236}">
-                <a16:creationId xmlns:a16="http://schemas.microsoft.com/office/drawing/2014/main" id="{629268F4-7E4A-CF9C-6F17-79D142E0CA2C}"/>
+                <a16:creationId xmlns:a16="http://schemas.microsoft.com/office/drawing/2014/main" id="{E94495F9-A48C-502A-D62B-ABB80E9B114E}"/>
               </a:ext>
             </a:extLst>
           </p:cNvPr>
@@ -9720,7 +9720,7 @@
           <p:cNvPr id="15" name="item_4">
             <a:extLst>
               <a:ext uri="{FF2B5EF4-FFF2-40B4-BE49-F238E27FC236}">
-                <a16:creationId xmlns:a16="http://schemas.microsoft.com/office/drawing/2014/main" id="{D7F29186-BEE9-BF9C-0813-FE0FB2B35774}"/>
+                <a16:creationId xmlns:a16="http://schemas.microsoft.com/office/drawing/2014/main" id="{F59FF94C-0780-0FB4-8E32-BF9E4506C99E}"/>
               </a:ext>
             </a:extLst>
           </p:cNvPr>
@@ -9768,7 +9768,7 @@
           <p:cNvPr id="16" name="source">
             <a:extLst>
               <a:ext uri="{FF2B5EF4-FFF2-40B4-BE49-F238E27FC236}">
-                <a16:creationId xmlns:a16="http://schemas.microsoft.com/office/drawing/2014/main" id="{C73C61A8-7E47-42F3-A9F4-E2127D75C06A}"/>
+                <a16:creationId xmlns:a16="http://schemas.microsoft.com/office/drawing/2014/main" id="{93E1589C-4A22-6F96-BC2C-43236444AAE3}"/>
               </a:ext>
             </a:extLst>
           </p:cNvPr>
@@ -9823,7 +9823,7 @@
     </p:spTree>
     <p:extLst>
       <p:ext uri="{BB962C8B-B14F-4D97-AF65-F5344CB8AC3E}">
-        <p14:creationId xmlns:p14="http://schemas.microsoft.com/office/powerpoint/2010/main" val="2176955903"/>
+        <p14:creationId xmlns:p14="http://schemas.microsoft.com/office/powerpoint/2010/main" val="3669412185"/>
       </p:ext>
     </p:extLst>
   </p:cSld>
@@ -9855,7 +9855,7 @@
           <p:cNvPr id="7" name="creative_background">
             <a:extLst>
               <a:ext uri="{FF2B5EF4-FFF2-40B4-BE49-F238E27FC236}">
-                <a16:creationId xmlns:a16="http://schemas.microsoft.com/office/drawing/2014/main" id="{F45BCC8C-7A3C-1DFF-77FC-477EC9ACA3BF}"/>
+                <a16:creationId xmlns:a16="http://schemas.microsoft.com/office/drawing/2014/main" id="{7897A74D-BE9E-A2F3-73DE-136B08D29F2E}"/>
               </a:ext>
             </a:extLst>
           </p:cNvPr>
@@ -9928,9 +9928,9 @@
           <a:bodyPr/>
           <a:lstStyle/>
           <a:p>
-            <a:fld id="{8A86AB56-393C-4917-9670-5C316C4C0775}" type="datetimeFigureOut">
+            <a:fld id="{A25588AC-933F-4B05-B4F9-0387B2A9C63D}" type="datetimeFigureOut">
               <a:rPr lang="en-US" smtClean="0"/>
-              <a:t>10/3/2026</a:t>
+              <a:t>10/4/2026</a:t>
             </a:fld>
             <a:endParaRPr lang="en-US"/>
           </a:p>
@@ -9970,7 +9970,7 @@
           <a:bodyPr/>
           <a:lstStyle/>
           <a:p>
-            <a:fld id="{FC63DECE-DCAF-48B3-9E38-EA00981B3229}" type="slidenum">
+            <a:fld id="{B96B5B2C-9731-4665-8499-523F6B9BFF00}" type="slidenum">
               <a:rPr lang="en-US" smtClean="0"/>
               <a:t>‹#›</a:t>
             </a:fld>
@@ -9983,7 +9983,7 @@
           <p:cNvPr id="8" name="decisions_title">
             <a:extLst>
               <a:ext uri="{FF2B5EF4-FFF2-40B4-BE49-F238E27FC236}">
-                <a16:creationId xmlns:a16="http://schemas.microsoft.com/office/drawing/2014/main" id="{A7237D08-2005-EE07-1DA1-DBB22AE7716D}"/>
+                <a16:creationId xmlns:a16="http://schemas.microsoft.com/office/drawing/2014/main" id="{6BB44FAA-1A83-7C42-EE22-D29AC4421DB8}"/>
               </a:ext>
             </a:extLst>
           </p:cNvPr>
@@ -10033,7 +10033,7 @@
           <p:cNvPr id="9" name="decisions">
             <a:extLst>
               <a:ext uri="{FF2B5EF4-FFF2-40B4-BE49-F238E27FC236}">
-                <a16:creationId xmlns:a16="http://schemas.microsoft.com/office/drawing/2014/main" id="{8D77DDF7-F98D-4C21-8F74-44047B9B9556}"/>
+                <a16:creationId xmlns:a16="http://schemas.microsoft.com/office/drawing/2014/main" id="{18B7FE45-9DF2-A935-6FD1-B312DACB0FCA}"/>
               </a:ext>
             </a:extLst>
           </p:cNvPr>
@@ -10076,7 +10076,7 @@
           <p:cNvPr id="10" name="item_1_title">
             <a:extLst>
               <a:ext uri="{FF2B5EF4-FFF2-40B4-BE49-F238E27FC236}">
-                <a16:creationId xmlns:a16="http://schemas.microsoft.com/office/drawing/2014/main" id="{615A4C17-E0D0-E609-E152-CD6238A28265}"/>
+                <a16:creationId xmlns:a16="http://schemas.microsoft.com/office/drawing/2014/main" id="{A56C586B-20FD-DBC4-F22E-4617BDA7DDE5}"/>
               </a:ext>
             </a:extLst>
           </p:cNvPr>
@@ -10129,7 +10129,7 @@
           <p:cNvPr id="11" name="item_1">
             <a:extLst>
               <a:ext uri="{FF2B5EF4-FFF2-40B4-BE49-F238E27FC236}">
-                <a16:creationId xmlns:a16="http://schemas.microsoft.com/office/drawing/2014/main" id="{DD2A42D0-9F49-5B46-9611-EFDA8A0EA88B}"/>
+                <a16:creationId xmlns:a16="http://schemas.microsoft.com/office/drawing/2014/main" id="{5036C71C-DA41-FFFD-FDA0-58B76CAFCCC9}"/>
               </a:ext>
             </a:extLst>
           </p:cNvPr>
@@ -10177,7 +10177,7 @@
           <p:cNvPr id="12" name="item_2_title">
             <a:extLst>
               <a:ext uri="{FF2B5EF4-FFF2-40B4-BE49-F238E27FC236}">
-                <a16:creationId xmlns:a16="http://schemas.microsoft.com/office/drawing/2014/main" id="{F57CF416-8DC9-5D6C-8CA1-5540AF3472CB}"/>
+                <a16:creationId xmlns:a16="http://schemas.microsoft.com/office/drawing/2014/main" id="{F644CF92-38E4-EBBB-DF41-C3F8EFA7B282}"/>
               </a:ext>
             </a:extLst>
           </p:cNvPr>
@@ -10230,7 +10230,7 @@
           <p:cNvPr id="13" name="item_2">
             <a:extLst>
               <a:ext uri="{FF2B5EF4-FFF2-40B4-BE49-F238E27FC236}">
-                <a16:creationId xmlns:a16="http://schemas.microsoft.com/office/drawing/2014/main" id="{6C0A6810-B4BE-740A-8717-7AD6B265081C}"/>
+                <a16:creationId xmlns:a16="http://schemas.microsoft.com/office/drawing/2014/main" id="{BA6DC5E7-7B9D-CFAA-AB30-27F3114E2F9A}"/>
               </a:ext>
             </a:extLst>
           </p:cNvPr>
@@ -10278,7 +10278,7 @@
           <p:cNvPr id="14" name="item_3_title">
             <a:extLst>
               <a:ext uri="{FF2B5EF4-FFF2-40B4-BE49-F238E27FC236}">
-                <a16:creationId xmlns:a16="http://schemas.microsoft.com/office/drawing/2014/main" id="{2703C1CF-0DCA-0E24-DB31-069CE8F9C05C}"/>
+                <a16:creationId xmlns:a16="http://schemas.microsoft.com/office/drawing/2014/main" id="{00F25EF4-8B30-7678-142D-0C898AE838C1}"/>
               </a:ext>
             </a:extLst>
           </p:cNvPr>
@@ -10331,7 +10331,7 @@
           <p:cNvPr id="15" name="item_3">
             <a:extLst>
               <a:ext uri="{FF2B5EF4-FFF2-40B4-BE49-F238E27FC236}">
-                <a16:creationId xmlns:a16="http://schemas.microsoft.com/office/drawing/2014/main" id="{41CFC613-35CE-47E4-9C4A-23D72BFEC7BA}"/>
+                <a16:creationId xmlns:a16="http://schemas.microsoft.com/office/drawing/2014/main" id="{8708A3F1-4F13-F01D-D408-89517A267D54}"/>
               </a:ext>
             </a:extLst>
           </p:cNvPr>
@@ -10379,7 +10379,7 @@
           <p:cNvPr id="16" name="source">
             <a:extLst>
               <a:ext uri="{FF2B5EF4-FFF2-40B4-BE49-F238E27FC236}">
-                <a16:creationId xmlns:a16="http://schemas.microsoft.com/office/drawing/2014/main" id="{E948CE5B-6F52-99DF-AE2E-74725FA6C6EA}"/>
+                <a16:creationId xmlns:a16="http://schemas.microsoft.com/office/drawing/2014/main" id="{FFF358A7-227B-E3F9-FB1B-BD8268B12A0F}"/>
               </a:ext>
             </a:extLst>
           </p:cNvPr>
@@ -10434,7 +10434,7 @@
     </p:spTree>
     <p:extLst>
       <p:ext uri="{BB962C8B-B14F-4D97-AF65-F5344CB8AC3E}">
-        <p14:creationId xmlns:p14="http://schemas.microsoft.com/office/powerpoint/2010/main" val="3729448819"/>
+        <p14:creationId xmlns:p14="http://schemas.microsoft.com/office/powerpoint/2010/main" val="48953298"/>
       </p:ext>
     </p:extLst>
   </p:cSld>
@@ -10466,7 +10466,7 @@
           <p:cNvPr id="7" name="creative_background">
             <a:extLst>
               <a:ext uri="{FF2B5EF4-FFF2-40B4-BE49-F238E27FC236}">
-                <a16:creationId xmlns:a16="http://schemas.microsoft.com/office/drawing/2014/main" id="{09264427-0299-7438-90A2-D994AA1977A8}"/>
+                <a16:creationId xmlns:a16="http://schemas.microsoft.com/office/drawing/2014/main" id="{A0D29A86-3953-0467-9DD6-6C6D5A752DC5}"/>
               </a:ext>
             </a:extLst>
           </p:cNvPr>
@@ -10539,9 +10539,9 @@
           <a:bodyPr/>
           <a:lstStyle/>
           <a:p>
-            <a:fld id="{8A86AB56-393C-4917-9670-5C316C4C0775}" type="datetimeFigureOut">
+            <a:fld id="{A25588AC-933F-4B05-B4F9-0387B2A9C63D}" type="datetimeFigureOut">
               <a:rPr lang="en-US" smtClean="0"/>
-              <a:t>10/3/2026</a:t>
+              <a:t>10/4/2026</a:t>
             </a:fld>
             <a:endParaRPr lang="en-US"/>
           </a:p>
@@ -10581,7 +10581,7 @@
           <a:bodyPr/>
           <a:lstStyle/>
           <a:p>
-            <a:fld id="{FC63DECE-DCAF-48B3-9E38-EA00981B3229}" type="slidenum">
+            <a:fld id="{B96B5B2C-9731-4665-8499-523F6B9BFF00}" type="slidenum">
               <a:rPr lang="en-US" smtClean="0"/>
               <a:t>‹#›</a:t>
             </a:fld>
@@ -10594,7 +10594,7 @@
           <p:cNvPr id="8" name="body">
             <a:extLst>
               <a:ext uri="{FF2B5EF4-FFF2-40B4-BE49-F238E27FC236}">
-                <a16:creationId xmlns:a16="http://schemas.microsoft.com/office/drawing/2014/main" id="{40E144DE-D28D-0CA8-F75E-8B921B9A9913}"/>
+                <a16:creationId xmlns:a16="http://schemas.microsoft.com/office/drawing/2014/main" id="{53112835-ACCC-824A-D385-4CFFE433A712}"/>
               </a:ext>
             </a:extLst>
           </p:cNvPr>
@@ -10634,7 +10634,7 @@
           <p:cNvPr id="9" name="kpi_value_1">
             <a:extLst>
               <a:ext uri="{FF2B5EF4-FFF2-40B4-BE49-F238E27FC236}">
-                <a16:creationId xmlns:a16="http://schemas.microsoft.com/office/drawing/2014/main" id="{28687AD8-225B-E7B9-C040-E442F760AD2A}"/>
+                <a16:creationId xmlns:a16="http://schemas.microsoft.com/office/drawing/2014/main" id="{A39CB6E4-0CA8-5E9D-75F3-F5A699B4B3AF}"/>
               </a:ext>
             </a:extLst>
           </p:cNvPr>
@@ -10687,7 +10687,7 @@
           <p:cNvPr id="10" name="kpi_label_1">
             <a:extLst>
               <a:ext uri="{FF2B5EF4-FFF2-40B4-BE49-F238E27FC236}">
-                <a16:creationId xmlns:a16="http://schemas.microsoft.com/office/drawing/2014/main" id="{A847B1FA-B173-E426-713D-3E04FA29F13C}"/>
+                <a16:creationId xmlns:a16="http://schemas.microsoft.com/office/drawing/2014/main" id="{3B6D4A22-B8CA-CDD8-0DF3-29704305841B}"/>
               </a:ext>
             </a:extLst>
           </p:cNvPr>
@@ -10735,7 +10735,7 @@
           <p:cNvPr id="11" name="kpi_value_2">
             <a:extLst>
               <a:ext uri="{FF2B5EF4-FFF2-40B4-BE49-F238E27FC236}">
-                <a16:creationId xmlns:a16="http://schemas.microsoft.com/office/drawing/2014/main" id="{EAC989D3-335B-AEA4-6DAE-0D156796D0F4}"/>
+                <a16:creationId xmlns:a16="http://schemas.microsoft.com/office/drawing/2014/main" id="{F486BB68-E65C-90AF-CC4D-02F8E306EB02}"/>
               </a:ext>
             </a:extLst>
           </p:cNvPr>
@@ -10788,7 +10788,7 @@
           <p:cNvPr id="12" name="kpi_label_2">
             <a:extLst>
               <a:ext uri="{FF2B5EF4-FFF2-40B4-BE49-F238E27FC236}">
-                <a16:creationId xmlns:a16="http://schemas.microsoft.com/office/drawing/2014/main" id="{E8C06F5C-6306-C577-F807-C74DD78BFFAF}"/>
+                <a16:creationId xmlns:a16="http://schemas.microsoft.com/office/drawing/2014/main" id="{70680DC7-2253-E356-05BA-45942A395039}"/>
               </a:ext>
             </a:extLst>
           </p:cNvPr>
@@ -10836,7 +10836,7 @@
           <p:cNvPr id="13" name="source">
             <a:extLst>
               <a:ext uri="{FF2B5EF4-FFF2-40B4-BE49-F238E27FC236}">
-                <a16:creationId xmlns:a16="http://schemas.microsoft.com/office/drawing/2014/main" id="{93BA3B03-5C1F-0C2C-D3C0-0BCB452CE2D6}"/>
+                <a16:creationId xmlns:a16="http://schemas.microsoft.com/office/drawing/2014/main" id="{7901E502-F768-4567-D738-F52106D89B11}"/>
               </a:ext>
             </a:extLst>
           </p:cNvPr>
@@ -10891,7 +10891,7 @@
     </p:spTree>
     <p:extLst>
       <p:ext uri="{BB962C8B-B14F-4D97-AF65-F5344CB8AC3E}">
-        <p14:creationId xmlns:p14="http://schemas.microsoft.com/office/powerpoint/2010/main" val="1678270719"/>
+        <p14:creationId xmlns:p14="http://schemas.microsoft.com/office/powerpoint/2010/main" val="1643179164"/>
       </p:ext>
     </p:extLst>
   </p:cSld>
@@ -10923,7 +10923,7 @@
           <p:cNvPr id="7" name="creative_background">
             <a:extLst>
               <a:ext uri="{FF2B5EF4-FFF2-40B4-BE49-F238E27FC236}">
-                <a16:creationId xmlns:a16="http://schemas.microsoft.com/office/drawing/2014/main" id="{E286D977-ED22-6CD6-9FE5-26D0811B7811}"/>
+                <a16:creationId xmlns:a16="http://schemas.microsoft.com/office/drawing/2014/main" id="{CA7952D4-3F36-37F8-771F-5DA7DDB64245}"/>
               </a:ext>
             </a:extLst>
           </p:cNvPr>
@@ -10996,9 +10996,9 @@
           <a:bodyPr/>
           <a:lstStyle/>
           <a:p>
-            <a:fld id="{8A86AB56-393C-4917-9670-5C316C4C0775}" type="datetimeFigureOut">
+            <a:fld id="{A25588AC-933F-4B05-B4F9-0387B2A9C63D}" type="datetimeFigureOut">
               <a:rPr lang="en-US" smtClean="0"/>
-              <a:t>10/3/2026</a:t>
+              <a:t>10/4/2026</a:t>
             </a:fld>
             <a:endParaRPr lang="en-US"/>
           </a:p>
@@ -11038,7 +11038,7 @@
           <a:bodyPr/>
           <a:lstStyle/>
           <a:p>
-            <a:fld id="{FC63DECE-DCAF-48B3-9E38-EA00981B3229}" type="slidenum">
+            <a:fld id="{B96B5B2C-9731-4665-8499-523F6B9BFF00}" type="slidenum">
               <a:rPr lang="en-US" smtClean="0"/>
               <a:t>‹#›</a:t>
             </a:fld>
@@ -11051,7 +11051,7 @@
           <p:cNvPr id="8" name="body">
             <a:extLst>
               <a:ext uri="{FF2B5EF4-FFF2-40B4-BE49-F238E27FC236}">
-                <a16:creationId xmlns:a16="http://schemas.microsoft.com/office/drawing/2014/main" id="{DCD1B6E2-6D55-8C0F-64CD-BF2D13CCCB3B}"/>
+                <a16:creationId xmlns:a16="http://schemas.microsoft.com/office/drawing/2014/main" id="{36538F74-D546-B047-FEEC-5390A639BEE4}"/>
               </a:ext>
             </a:extLst>
           </p:cNvPr>
@@ -11091,7 +11091,7 @@
           <p:cNvPr id="9" name="kpi_value_1">
             <a:extLst>
               <a:ext uri="{FF2B5EF4-FFF2-40B4-BE49-F238E27FC236}">
-                <a16:creationId xmlns:a16="http://schemas.microsoft.com/office/drawing/2014/main" id="{608648E3-CD01-7C16-9FD5-E159CA6088B6}"/>
+                <a16:creationId xmlns:a16="http://schemas.microsoft.com/office/drawing/2014/main" id="{2B615887-AF04-A820-52DD-D67242E550BD}"/>
               </a:ext>
             </a:extLst>
           </p:cNvPr>
@@ -11144,7 +11144,7 @@
           <p:cNvPr id="10" name="kpi_label_1">
             <a:extLst>
               <a:ext uri="{FF2B5EF4-FFF2-40B4-BE49-F238E27FC236}">
-                <a16:creationId xmlns:a16="http://schemas.microsoft.com/office/drawing/2014/main" id="{0836D0BD-7892-EBCB-369D-94DD184C8685}"/>
+                <a16:creationId xmlns:a16="http://schemas.microsoft.com/office/drawing/2014/main" id="{59AC8553-2C75-3B6E-A40B-EB00D5801E98}"/>
               </a:ext>
             </a:extLst>
           </p:cNvPr>
@@ -11192,7 +11192,7 @@
           <p:cNvPr id="11" name="kpi_value_2">
             <a:extLst>
               <a:ext uri="{FF2B5EF4-FFF2-40B4-BE49-F238E27FC236}">
-                <a16:creationId xmlns:a16="http://schemas.microsoft.com/office/drawing/2014/main" id="{5AB24911-D1DB-737A-61C1-6BF1A05888EC}"/>
+                <a16:creationId xmlns:a16="http://schemas.microsoft.com/office/drawing/2014/main" id="{D7BFDB4D-8B5B-403A-7EF0-FB9DDB75DE7D}"/>
               </a:ext>
             </a:extLst>
           </p:cNvPr>
@@ -11245,7 +11245,7 @@
           <p:cNvPr id="12" name="kpi_label_2">
             <a:extLst>
               <a:ext uri="{FF2B5EF4-FFF2-40B4-BE49-F238E27FC236}">
-                <a16:creationId xmlns:a16="http://schemas.microsoft.com/office/drawing/2014/main" id="{4F87EA06-DAA0-9E7C-50C5-F18A33295F0E}"/>
+                <a16:creationId xmlns:a16="http://schemas.microsoft.com/office/drawing/2014/main" id="{E0D3BEB5-20A5-7446-79F1-05067CC2078B}"/>
               </a:ext>
             </a:extLst>
           </p:cNvPr>
@@ -11293,7 +11293,7 @@
           <p:cNvPr id="13" name="kpi_value_3">
             <a:extLst>
               <a:ext uri="{FF2B5EF4-FFF2-40B4-BE49-F238E27FC236}">
-                <a16:creationId xmlns:a16="http://schemas.microsoft.com/office/drawing/2014/main" id="{E5A5E709-6489-88EF-3774-4596488BC081}"/>
+                <a16:creationId xmlns:a16="http://schemas.microsoft.com/office/drawing/2014/main" id="{801D51E8-FED5-68D9-2058-0960D9FA0F72}"/>
               </a:ext>
             </a:extLst>
           </p:cNvPr>
@@ -11346,7 +11346,7 @@
           <p:cNvPr id="14" name="kpi_label_3">
             <a:extLst>
               <a:ext uri="{FF2B5EF4-FFF2-40B4-BE49-F238E27FC236}">
-                <a16:creationId xmlns:a16="http://schemas.microsoft.com/office/drawing/2014/main" id="{C3C31D36-50E0-9CA0-3D9C-9F9B312954A7}"/>
+                <a16:creationId xmlns:a16="http://schemas.microsoft.com/office/drawing/2014/main" id="{DFBF0C08-E299-86E1-7965-C9FF7D46701F}"/>
               </a:ext>
             </a:extLst>
           </p:cNvPr>
@@ -11394,7 +11394,7 @@
           <p:cNvPr id="15" name="kpi_value_4">
             <a:extLst>
               <a:ext uri="{FF2B5EF4-FFF2-40B4-BE49-F238E27FC236}">
-                <a16:creationId xmlns:a16="http://schemas.microsoft.com/office/drawing/2014/main" id="{57E69A38-6FF2-DFBC-AD88-8143DB37E2AA}"/>
+                <a16:creationId xmlns:a16="http://schemas.microsoft.com/office/drawing/2014/main" id="{DB71B6EB-7213-A709-9759-BCCD5242F6E0}"/>
               </a:ext>
             </a:extLst>
           </p:cNvPr>
@@ -11447,7 +11447,7 @@
           <p:cNvPr id="16" name="kpi_label_4">
             <a:extLst>
               <a:ext uri="{FF2B5EF4-FFF2-40B4-BE49-F238E27FC236}">
-                <a16:creationId xmlns:a16="http://schemas.microsoft.com/office/drawing/2014/main" id="{6F737581-C03F-FFFE-5AE3-CA83D827A724}"/>
+                <a16:creationId xmlns:a16="http://schemas.microsoft.com/office/drawing/2014/main" id="{5B8526C7-D2A9-08EE-BEDB-C1FD9AE6AB69}"/>
               </a:ext>
             </a:extLst>
           </p:cNvPr>
@@ -11495,7 +11495,7 @@
           <p:cNvPr id="17" name="source">
             <a:extLst>
               <a:ext uri="{FF2B5EF4-FFF2-40B4-BE49-F238E27FC236}">
-                <a16:creationId xmlns:a16="http://schemas.microsoft.com/office/drawing/2014/main" id="{329CD0BD-0F48-4E60-09D6-0B27D5482351}"/>
+                <a16:creationId xmlns:a16="http://schemas.microsoft.com/office/drawing/2014/main" id="{F7005D12-6F84-3E5F-32CD-EDF86719FAA7}"/>
               </a:ext>
             </a:extLst>
           </p:cNvPr>
@@ -11550,7 +11550,7 @@
     </p:spTree>
     <p:extLst>
       <p:ext uri="{BB962C8B-B14F-4D97-AF65-F5344CB8AC3E}">
-        <p14:creationId xmlns:p14="http://schemas.microsoft.com/office/powerpoint/2010/main" val="3349637259"/>
+        <p14:creationId xmlns:p14="http://schemas.microsoft.com/office/powerpoint/2010/main" val="1393005854"/>
       </p:ext>
     </p:extLst>
   </p:cSld>
@@ -11582,7 +11582,7 @@
           <p:cNvPr id="7" name="creative_background">
             <a:extLst>
               <a:ext uri="{FF2B5EF4-FFF2-40B4-BE49-F238E27FC236}">
-                <a16:creationId xmlns:a16="http://schemas.microsoft.com/office/drawing/2014/main" id="{17C4B7B2-F884-C62C-A91D-AF50280D3C8B}"/>
+                <a16:creationId xmlns:a16="http://schemas.microsoft.com/office/drawing/2014/main" id="{C1554523-C124-CEF6-170C-881CC6BAD015}"/>
               </a:ext>
             </a:extLst>
           </p:cNvPr>
@@ -11655,9 +11655,9 @@
           <a:bodyPr/>
           <a:lstStyle/>
           <a:p>
-            <a:fld id="{8A86AB56-393C-4917-9670-5C316C4C0775}" type="datetimeFigureOut">
+            <a:fld id="{A25588AC-933F-4B05-B4F9-0387B2A9C63D}" type="datetimeFigureOut">
               <a:rPr lang="en-US" smtClean="0"/>
-              <a:t>10/3/2026</a:t>
+              <a:t>10/4/2026</a:t>
             </a:fld>
             <a:endParaRPr lang="en-US"/>
           </a:p>
@@ -11697,7 +11697,7 @@
           <a:bodyPr/>
           <a:lstStyle/>
           <a:p>
-            <a:fld id="{FC63DECE-DCAF-48B3-9E38-EA00981B3229}" type="slidenum">
+            <a:fld id="{B96B5B2C-9731-4665-8499-523F6B9BFF00}" type="slidenum">
               <a:rPr lang="en-US" smtClean="0"/>
               <a:t>‹#›</a:t>
             </a:fld>
@@ -11710,7 +11710,7 @@
           <p:cNvPr id="8" name="body">
             <a:extLst>
               <a:ext uri="{FF2B5EF4-FFF2-40B4-BE49-F238E27FC236}">
-                <a16:creationId xmlns:a16="http://schemas.microsoft.com/office/drawing/2014/main" id="{6C0B4579-D32C-E800-6494-8323D3222A1C}"/>
+                <a16:creationId xmlns:a16="http://schemas.microsoft.com/office/drawing/2014/main" id="{40E88515-99AF-8164-28B4-86F36856FE90}"/>
               </a:ext>
             </a:extLst>
           </p:cNvPr>
@@ -11750,7 +11750,7 @@
           <p:cNvPr id="9" name="quote">
             <a:extLst>
               <a:ext uri="{FF2B5EF4-FFF2-40B4-BE49-F238E27FC236}">
-                <a16:creationId xmlns:a16="http://schemas.microsoft.com/office/drawing/2014/main" id="{D9DD3B47-D712-797C-E7CD-D92B1307E611}"/>
+                <a16:creationId xmlns:a16="http://schemas.microsoft.com/office/drawing/2014/main" id="{EF02007F-E429-3493-7478-95856890F5BA}"/>
               </a:ext>
             </a:extLst>
           </p:cNvPr>
@@ -11800,7 +11800,7 @@
           <p:cNvPr id="10" name="attribution">
             <a:extLst>
               <a:ext uri="{FF2B5EF4-FFF2-40B4-BE49-F238E27FC236}">
-                <a16:creationId xmlns:a16="http://schemas.microsoft.com/office/drawing/2014/main" id="{D04E18B6-A82E-DE7E-2BE4-8165B0359502}"/>
+                <a16:creationId xmlns:a16="http://schemas.microsoft.com/office/drawing/2014/main" id="{4FC4D97E-0E6B-116E-085E-AABBE30C61DF}"/>
               </a:ext>
             </a:extLst>
           </p:cNvPr>
@@ -11848,7 +11848,7 @@
           <p:cNvPr id="11" name="source">
             <a:extLst>
               <a:ext uri="{FF2B5EF4-FFF2-40B4-BE49-F238E27FC236}">
-                <a16:creationId xmlns:a16="http://schemas.microsoft.com/office/drawing/2014/main" id="{672801EA-C846-753C-53EE-1599C7E3F2D1}"/>
+                <a16:creationId xmlns:a16="http://schemas.microsoft.com/office/drawing/2014/main" id="{FB3A6D01-E1E2-94E2-8E2C-B209B60229E2}"/>
               </a:ext>
             </a:extLst>
           </p:cNvPr>
@@ -11903,7 +11903,7 @@
     </p:spTree>
     <p:extLst>
       <p:ext uri="{BB962C8B-B14F-4D97-AF65-F5344CB8AC3E}">
-        <p14:creationId xmlns:p14="http://schemas.microsoft.com/office/powerpoint/2010/main" val="3894882286"/>
+        <p14:creationId xmlns:p14="http://schemas.microsoft.com/office/powerpoint/2010/main" val="1640565766"/>
       </p:ext>
     </p:extLst>
   </p:cSld>
@@ -11935,7 +11935,7 @@
           <p:cNvPr id="7" name="creative_background">
             <a:extLst>
               <a:ext uri="{FF2B5EF4-FFF2-40B4-BE49-F238E27FC236}">
-                <a16:creationId xmlns:a16="http://schemas.microsoft.com/office/drawing/2014/main" id="{F1D2A93B-AEC5-D772-0065-593F39BF9296}"/>
+                <a16:creationId xmlns:a16="http://schemas.microsoft.com/office/drawing/2014/main" id="{CE672070-92EB-8849-484D-C7162AA873A5}"/>
               </a:ext>
             </a:extLst>
           </p:cNvPr>
@@ -12008,9 +12008,9 @@
           <a:bodyPr/>
           <a:lstStyle/>
           <a:p>
-            <a:fld id="{8A86AB56-393C-4917-9670-5C316C4C0775}" type="datetimeFigureOut">
+            <a:fld id="{A25588AC-933F-4B05-B4F9-0387B2A9C63D}" type="datetimeFigureOut">
               <a:rPr lang="en-US" smtClean="0"/>
-              <a:t>10/3/2026</a:t>
+              <a:t>10/4/2026</a:t>
             </a:fld>
             <a:endParaRPr lang="en-US"/>
           </a:p>
@@ -12050,7 +12050,7 @@
           <a:bodyPr/>
           <a:lstStyle/>
           <a:p>
-            <a:fld id="{FC63DECE-DCAF-48B3-9E38-EA00981B3229}" type="slidenum">
+            <a:fld id="{B96B5B2C-9731-4665-8499-523F6B9BFF00}" type="slidenum">
               <a:rPr lang="en-US" smtClean="0"/>
               <a:t>‹#›</a:t>
             </a:fld>
@@ -12063,7 +12063,7 @@
           <p:cNvPr id="8" name="item_1_title">
             <a:extLst>
               <a:ext uri="{FF2B5EF4-FFF2-40B4-BE49-F238E27FC236}">
-                <a16:creationId xmlns:a16="http://schemas.microsoft.com/office/drawing/2014/main" id="{7E4ADE9F-8301-090F-BB85-05645F323C46}"/>
+                <a16:creationId xmlns:a16="http://schemas.microsoft.com/office/drawing/2014/main" id="{4C5DD3B8-AF82-7F92-BF5C-BC40E777D00E}"/>
               </a:ext>
             </a:extLst>
           </p:cNvPr>
@@ -12113,7 +12113,7 @@
           <p:cNvPr id="9" name="item_1">
             <a:extLst>
               <a:ext uri="{FF2B5EF4-FFF2-40B4-BE49-F238E27FC236}">
-                <a16:creationId xmlns:a16="http://schemas.microsoft.com/office/drawing/2014/main" id="{A30709D7-0AD6-961C-BEBE-CD0F0D8EDFD8}"/>
+                <a16:creationId xmlns:a16="http://schemas.microsoft.com/office/drawing/2014/main" id="{9C71E81E-1EE9-C8B6-4DEC-4CC3378CF745}"/>
               </a:ext>
             </a:extLst>
           </p:cNvPr>
@@ -12161,7 +12161,7 @@
           <p:cNvPr id="10" name="item_2_title">
             <a:extLst>
               <a:ext uri="{FF2B5EF4-FFF2-40B4-BE49-F238E27FC236}">
-                <a16:creationId xmlns:a16="http://schemas.microsoft.com/office/drawing/2014/main" id="{00885F2F-A6D0-2BF5-98B5-DEC0D8ACBDBB}"/>
+                <a16:creationId xmlns:a16="http://schemas.microsoft.com/office/drawing/2014/main" id="{D67618DC-7A21-7C16-57A2-F487D6E61576}"/>
               </a:ext>
             </a:extLst>
           </p:cNvPr>
@@ -12214,7 +12214,7 @@
           <p:cNvPr id="11" name="item_2">
             <a:extLst>
               <a:ext uri="{FF2B5EF4-FFF2-40B4-BE49-F238E27FC236}">
-                <a16:creationId xmlns:a16="http://schemas.microsoft.com/office/drawing/2014/main" id="{4FF375F4-C491-D3BD-7E85-47FF39A49F38}"/>
+                <a16:creationId xmlns:a16="http://schemas.microsoft.com/office/drawing/2014/main" id="{8791386B-95B7-E20D-57D6-E6A3364C97E4}"/>
               </a:ext>
             </a:extLst>
           </p:cNvPr>
@@ -12262,7 +12262,7 @@
           <p:cNvPr id="12" name="item_3_title">
             <a:extLst>
               <a:ext uri="{FF2B5EF4-FFF2-40B4-BE49-F238E27FC236}">
-                <a16:creationId xmlns:a16="http://schemas.microsoft.com/office/drawing/2014/main" id="{031C6AB7-7A10-CE24-66DD-940526C58876}"/>
+                <a16:creationId xmlns:a16="http://schemas.microsoft.com/office/drawing/2014/main" id="{98C93497-A1BB-9CE9-07C5-F52DC18FA20E}"/>
               </a:ext>
             </a:extLst>
           </p:cNvPr>
@@ -12315,7 +12315,7 @@
           <p:cNvPr id="13" name="item_3">
             <a:extLst>
               <a:ext uri="{FF2B5EF4-FFF2-40B4-BE49-F238E27FC236}">
-                <a16:creationId xmlns:a16="http://schemas.microsoft.com/office/drawing/2014/main" id="{724D95F5-E1EB-1D86-EC6B-98207328C0D0}"/>
+                <a16:creationId xmlns:a16="http://schemas.microsoft.com/office/drawing/2014/main" id="{656CFC80-62BF-30C8-0970-097E5702AC2F}"/>
               </a:ext>
             </a:extLst>
           </p:cNvPr>
@@ -12363,7 +12363,7 @@
           <p:cNvPr id="14" name="source">
             <a:extLst>
               <a:ext uri="{FF2B5EF4-FFF2-40B4-BE49-F238E27FC236}">
-                <a16:creationId xmlns:a16="http://schemas.microsoft.com/office/drawing/2014/main" id="{501AC82D-82FB-FA68-9DC4-0581E025F862}"/>
+                <a16:creationId xmlns:a16="http://schemas.microsoft.com/office/drawing/2014/main" id="{B46CF01D-9A06-1969-5BFD-C4EF71637339}"/>
               </a:ext>
             </a:extLst>
           </p:cNvPr>
@@ -12418,7 +12418,7 @@
     </p:spTree>
     <p:extLst>
       <p:ext uri="{BB962C8B-B14F-4D97-AF65-F5344CB8AC3E}">
-        <p14:creationId xmlns:p14="http://schemas.microsoft.com/office/powerpoint/2010/main" val="459572682"/>
+        <p14:creationId xmlns:p14="http://schemas.microsoft.com/office/powerpoint/2010/main" val="1204445614"/>
       </p:ext>
     </p:extLst>
   </p:cSld>
@@ -12450,7 +12450,7 @@
           <p:cNvPr id="7" name="creative_background">
             <a:extLst>
               <a:ext uri="{FF2B5EF4-FFF2-40B4-BE49-F238E27FC236}">
-                <a16:creationId xmlns:a16="http://schemas.microsoft.com/office/drawing/2014/main" id="{47600217-E1FA-0C56-3B5E-4B553F325024}"/>
+                <a16:creationId xmlns:a16="http://schemas.microsoft.com/office/drawing/2014/main" id="{C20CF500-0BD0-E44F-5B50-8F41B4E26598}"/>
               </a:ext>
             </a:extLst>
           </p:cNvPr>
@@ -12523,9 +12523,9 @@
           <a:bodyPr/>
           <a:lstStyle/>
           <a:p>
-            <a:fld id="{8A86AB56-393C-4917-9670-5C316C4C0775}" type="datetimeFigureOut">
+            <a:fld id="{A25588AC-933F-4B05-B4F9-0387B2A9C63D}" type="datetimeFigureOut">
               <a:rPr lang="en-US" smtClean="0"/>
-              <a:t>10/3/2026</a:t>
+              <a:t>10/4/2026</a:t>
             </a:fld>
             <a:endParaRPr lang="en-US"/>
           </a:p>
@@ -12565,7 +12565,7 @@
           <a:bodyPr/>
           <a:lstStyle/>
           <a:p>
-            <a:fld id="{FC63DECE-DCAF-48B3-9E38-EA00981B3229}" type="slidenum">
+            <a:fld id="{B96B5B2C-9731-4665-8499-523F6B9BFF00}" type="slidenum">
               <a:rPr lang="en-US" smtClean="0"/>
               <a:t>‹#›</a:t>
             </a:fld>
@@ -12578,7 +12578,7 @@
           <p:cNvPr id="8" name="item_1_title">
             <a:extLst>
               <a:ext uri="{FF2B5EF4-FFF2-40B4-BE49-F238E27FC236}">
-                <a16:creationId xmlns:a16="http://schemas.microsoft.com/office/drawing/2014/main" id="{DA44E9B5-89D2-0B7E-30EA-AAE578DF3AF9}"/>
+                <a16:creationId xmlns:a16="http://schemas.microsoft.com/office/drawing/2014/main" id="{F41584EC-A8B4-A73C-8357-5B404524EBB2}"/>
               </a:ext>
             </a:extLst>
           </p:cNvPr>
@@ -12628,7 +12628,7 @@
           <p:cNvPr id="9" name="item_1">
             <a:extLst>
               <a:ext uri="{FF2B5EF4-FFF2-40B4-BE49-F238E27FC236}">
-                <a16:creationId xmlns:a16="http://schemas.microsoft.com/office/drawing/2014/main" id="{D8B2CE64-F81C-B159-0198-FA62607BFA2A}"/>
+                <a16:creationId xmlns:a16="http://schemas.microsoft.com/office/drawing/2014/main" id="{BAFDB2CA-EFC0-0660-46AF-0D74492B13F7}"/>
               </a:ext>
             </a:extLst>
           </p:cNvPr>
@@ -12676,7 +12676,7 @@
           <p:cNvPr id="10" name="item_2_title">
             <a:extLst>
               <a:ext uri="{FF2B5EF4-FFF2-40B4-BE49-F238E27FC236}">
-                <a16:creationId xmlns:a16="http://schemas.microsoft.com/office/drawing/2014/main" id="{327C1091-3997-B463-A88B-DE43E63ECA3D}"/>
+                <a16:creationId xmlns:a16="http://schemas.microsoft.com/office/drawing/2014/main" id="{5F1D2CDE-E033-674C-8096-ED57A0F90E55}"/>
               </a:ext>
             </a:extLst>
           </p:cNvPr>
@@ -12729,7 +12729,7 @@
           <p:cNvPr id="11" name="item_2">
             <a:extLst>
               <a:ext uri="{FF2B5EF4-FFF2-40B4-BE49-F238E27FC236}">
-                <a16:creationId xmlns:a16="http://schemas.microsoft.com/office/drawing/2014/main" id="{E428446A-6EDD-26EB-93C9-BA9A41C15F21}"/>
+                <a16:creationId xmlns:a16="http://schemas.microsoft.com/office/drawing/2014/main" id="{39185750-A3A0-C9FC-D7A8-9638DD45DF87}"/>
               </a:ext>
             </a:extLst>
           </p:cNvPr>
@@ -12777,7 +12777,7 @@
           <p:cNvPr id="12" name="source">
             <a:extLst>
               <a:ext uri="{FF2B5EF4-FFF2-40B4-BE49-F238E27FC236}">
-                <a16:creationId xmlns:a16="http://schemas.microsoft.com/office/drawing/2014/main" id="{A85708A1-C1FA-5721-2E85-858DB7279E85}"/>
+                <a16:creationId xmlns:a16="http://schemas.microsoft.com/office/drawing/2014/main" id="{06315E13-9111-58E6-6895-6293164CA972}"/>
               </a:ext>
             </a:extLst>
           </p:cNvPr>
@@ -12832,7 +12832,7 @@
     </p:spTree>
     <p:extLst>
       <p:ext uri="{BB962C8B-B14F-4D97-AF65-F5344CB8AC3E}">
-        <p14:creationId xmlns:p14="http://schemas.microsoft.com/office/powerpoint/2010/main" val="2161880247"/>
+        <p14:creationId xmlns:p14="http://schemas.microsoft.com/office/powerpoint/2010/main" val="578374704"/>
       </p:ext>
     </p:extLst>
   </p:cSld>
@@ -12864,7 +12864,7 @@
           <p:cNvPr id="7" name="creative_background">
             <a:extLst>
               <a:ext uri="{FF2B5EF4-FFF2-40B4-BE49-F238E27FC236}">
-                <a16:creationId xmlns:a16="http://schemas.microsoft.com/office/drawing/2014/main" id="{56988661-6D18-1355-2768-EDB8879EF801}"/>
+                <a16:creationId xmlns:a16="http://schemas.microsoft.com/office/drawing/2014/main" id="{A8791FC3-3150-2582-652A-592E3551EBCA}"/>
               </a:ext>
             </a:extLst>
           </p:cNvPr>
@@ -12937,9 +12937,9 @@
           <a:bodyPr/>
           <a:lstStyle/>
           <a:p>
-            <a:fld id="{8A86AB56-393C-4917-9670-5C316C4C0775}" type="datetimeFigureOut">
+            <a:fld id="{A25588AC-933F-4B05-B4F9-0387B2A9C63D}" type="datetimeFigureOut">
               <a:rPr lang="en-US" smtClean="0"/>
-              <a:t>10/3/2026</a:t>
+              <a:t>10/4/2026</a:t>
             </a:fld>
             <a:endParaRPr lang="en-US"/>
           </a:p>
@@ -12979,7 +12979,7 @@
           <a:bodyPr/>
           <a:lstStyle/>
           <a:p>
-            <a:fld id="{FC63DECE-DCAF-48B3-9E38-EA00981B3229}" type="slidenum">
+            <a:fld id="{B96B5B2C-9731-4665-8499-523F6B9BFF00}" type="slidenum">
               <a:rPr lang="en-US" smtClean="0"/>
               <a:t>‹#›</a:t>
             </a:fld>
@@ -12992,7 +12992,7 @@
           <p:cNvPr id="8" name="chart">
             <a:extLst>
               <a:ext uri="{FF2B5EF4-FFF2-40B4-BE49-F238E27FC236}">
-                <a16:creationId xmlns:a16="http://schemas.microsoft.com/office/drawing/2014/main" id="{55F2B8AD-5F80-1EC6-C55A-82E8137F601A}"/>
+                <a16:creationId xmlns:a16="http://schemas.microsoft.com/office/drawing/2014/main" id="{ECB7A024-BC9B-9A15-82DA-5E736A07D96A}"/>
               </a:ext>
             </a:extLst>
           </p:cNvPr>
@@ -13022,7 +13022,7 @@
           <p:cNvPr id="9" name="body">
             <a:extLst>
               <a:ext uri="{FF2B5EF4-FFF2-40B4-BE49-F238E27FC236}">
-                <a16:creationId xmlns:a16="http://schemas.microsoft.com/office/drawing/2014/main" id="{AC95BC6E-F20F-28C4-35AF-8E13C52339D6}"/>
+                <a16:creationId xmlns:a16="http://schemas.microsoft.com/office/drawing/2014/main" id="{3B61A5E9-80C6-8912-86A4-85D3A92F391E}"/>
               </a:ext>
             </a:extLst>
           </p:cNvPr>
@@ -13065,7 +13065,7 @@
           <p:cNvPr id="10" name="source">
             <a:extLst>
               <a:ext uri="{FF2B5EF4-FFF2-40B4-BE49-F238E27FC236}">
-                <a16:creationId xmlns:a16="http://schemas.microsoft.com/office/drawing/2014/main" id="{AF932A63-D2A5-FD6B-324B-16EEDEC89D23}"/>
+                <a16:creationId xmlns:a16="http://schemas.microsoft.com/office/drawing/2014/main" id="{A7105954-334A-63BB-82E7-80DEF3512F05}"/>
               </a:ext>
             </a:extLst>
           </p:cNvPr>
@@ -13120,7 +13120,7 @@
     </p:spTree>
     <p:extLst>
       <p:ext uri="{BB962C8B-B14F-4D97-AF65-F5344CB8AC3E}">
-        <p14:creationId xmlns:p14="http://schemas.microsoft.com/office/powerpoint/2010/main" val="4038020069"/>
+        <p14:creationId xmlns:p14="http://schemas.microsoft.com/office/powerpoint/2010/main" val="602354063"/>
       </p:ext>
     </p:extLst>
   </p:cSld>
@@ -13152,7 +13152,7 @@
           <p:cNvPr id="7" name="creative_background">
             <a:extLst>
               <a:ext uri="{FF2B5EF4-FFF2-40B4-BE49-F238E27FC236}">
-                <a16:creationId xmlns:a16="http://schemas.microsoft.com/office/drawing/2014/main" id="{9834D430-13D7-42A3-BF75-A974DA6F9323}"/>
+                <a16:creationId xmlns:a16="http://schemas.microsoft.com/office/drawing/2014/main" id="{E2FC006B-F4EC-B1D7-C120-01FF073ECE95}"/>
               </a:ext>
             </a:extLst>
           </p:cNvPr>
@@ -13225,9 +13225,9 @@
           <a:bodyPr/>
           <a:lstStyle/>
           <a:p>
-            <a:fld id="{8A86AB56-393C-4917-9670-5C316C4C0775}" type="datetimeFigureOut">
+            <a:fld id="{A25588AC-933F-4B05-B4F9-0387B2A9C63D}" type="datetimeFigureOut">
               <a:rPr lang="en-US" smtClean="0"/>
-              <a:t>10/3/2026</a:t>
+              <a:t>10/4/2026</a:t>
             </a:fld>
             <a:endParaRPr lang="en-US"/>
           </a:p>
@@ -13267,7 +13267,7 @@
           <a:bodyPr/>
           <a:lstStyle/>
           <a:p>
-            <a:fld id="{FC63DECE-DCAF-48B3-9E38-EA00981B3229}" type="slidenum">
+            <a:fld id="{B96B5B2C-9731-4665-8499-523F6B9BFF00}" type="slidenum">
               <a:rPr lang="en-US" smtClean="0"/>
               <a:t>‹#›</a:t>
             </a:fld>
@@ -13280,7 +13280,7 @@
           <p:cNvPr id="8" name="item_1_title">
             <a:extLst>
               <a:ext uri="{FF2B5EF4-FFF2-40B4-BE49-F238E27FC236}">
-                <a16:creationId xmlns:a16="http://schemas.microsoft.com/office/drawing/2014/main" id="{03B3D000-60EB-3C7C-990E-918DE91EA422}"/>
+                <a16:creationId xmlns:a16="http://schemas.microsoft.com/office/drawing/2014/main" id="{CBE5C301-5030-1A4F-3F54-7DE03DE1285A}"/>
               </a:ext>
             </a:extLst>
           </p:cNvPr>
@@ -13330,7 +13330,7 @@
           <p:cNvPr id="9" name="item_1">
             <a:extLst>
               <a:ext uri="{FF2B5EF4-FFF2-40B4-BE49-F238E27FC236}">
-                <a16:creationId xmlns:a16="http://schemas.microsoft.com/office/drawing/2014/main" id="{ACFC3CBB-F8F0-B7FE-BD66-13444BA0034A}"/>
+                <a16:creationId xmlns:a16="http://schemas.microsoft.com/office/drawing/2014/main" id="{62CCA87B-840C-AC34-FDE3-92DE86C72A7F}"/>
               </a:ext>
             </a:extLst>
           </p:cNvPr>
@@ -13378,7 +13378,7 @@
           <p:cNvPr id="10" name="item_2_title">
             <a:extLst>
               <a:ext uri="{FF2B5EF4-FFF2-40B4-BE49-F238E27FC236}">
-                <a16:creationId xmlns:a16="http://schemas.microsoft.com/office/drawing/2014/main" id="{9C4B9076-FA5C-3EC4-824F-EF4C19EF0677}"/>
+                <a16:creationId xmlns:a16="http://schemas.microsoft.com/office/drawing/2014/main" id="{DDF5A274-1718-EC59-EC74-8BA271776C33}"/>
               </a:ext>
             </a:extLst>
           </p:cNvPr>
@@ -13431,7 +13431,7 @@
           <p:cNvPr id="11" name="item_2">
             <a:extLst>
               <a:ext uri="{FF2B5EF4-FFF2-40B4-BE49-F238E27FC236}">
-                <a16:creationId xmlns:a16="http://schemas.microsoft.com/office/drawing/2014/main" id="{73C08A91-AB39-F06F-8ACC-A23C9B258727}"/>
+                <a16:creationId xmlns:a16="http://schemas.microsoft.com/office/drawing/2014/main" id="{71464ADC-707F-B0C2-184E-69DE7D867209}"/>
               </a:ext>
             </a:extLst>
           </p:cNvPr>
@@ -13479,7 +13479,7 @@
           <p:cNvPr id="12" name="item_3_title">
             <a:extLst>
               <a:ext uri="{FF2B5EF4-FFF2-40B4-BE49-F238E27FC236}">
-                <a16:creationId xmlns:a16="http://schemas.microsoft.com/office/drawing/2014/main" id="{458FCDD5-C9DB-1A35-54B5-BC4253E418F8}"/>
+                <a16:creationId xmlns:a16="http://schemas.microsoft.com/office/drawing/2014/main" id="{311EDD6F-B339-D2AC-5863-1D1BED08D1AF}"/>
               </a:ext>
             </a:extLst>
           </p:cNvPr>
@@ -13532,7 +13532,7 @@
           <p:cNvPr id="13" name="item_3">
             <a:extLst>
               <a:ext uri="{FF2B5EF4-FFF2-40B4-BE49-F238E27FC236}">
-                <a16:creationId xmlns:a16="http://schemas.microsoft.com/office/drawing/2014/main" id="{E02C8871-1278-8E01-BB96-452B0A3AAAB5}"/>
+                <a16:creationId xmlns:a16="http://schemas.microsoft.com/office/drawing/2014/main" id="{14F7322C-3A96-26F8-4AF9-FF65EFA7B83E}"/>
               </a:ext>
             </a:extLst>
           </p:cNvPr>
@@ -13580,7 +13580,7 @@
           <p:cNvPr id="14" name="item_4_title">
             <a:extLst>
               <a:ext uri="{FF2B5EF4-FFF2-40B4-BE49-F238E27FC236}">
-                <a16:creationId xmlns:a16="http://schemas.microsoft.com/office/drawing/2014/main" id="{CF5C21CF-C8A9-4363-2249-003BBC110CF3}"/>
+                <a16:creationId xmlns:a16="http://schemas.microsoft.com/office/drawing/2014/main" id="{9A2DB3A7-DD8C-64F9-DFFB-A01D992ACF0E}"/>
               </a:ext>
             </a:extLst>
           </p:cNvPr>
@@ -13633,7 +13633,7 @@
           <p:cNvPr id="15" name="item_4">
             <a:extLst>
               <a:ext uri="{FF2B5EF4-FFF2-40B4-BE49-F238E27FC236}">
-                <a16:creationId xmlns:a16="http://schemas.microsoft.com/office/drawing/2014/main" id="{70CBF8A5-661F-3B85-767E-E91D8F93AD2C}"/>
+                <a16:creationId xmlns:a16="http://schemas.microsoft.com/office/drawing/2014/main" id="{618A4E32-FCD1-D16F-B929-C7092BF53E8C}"/>
               </a:ext>
             </a:extLst>
           </p:cNvPr>
@@ -13681,7 +13681,7 @@
           <p:cNvPr id="16" name="source">
             <a:extLst>
               <a:ext uri="{FF2B5EF4-FFF2-40B4-BE49-F238E27FC236}">
-                <a16:creationId xmlns:a16="http://schemas.microsoft.com/office/drawing/2014/main" id="{DFE969E6-02C0-D13A-22B3-62BF077F29CB}"/>
+                <a16:creationId xmlns:a16="http://schemas.microsoft.com/office/drawing/2014/main" id="{D3E0A694-465E-D5B4-6D51-2D51D25535B2}"/>
               </a:ext>
             </a:extLst>
           </p:cNvPr>
@@ -13736,7 +13736,7 @@
     </p:spTree>
     <p:extLst>
       <p:ext uri="{BB962C8B-B14F-4D97-AF65-F5344CB8AC3E}">
-        <p14:creationId xmlns:p14="http://schemas.microsoft.com/office/powerpoint/2010/main" val="3761840478"/>
+        <p14:creationId xmlns:p14="http://schemas.microsoft.com/office/powerpoint/2010/main" val="2278522851"/>
       </p:ext>
     </p:extLst>
   </p:cSld>
@@ -13773,7 +13773,7 @@
           <p:cNvPr id="9" name="creative_background_master">
             <a:extLst>
               <a:ext uri="{FF2B5EF4-FFF2-40B4-BE49-F238E27FC236}">
-                <a16:creationId xmlns:a16="http://schemas.microsoft.com/office/drawing/2014/main" id="{BB81384A-9FAE-1C79-E653-E7DBF48BB54A}"/>
+                <a16:creationId xmlns:a16="http://schemas.microsoft.com/office/drawing/2014/main" id="{D1EEA9C1-40FB-5C22-3830-473F144251A3}"/>
               </a:ext>
             </a:extLst>
           </p:cNvPr>
@@ -13934,9 +13934,9 @@
             </a:lvl1pPr>
           </a:lstStyle>
           <a:p>
-            <a:fld id="{8A86AB56-393C-4917-9670-5C316C4C0775}" type="datetimeFigureOut">
+            <a:fld id="{A25588AC-933F-4B05-B4F9-0387B2A9C63D}" type="datetimeFigureOut">
               <a:rPr lang="en-US" smtClean="0"/>
-              <a:t>10/3/2026</a:t>
+              <a:t>10/4/2026</a:t>
             </a:fld>
             <a:endParaRPr lang="en-US"/>
           </a:p>
@@ -14016,7 +14016,7 @@
             </a:lvl1pPr>
           </a:lstStyle>
           <a:p>
-            <a:fld id="{FC63DECE-DCAF-48B3-9E38-EA00981B3229}" type="slidenum">
+            <a:fld id="{B96B5B2C-9731-4665-8499-523F6B9BFF00}" type="slidenum">
               <a:rPr lang="en-US" smtClean="0"/>
               <a:t>‹#›</a:t>
             </a:fld>
@@ -14027,7 +14027,7 @@
     </p:spTree>
     <p:extLst>
       <p:ext uri="{BB962C8B-B14F-4D97-AF65-F5344CB8AC3E}">
-        <p14:creationId xmlns:p14="http://schemas.microsoft.com/office/powerpoint/2010/main" val="1272659141"/>
+        <p14:creationId xmlns:p14="http://schemas.microsoft.com/office/powerpoint/2010/main" val="782139770"/>
       </p:ext>
     </p:extLst>
   </p:cSld>
